--- a/Fiches de personnage.pptx
+++ b/Fiches de personnage.pptx
@@ -134,7 +134,7 @@
       </p:grpSpPr>
       <p:sp>
         <p:nvSpPr>
-          <p:cNvPr id="859451946" name="Espace réservé d'en-tête 1"/>
+          <p:cNvPr id="1208210375" name="Espace réservé d'en-tête 1"/>
           <p:cNvSpPr>
             <a:spLocks noGrp="1"/>
           </p:cNvSpPr>
@@ -168,7 +168,7 @@
       </p:sp>
       <p:sp>
         <p:nvSpPr>
-          <p:cNvPr id="1490229721" name="Espace réservé pour la date 2"/>
+          <p:cNvPr id="154166144" name="Espace réservé pour la date 2"/>
           <p:cNvSpPr>
             <a:spLocks noGrp="1"/>
           </p:cNvSpPr>
@@ -206,7 +206,7 @@
       </p:sp>
       <p:sp>
         <p:nvSpPr>
-          <p:cNvPr id="166479722" name="Espace réservé pour l'image de la diapositive 3"/>
+          <p:cNvPr id="303157669" name="Espace réservé pour l'image de la diapositive 3"/>
           <p:cNvSpPr>
             <a:spLocks noChangeAspect="1" noGrp="1" noRot="1"/>
           </p:cNvSpPr>
@@ -242,7 +242,7 @@
       </p:sp>
       <p:sp>
         <p:nvSpPr>
-          <p:cNvPr id="154745006" name="Remarques Espace réservé 4"/>
+          <p:cNvPr id="763404992" name="Remarques Espace réservé 4"/>
           <p:cNvSpPr>
             <a:spLocks noGrp="1"/>
           </p:cNvSpPr>
@@ -316,7 +316,7 @@
       </p:sp>
       <p:sp>
         <p:nvSpPr>
-          <p:cNvPr id="1334422887" name="Espace réservé du pied de page 5"/>
+          <p:cNvPr id="389131385" name="Espace réservé du pied de page 5"/>
           <p:cNvSpPr>
             <a:spLocks noGrp="1"/>
           </p:cNvSpPr>
@@ -350,7 +350,7 @@
       </p:sp>
       <p:sp>
         <p:nvSpPr>
-          <p:cNvPr id="140636748" name="Espace réservé du numéro de diapositive 6"/>
+          <p:cNvPr id="62636034" name="Espace réservé du numéro de diapositive 6"/>
           <p:cNvSpPr>
             <a:spLocks noGrp="1"/>
           </p:cNvSpPr>
@@ -503,7 +503,7 @@
       </p:grpSpPr>
       <p:sp>
         <p:nvSpPr>
-          <p:cNvPr id="1128545521" name="Espace réservé pour l'image de la diapositive 1"/>
+          <p:cNvPr id="1981943672" name="Espace réservé pour l'image de la diapositive 1"/>
           <p:cNvSpPr>
             <a:spLocks noChangeAspect="1" noGrp="1" noRot="1"/>
           </p:cNvSpPr>
@@ -520,7 +520,7 @@
       </p:sp>
       <p:sp>
         <p:nvSpPr>
-          <p:cNvPr id="1975791203" name="Remarques Espace réservé 2"/>
+          <p:cNvPr id="1233331315" name="Remarques Espace réservé 2"/>
           <p:cNvSpPr>
             <a:spLocks noGrp="1"/>
           </p:cNvSpPr>
@@ -545,7 +545,7 @@
       </p:sp>
       <p:sp>
         <p:nvSpPr>
-          <p:cNvPr id="1945428301" name="Espace réservé pour le numéro de diapositive 3"/>
+          <p:cNvPr id="1914529971" name="Espace réservé pour le numéro de diapositive 3"/>
           <p:cNvSpPr>
             <a:spLocks noGrp="1"/>
           </p:cNvSpPr>
@@ -596,7 +596,7 @@
       </p:grpSpPr>
       <p:sp>
         <p:nvSpPr>
-          <p:cNvPr id="115403257" name="Titre 1"/>
+          <p:cNvPr id="1338620562" name="Titre 1"/>
           <p:cNvSpPr>
             <a:spLocks noGrp="1"/>
           </p:cNvSpPr>
@@ -631,7 +631,7 @@
       </p:sp>
       <p:sp>
         <p:nvSpPr>
-          <p:cNvPr id="372665466" name="Sous-titre 2"/>
+          <p:cNvPr id="2002692759" name="Sous-titre 2"/>
           <p:cNvSpPr>
             <a:spLocks noGrp="1"/>
           </p:cNvSpPr>
@@ -699,7 +699,7 @@
       </p:sp>
       <p:sp>
         <p:nvSpPr>
-          <p:cNvPr id="1319541859" name="Espace réservé de la date 3"/>
+          <p:cNvPr id="1137924242" name="Espace réservé de la date 3"/>
           <p:cNvSpPr>
             <a:spLocks noGrp="1"/>
           </p:cNvSpPr>
@@ -725,7 +725,7 @@
       </p:sp>
       <p:sp>
         <p:nvSpPr>
-          <p:cNvPr id="1051232935" name="Espace réservé du pied de page 4"/>
+          <p:cNvPr id="1645479702" name="Espace réservé du pied de page 4"/>
           <p:cNvSpPr>
             <a:spLocks noGrp="1"/>
           </p:cNvSpPr>
@@ -747,7 +747,7 @@
       </p:sp>
       <p:sp>
         <p:nvSpPr>
-          <p:cNvPr id="216312351" name="Espace réservé du numéro de diapositive 5"/>
+          <p:cNvPr id="923456531" name="Espace réservé du numéro de diapositive 5"/>
           <p:cNvSpPr>
             <a:spLocks noGrp="1"/>
           </p:cNvSpPr>
@@ -798,7 +798,7 @@
       </p:grpSpPr>
       <p:sp>
         <p:nvSpPr>
-          <p:cNvPr id="1115461180" name="Titre 1"/>
+          <p:cNvPr id="1896698942" name="Titre 1"/>
           <p:cNvSpPr>
             <a:spLocks noGrp="1"/>
           </p:cNvSpPr>
@@ -824,7 +824,7 @@
       </p:sp>
       <p:sp>
         <p:nvSpPr>
-          <p:cNvPr id="1603780528" name="Espace réservé du texte vertical 2"/>
+          <p:cNvPr id="1625423820" name="Espace réservé du texte vertical 2"/>
           <p:cNvSpPr>
             <a:spLocks noGrp="1"/>
           </p:cNvSpPr>
@@ -890,7 +890,7 @@
       </p:sp>
       <p:sp>
         <p:nvSpPr>
-          <p:cNvPr id="303188643" name="Espace réservé de la date 3"/>
+          <p:cNvPr id="2131240385" name="Espace réservé de la date 3"/>
           <p:cNvSpPr>
             <a:spLocks noGrp="1"/>
           </p:cNvSpPr>
@@ -916,7 +916,7 @@
       </p:sp>
       <p:sp>
         <p:nvSpPr>
-          <p:cNvPr id="368182462" name="Espace réservé du pied de page 4"/>
+          <p:cNvPr id="40271352" name="Espace réservé du pied de page 4"/>
           <p:cNvSpPr>
             <a:spLocks noGrp="1"/>
           </p:cNvSpPr>
@@ -938,7 +938,7 @@
       </p:sp>
       <p:sp>
         <p:nvSpPr>
-          <p:cNvPr id="1743172262" name="Espace réservé du numéro de diapositive 5"/>
+          <p:cNvPr id="1293142085" name="Espace réservé du numéro de diapositive 5"/>
           <p:cNvSpPr>
             <a:spLocks noGrp="1"/>
           </p:cNvSpPr>
@@ -989,7 +989,7 @@
       </p:grpSpPr>
       <p:sp>
         <p:nvSpPr>
-          <p:cNvPr id="1287913509" name="Titre vertical 1"/>
+          <p:cNvPr id="474958769" name="Titre vertical 1"/>
           <p:cNvSpPr>
             <a:spLocks noGrp="1"/>
           </p:cNvSpPr>
@@ -1020,7 +1020,7 @@
       </p:sp>
       <p:sp>
         <p:nvSpPr>
-          <p:cNvPr id="1975878081" name="Espace réservé du texte vertical 2"/>
+          <p:cNvPr id="573587417" name="Espace réservé du texte vertical 2"/>
           <p:cNvSpPr>
             <a:spLocks noGrp="1"/>
           </p:cNvSpPr>
@@ -1091,7 +1091,7 @@
       </p:sp>
       <p:sp>
         <p:nvSpPr>
-          <p:cNvPr id="2119364497" name="Espace réservé de la date 3"/>
+          <p:cNvPr id="897553112" name="Espace réservé de la date 3"/>
           <p:cNvSpPr>
             <a:spLocks noGrp="1"/>
           </p:cNvSpPr>
@@ -1117,7 +1117,7 @@
       </p:sp>
       <p:sp>
         <p:nvSpPr>
-          <p:cNvPr id="1321032530" name="Espace réservé du pied de page 4"/>
+          <p:cNvPr id="550422977" name="Espace réservé du pied de page 4"/>
           <p:cNvSpPr>
             <a:spLocks noGrp="1"/>
           </p:cNvSpPr>
@@ -1139,7 +1139,7 @@
       </p:sp>
       <p:sp>
         <p:nvSpPr>
-          <p:cNvPr id="928547651" name="Espace réservé du numéro de diapositive 5"/>
+          <p:cNvPr id="1445833375" name="Espace réservé du numéro de diapositive 5"/>
           <p:cNvSpPr>
             <a:spLocks noGrp="1"/>
           </p:cNvSpPr>
@@ -1190,7 +1190,7 @@
       </p:grpSpPr>
       <p:sp>
         <p:nvSpPr>
-          <p:cNvPr id="1668461945" name="Titre 1"/>
+          <p:cNvPr id="234644956" name="Titre 1"/>
           <p:cNvSpPr>
             <a:spLocks noGrp="1"/>
           </p:cNvSpPr>
@@ -1216,7 +1216,7 @@
       </p:sp>
       <p:sp>
         <p:nvSpPr>
-          <p:cNvPr id="552047269" name="Espace réservé du contenu 2"/>
+          <p:cNvPr id="1832799155" name="Espace réservé du contenu 2"/>
           <p:cNvSpPr>
             <a:spLocks noGrp="1"/>
           </p:cNvSpPr>
@@ -1282,7 +1282,7 @@
       </p:sp>
       <p:sp>
         <p:nvSpPr>
-          <p:cNvPr id="1048588524" name="Espace réservé de la date 3"/>
+          <p:cNvPr id="1326258914" name="Espace réservé de la date 3"/>
           <p:cNvSpPr>
             <a:spLocks noGrp="1"/>
           </p:cNvSpPr>
@@ -1308,7 +1308,7 @@
       </p:sp>
       <p:sp>
         <p:nvSpPr>
-          <p:cNvPr id="198454354" name="Espace réservé du pied de page 4"/>
+          <p:cNvPr id="206339101" name="Espace réservé du pied de page 4"/>
           <p:cNvSpPr>
             <a:spLocks noGrp="1"/>
           </p:cNvSpPr>
@@ -1330,7 +1330,7 @@
       </p:sp>
       <p:sp>
         <p:nvSpPr>
-          <p:cNvPr id="1881245584" name="Espace réservé du numéro de diapositive 5"/>
+          <p:cNvPr id="2073200755" name="Espace réservé du numéro de diapositive 5"/>
           <p:cNvSpPr>
             <a:spLocks noGrp="1"/>
           </p:cNvSpPr>
@@ -1381,7 +1381,7 @@
       </p:grpSpPr>
       <p:sp>
         <p:nvSpPr>
-          <p:cNvPr id="1125121620" name="Titre 1"/>
+          <p:cNvPr id="1641815020" name="Titre 1"/>
           <p:cNvSpPr>
             <a:spLocks noGrp="1"/>
           </p:cNvSpPr>
@@ -1416,7 +1416,7 @@
       </p:sp>
       <p:sp>
         <p:nvSpPr>
-          <p:cNvPr id="2107198918" name="Espace réservé du texte 2"/>
+          <p:cNvPr id="876906199" name="Espace réservé du texte 2"/>
           <p:cNvSpPr>
             <a:spLocks noGrp="1"/>
           </p:cNvSpPr>
@@ -1538,7 +1538,7 @@
       </p:sp>
       <p:sp>
         <p:nvSpPr>
-          <p:cNvPr id="1964740153" name="Espace réservé de la date 3"/>
+          <p:cNvPr id="1729515349" name="Espace réservé de la date 3"/>
           <p:cNvSpPr>
             <a:spLocks noGrp="1"/>
           </p:cNvSpPr>
@@ -1564,7 +1564,7 @@
       </p:sp>
       <p:sp>
         <p:nvSpPr>
-          <p:cNvPr id="178030513" name="Espace réservé du pied de page 4"/>
+          <p:cNvPr id="760377912" name="Espace réservé du pied de page 4"/>
           <p:cNvSpPr>
             <a:spLocks noGrp="1"/>
           </p:cNvSpPr>
@@ -1586,7 +1586,7 @@
       </p:sp>
       <p:sp>
         <p:nvSpPr>
-          <p:cNvPr id="957648100" name="Espace réservé du numéro de diapositive 5"/>
+          <p:cNvPr id="665723741" name="Espace réservé du numéro de diapositive 5"/>
           <p:cNvSpPr>
             <a:spLocks noGrp="1"/>
           </p:cNvSpPr>
@@ -1637,7 +1637,7 @@
       </p:grpSpPr>
       <p:sp>
         <p:nvSpPr>
-          <p:cNvPr id="1248535906" name="Titre 1"/>
+          <p:cNvPr id="2145966743" name="Titre 1"/>
           <p:cNvSpPr>
             <a:spLocks noGrp="1"/>
           </p:cNvSpPr>
@@ -1663,7 +1663,7 @@
       </p:sp>
       <p:sp>
         <p:nvSpPr>
-          <p:cNvPr id="1575929105" name="Espace réservé du contenu 2"/>
+          <p:cNvPr id="114826324" name="Espace réservé du contenu 2"/>
           <p:cNvSpPr>
             <a:spLocks noGrp="1"/>
           </p:cNvSpPr>
@@ -1734,7 +1734,7 @@
       </p:sp>
       <p:sp>
         <p:nvSpPr>
-          <p:cNvPr id="800164411" name="Espace réservé du contenu 3"/>
+          <p:cNvPr id="729329396" name="Espace réservé du contenu 3"/>
           <p:cNvSpPr>
             <a:spLocks noGrp="1"/>
           </p:cNvSpPr>
@@ -1805,7 +1805,7 @@
       </p:sp>
       <p:sp>
         <p:nvSpPr>
-          <p:cNvPr id="1951302183" name="Espace réservé de la date 4"/>
+          <p:cNvPr id="182743329" name="Espace réservé de la date 4"/>
           <p:cNvSpPr>
             <a:spLocks noGrp="1"/>
           </p:cNvSpPr>
@@ -1831,7 +1831,7 @@
       </p:sp>
       <p:sp>
         <p:nvSpPr>
-          <p:cNvPr id="494248265" name="Espace réservé du pied de page 5"/>
+          <p:cNvPr id="1692699419" name="Espace réservé du pied de page 5"/>
           <p:cNvSpPr>
             <a:spLocks noGrp="1"/>
           </p:cNvSpPr>
@@ -1853,7 +1853,7 @@
       </p:sp>
       <p:sp>
         <p:nvSpPr>
-          <p:cNvPr id="1527437927" name="Espace réservé du numéro de diapositive 6"/>
+          <p:cNvPr id="702853398" name="Espace réservé du numéro de diapositive 6"/>
           <p:cNvSpPr>
             <a:spLocks noGrp="1"/>
           </p:cNvSpPr>
@@ -1904,7 +1904,7 @@
       </p:grpSpPr>
       <p:sp>
         <p:nvSpPr>
-          <p:cNvPr id="1198369992" name="Titre 1"/>
+          <p:cNvPr id="1353537605" name="Titre 1"/>
           <p:cNvSpPr>
             <a:spLocks noGrp="1"/>
           </p:cNvSpPr>
@@ -1935,7 +1935,7 @@
       </p:sp>
       <p:sp>
         <p:nvSpPr>
-          <p:cNvPr id="1928995848" name="Espace réservé du texte 2"/>
+          <p:cNvPr id="311807422" name="Espace réservé du texte 2"/>
           <p:cNvSpPr>
             <a:spLocks noGrp="1"/>
           </p:cNvSpPr>
@@ -2003,7 +2003,7 @@
       </p:sp>
       <p:sp>
         <p:nvSpPr>
-          <p:cNvPr id="680271464" name="Espace réservé du contenu 3"/>
+          <p:cNvPr id="2040202310" name="Espace réservé du contenu 3"/>
           <p:cNvSpPr>
             <a:spLocks noGrp="1"/>
           </p:cNvSpPr>
@@ -2074,7 +2074,7 @@
       </p:sp>
       <p:sp>
         <p:nvSpPr>
-          <p:cNvPr id="709792003" name="Espace réservé du texte 4"/>
+          <p:cNvPr id="1844831062" name="Espace réservé du texte 4"/>
           <p:cNvSpPr>
             <a:spLocks noGrp="1"/>
           </p:cNvSpPr>
@@ -2142,7 +2142,7 @@
       </p:sp>
       <p:sp>
         <p:nvSpPr>
-          <p:cNvPr id="106773498" name="Espace réservé du contenu 5"/>
+          <p:cNvPr id="599157616" name="Espace réservé du contenu 5"/>
           <p:cNvSpPr>
             <a:spLocks noGrp="1"/>
           </p:cNvSpPr>
@@ -2213,7 +2213,7 @@
       </p:sp>
       <p:sp>
         <p:nvSpPr>
-          <p:cNvPr id="1857673627" name="Espace réservé de la date 6"/>
+          <p:cNvPr id="921260051" name="Espace réservé de la date 6"/>
           <p:cNvSpPr>
             <a:spLocks noGrp="1"/>
           </p:cNvSpPr>
@@ -2239,7 +2239,7 @@
       </p:sp>
       <p:sp>
         <p:nvSpPr>
-          <p:cNvPr id="1365281441" name="Espace réservé du pied de page 7"/>
+          <p:cNvPr id="1702663857" name="Espace réservé du pied de page 7"/>
           <p:cNvSpPr>
             <a:spLocks noGrp="1"/>
           </p:cNvSpPr>
@@ -2261,7 +2261,7 @@
       </p:sp>
       <p:sp>
         <p:nvSpPr>
-          <p:cNvPr id="7869369" name="Espace réservé du numéro de diapositive 8"/>
+          <p:cNvPr id="1219903340" name="Espace réservé du numéro de diapositive 8"/>
           <p:cNvSpPr>
             <a:spLocks noGrp="1"/>
           </p:cNvSpPr>
@@ -2312,7 +2312,7 @@
       </p:grpSpPr>
       <p:sp>
         <p:nvSpPr>
-          <p:cNvPr id="231263847" name="Titre 1"/>
+          <p:cNvPr id="30562056" name="Titre 1"/>
           <p:cNvSpPr>
             <a:spLocks noGrp="1"/>
           </p:cNvSpPr>
@@ -2338,7 +2338,7 @@
       </p:sp>
       <p:sp>
         <p:nvSpPr>
-          <p:cNvPr id="1347364811" name="Espace réservé de la date 2"/>
+          <p:cNvPr id="1660885230" name="Espace réservé de la date 2"/>
           <p:cNvSpPr>
             <a:spLocks noGrp="1"/>
           </p:cNvSpPr>
@@ -2364,7 +2364,7 @@
       </p:sp>
       <p:sp>
         <p:nvSpPr>
-          <p:cNvPr id="995875413" name="Espace réservé du pied de page 3"/>
+          <p:cNvPr id="348929351" name="Espace réservé du pied de page 3"/>
           <p:cNvSpPr>
             <a:spLocks noGrp="1"/>
           </p:cNvSpPr>
@@ -2386,7 +2386,7 @@
       </p:sp>
       <p:sp>
         <p:nvSpPr>
-          <p:cNvPr id="958935798" name="Espace réservé du numéro de diapositive 4"/>
+          <p:cNvPr id="1475891362" name="Espace réservé du numéro de diapositive 4"/>
           <p:cNvSpPr>
             <a:spLocks noGrp="1"/>
           </p:cNvSpPr>
@@ -2437,7 +2437,7 @@
       </p:grpSpPr>
       <p:sp>
         <p:nvSpPr>
-          <p:cNvPr id="1815233445" name="Espace réservé de la date 1"/>
+          <p:cNvPr id="1011353582" name="Espace réservé de la date 1"/>
           <p:cNvSpPr>
             <a:spLocks noGrp="1"/>
           </p:cNvSpPr>
@@ -2463,7 +2463,7 @@
       </p:sp>
       <p:sp>
         <p:nvSpPr>
-          <p:cNvPr id="1678895802" name="Espace réservé du pied de page 2"/>
+          <p:cNvPr id="838437322" name="Espace réservé du pied de page 2"/>
           <p:cNvSpPr>
             <a:spLocks noGrp="1"/>
           </p:cNvSpPr>
@@ -2485,7 +2485,7 @@
       </p:sp>
       <p:sp>
         <p:nvSpPr>
-          <p:cNvPr id="505528751" name="Espace réservé du numéro de diapositive 3"/>
+          <p:cNvPr id="1554045995" name="Espace réservé du numéro de diapositive 3"/>
           <p:cNvSpPr>
             <a:spLocks noGrp="1"/>
           </p:cNvSpPr>
@@ -2536,7 +2536,7 @@
       </p:grpSpPr>
       <p:sp>
         <p:nvSpPr>
-          <p:cNvPr id="136408648" name="Titre 1"/>
+          <p:cNvPr id="1244552095" name="Titre 1"/>
           <p:cNvSpPr>
             <a:spLocks noGrp="1"/>
           </p:cNvSpPr>
@@ -2571,7 +2571,7 @@
       </p:sp>
       <p:sp>
         <p:nvSpPr>
-          <p:cNvPr id="1248499309" name="Espace réservé du contenu 2"/>
+          <p:cNvPr id="1332500614" name="Espace réservé du contenu 2"/>
           <p:cNvSpPr>
             <a:spLocks noGrp="1"/>
           </p:cNvSpPr>
@@ -2670,7 +2670,7 @@
       </p:sp>
       <p:sp>
         <p:nvSpPr>
-          <p:cNvPr id="506094301" name="Espace réservé du texte 3"/>
+          <p:cNvPr id="279642324" name="Espace réservé du texte 3"/>
           <p:cNvSpPr>
             <a:spLocks noGrp="1"/>
           </p:cNvSpPr>
@@ -2738,7 +2738,7 @@
       </p:sp>
       <p:sp>
         <p:nvSpPr>
-          <p:cNvPr id="1853220370" name="Espace réservé de la date 4"/>
+          <p:cNvPr id="1936961580" name="Espace réservé de la date 4"/>
           <p:cNvSpPr>
             <a:spLocks noGrp="1"/>
           </p:cNvSpPr>
@@ -2764,7 +2764,7 @@
       </p:sp>
       <p:sp>
         <p:nvSpPr>
-          <p:cNvPr id="1082300266" name="Espace réservé du pied de page 5"/>
+          <p:cNvPr id="1606380555" name="Espace réservé du pied de page 5"/>
           <p:cNvSpPr>
             <a:spLocks noGrp="1"/>
           </p:cNvSpPr>
@@ -2786,7 +2786,7 @@
       </p:sp>
       <p:sp>
         <p:nvSpPr>
-          <p:cNvPr id="1967597120" name="Espace réservé du numéro de diapositive 6"/>
+          <p:cNvPr id="689565631" name="Espace réservé du numéro de diapositive 6"/>
           <p:cNvSpPr>
             <a:spLocks noGrp="1"/>
           </p:cNvSpPr>
@@ -2837,7 +2837,7 @@
       </p:grpSpPr>
       <p:sp>
         <p:nvSpPr>
-          <p:cNvPr id="1281117566" name="Titre 1"/>
+          <p:cNvPr id="1895678046" name="Titre 1"/>
           <p:cNvSpPr>
             <a:spLocks noGrp="1"/>
           </p:cNvSpPr>
@@ -2872,7 +2872,7 @@
       </p:sp>
       <p:sp>
         <p:nvSpPr>
-          <p:cNvPr id="1264284827" name="Espace réservé pour une image 2"/>
+          <p:cNvPr id="1773372013" name="Espace réservé pour une image 2"/>
           <p:cNvSpPr>
             <a:spLocks noChangeAspect="1" noGrp="1"/>
           </p:cNvSpPr>
@@ -2940,7 +2940,7 @@
       </p:sp>
       <p:sp>
         <p:nvSpPr>
-          <p:cNvPr id="1372135214" name="Espace réservé du texte 3"/>
+          <p:cNvPr id="802506072" name="Espace réservé du texte 3"/>
           <p:cNvSpPr>
             <a:spLocks noGrp="1"/>
           </p:cNvSpPr>
@@ -3008,7 +3008,7 @@
       </p:sp>
       <p:sp>
         <p:nvSpPr>
-          <p:cNvPr id="1868481755" name="Espace réservé de la date 4"/>
+          <p:cNvPr id="235492898" name="Espace réservé de la date 4"/>
           <p:cNvSpPr>
             <a:spLocks noGrp="1"/>
           </p:cNvSpPr>
@@ -3034,7 +3034,7 @@
       </p:sp>
       <p:sp>
         <p:nvSpPr>
-          <p:cNvPr id="110814772" name="Espace réservé du pied de page 5"/>
+          <p:cNvPr id="645386469" name="Espace réservé du pied de page 5"/>
           <p:cNvSpPr>
             <a:spLocks noGrp="1"/>
           </p:cNvSpPr>
@@ -3056,7 +3056,7 @@
       </p:sp>
       <p:sp>
         <p:nvSpPr>
-          <p:cNvPr id="928171546" name="Espace réservé du numéro de diapositive 6"/>
+          <p:cNvPr id="23956570" name="Espace réservé du numéro de diapositive 6"/>
           <p:cNvSpPr>
             <a:spLocks noGrp="1"/>
           </p:cNvSpPr>
@@ -3112,7 +3112,7 @@
       </p:grpSpPr>
       <p:sp>
         <p:nvSpPr>
-          <p:cNvPr id="602169155" name="Espace réservé du titre 1"/>
+          <p:cNvPr id="1606301704" name="Espace réservé du titre 1"/>
           <p:cNvSpPr>
             <a:spLocks noGrp="1"/>
           </p:cNvSpPr>
@@ -3148,7 +3148,7 @@
       </p:sp>
       <p:sp>
         <p:nvSpPr>
-          <p:cNvPr id="803520524" name="Espace réservé du texte 2"/>
+          <p:cNvPr id="799596015" name="Espace réservé du texte 2"/>
           <p:cNvSpPr>
             <a:spLocks noGrp="1"/>
           </p:cNvSpPr>
@@ -3224,7 +3224,7 @@
       </p:sp>
       <p:sp>
         <p:nvSpPr>
-          <p:cNvPr id="1969947079" name="Espace réservé de la date 3"/>
+          <p:cNvPr id="1682888038" name="Espace réservé de la date 3"/>
           <p:cNvSpPr>
             <a:spLocks noGrp="1"/>
           </p:cNvSpPr>
@@ -3268,7 +3268,7 @@
       </p:sp>
       <p:sp>
         <p:nvSpPr>
-          <p:cNvPr id="803775996" name="Espace réservé du pied de page 4"/>
+          <p:cNvPr id="864695244" name="Espace réservé du pied de page 4"/>
           <p:cNvSpPr>
             <a:spLocks noGrp="1"/>
           </p:cNvSpPr>
@@ -3308,7 +3308,7 @@
       </p:sp>
       <p:sp>
         <p:nvSpPr>
-          <p:cNvPr id="3964630" name="Espace réservé du numéro de diapositive 5"/>
+          <p:cNvPr id="1985743681" name="Espace réservé du numéro de diapositive 5"/>
           <p:cNvSpPr>
             <a:spLocks noGrp="1"/>
           </p:cNvSpPr>
@@ -3668,7 +3668,7 @@
       </p:grpSpPr>
       <p:sp>
         <p:nvSpPr>
-          <p:cNvPr id="572974696" name=""/>
+          <p:cNvPr id="1538786297" name=""/>
           <p:cNvSpPr/>
           <p:nvPr/>
         </p:nvSpPr>
@@ -3711,7 +3711,7 @@
       </p:sp>
       <p:sp>
         <p:nvSpPr>
-          <p:cNvPr id="1844935210" name="ZoneTexte 1527388901"/>
+          <p:cNvPr id="1667810064" name="ZoneTexte 1527388901"/>
           <p:cNvSpPr txBox="1"/>
           <p:nvPr/>
         </p:nvSpPr>
@@ -4155,14 +4155,14 @@
       </p:sp>
       <p:sp>
         <p:nvSpPr>
-          <p:cNvPr id="800597346" name=""/>
+          <p:cNvPr id="1910919430" name=""/>
           <p:cNvSpPr/>
           <p:nvPr/>
         </p:nvSpPr>
         <p:spPr bwMode="auto">
           <a:xfrm rot="0" flipH="0" flipV="0">
-            <a:off x="-19713" y="2354035"/>
-            <a:ext cx="4660038" cy="3238499"/>
+            <a:off x="-19712" y="2354034"/>
+            <a:ext cx="4569260" cy="3238498"/>
           </a:xfrm>
           <a:prstGeom prst="rect">
             <a:avLst/>
@@ -4198,14 +4198,14 @@
       </p:sp>
       <p:sp>
         <p:nvSpPr>
-          <p:cNvPr id="1936042313" name=""/>
+          <p:cNvPr id="681903830" name=""/>
           <p:cNvSpPr/>
           <p:nvPr/>
         </p:nvSpPr>
         <p:spPr bwMode="auto">
           <a:xfrm rot="0" flipH="0" flipV="0">
-            <a:off x="83769" y="2420283"/>
-            <a:ext cx="2193146" cy="973547"/>
+            <a:off x="83768" y="2420282"/>
+            <a:ext cx="2146353" cy="973546"/>
           </a:xfrm>
           <a:prstGeom prst="snip1Rect">
             <a:avLst>
@@ -4244,7 +4244,7 @@
       </p:sp>
       <p:cxnSp>
         <p:nvCxnSpPr>
-          <p:cNvPr id="965745276" name="Connecteur droit 1568760680"/>
+          <p:cNvPr id="1463313752" name="Connecteur droit 1568760680"/>
           <p:cNvCxnSpPr/>
           <p:nvPr/>
         </p:nvCxnSpPr>
@@ -4285,7 +4285,7 @@
       </p:cxnSp>
       <p:sp>
         <p:nvSpPr>
-          <p:cNvPr id="2092374416" name="ZoneTexte 1868728971"/>
+          <p:cNvPr id="402371858" name="ZoneTexte 1868728971"/>
           <p:cNvSpPr txBox="1"/>
           <p:nvPr/>
         </p:nvSpPr>
@@ -4342,14 +4342,14 @@
       </p:sp>
       <p:cxnSp>
         <p:nvCxnSpPr>
-          <p:cNvPr id="1717309567" name="Connecteur droit 806540798"/>
+          <p:cNvPr id="692887687" name="Connecteur droit 806540798"/>
           <p:cNvCxnSpPr/>
           <p:nvPr/>
         </p:nvCxnSpPr>
         <p:spPr bwMode="auto">
           <a:xfrm flipH="0" flipV="1">
-            <a:off x="4710807" y="2949792"/>
-            <a:ext cx="2215236" cy="0"/>
+            <a:off x="4637537" y="3316137"/>
+            <a:ext cx="2228840" cy="0"/>
           </a:xfrm>
           <a:prstGeom prst="line">
             <a:avLst/>
@@ -4383,13 +4383,13 @@
       </p:cxnSp>
       <p:sp>
         <p:nvSpPr>
-          <p:cNvPr id="52545317" name="ZoneTexte 406616703"/>
+          <p:cNvPr id="1756458964" name="ZoneTexte 406616703"/>
           <p:cNvSpPr txBox="1"/>
           <p:nvPr/>
         </p:nvSpPr>
         <p:spPr bwMode="auto">
           <a:xfrm flipH="0" flipV="0">
-            <a:off x="4744825" y="2766731"/>
+            <a:off x="4671554" y="3133077"/>
             <a:ext cx="1195114" cy="366120"/>
           </a:xfrm>
           <a:prstGeom prst="rect">
@@ -4426,7 +4426,7 @@
       </p:sp>
       <p:sp>
         <p:nvSpPr>
-          <p:cNvPr id="113107096" name="ZoneTexte 2018177722"/>
+          <p:cNvPr id="603449133" name="ZoneTexte 2018177722"/>
           <p:cNvSpPr txBox="1"/>
           <p:nvPr/>
         </p:nvSpPr>
@@ -4476,14 +4476,14 @@
       </p:sp>
       <p:sp>
         <p:nvSpPr>
-          <p:cNvPr id="1591931471" name="ZoneTexte 1302587497"/>
+          <p:cNvPr id="1207578619" name="ZoneTexte 1302587497"/>
           <p:cNvSpPr txBox="1"/>
           <p:nvPr/>
         </p:nvSpPr>
         <p:spPr bwMode="auto">
           <a:xfrm flipH="0" flipV="0">
-            <a:off x="142541" y="563517"/>
-            <a:ext cx="3865552" cy="1508134"/>
+            <a:off x="142539" y="563517"/>
+            <a:ext cx="3884270" cy="1508134"/>
           </a:xfrm>
           <a:prstGeom prst="rect">
             <a:avLst/>
@@ -4514,7 +4514,7 @@
                 <a:ea typeface="ComicNeueSansID"/>
                 <a:cs typeface="ComicNeueSansID"/>
               </a:rPr>
-              <a:t>Surnom</a:t>
+              <a:t>Identité de super </a:t>
             </a:r>
             <a:r>
               <a:rPr sz="1000">
@@ -4522,54 +4522,38 @@
                 <a:ea typeface="ComicNeueSansID"/>
                 <a:cs typeface="ComicNeueSansID"/>
               </a:rPr>
-              <a:t> </a:t>
-            </a:r>
+              <a:t>:</a:t>
+            </a:r>
+            <a:r>
+              <a:rPr lang="fr-FR" sz="1000" b="0" i="0" u="none" strike="noStrike" cap="none" spc="0">
+                <a:solidFill>
+                  <a:schemeClr val="bg2">
+                    <a:lumMod val="90000"/>
+                  </a:schemeClr>
+                </a:solidFill>
+                <a:latin typeface="Arial"/>
+                <a:ea typeface="Arial"/>
+                <a:cs typeface="Arial"/>
+              </a:rPr>
+              <a:t> ___________________________________</a:t>
+            </a:r>
+            <a:br>
+              <a:rPr sz="1000"/>
+            </a:br>
             <a:r>
               <a:rPr sz="1000">
                 <a:latin typeface="ComicNeueSansID"/>
                 <a:ea typeface="ComicNeueSansID"/>
                 <a:cs typeface="ComicNeueSansID"/>
               </a:rPr>
-              <a:t>:</a:t>
-            </a:r>
-            <a:r>
-              <a:rPr lang="fr-FR" sz="1000" b="0" i="0" u="none" strike="noStrike" cap="none" spc="0">
-                <a:solidFill>
-                  <a:schemeClr val="bg2">
-                    <a:lumMod val="90000"/>
-                  </a:schemeClr>
-                </a:solidFill>
-                <a:latin typeface="Arial"/>
-                <a:ea typeface="Arial"/>
-                <a:cs typeface="Arial"/>
-              </a:rPr>
-              <a:t> __________________________________________</a:t>
-            </a:r>
-            <a:br>
-              <a:rPr sz="1000"/>
-            </a:br>
+              <a:t>Identité civile </a:t>
+            </a:r>
             <a:r>
               <a:rPr sz="1000">
                 <a:latin typeface="ComicNeueSansID"/>
                 <a:ea typeface="ComicNeueSansID"/>
                 <a:cs typeface="ComicNeueSansID"/>
               </a:rPr>
-              <a:t>Nom</a:t>
-            </a:r>
-            <a:r>
-              <a:rPr sz="1000">
-                <a:latin typeface="ComicNeueSansID"/>
-                <a:ea typeface="ComicNeueSansID"/>
-                <a:cs typeface="ComicNeueSansID"/>
-              </a:rPr>
-              <a:t> </a:t>
-            </a:r>
-            <a:r>
-              <a:rPr sz="1000">
-                <a:latin typeface="ComicNeueSansID"/>
-                <a:ea typeface="ComicNeueSansID"/>
-                <a:cs typeface="ComicNeueSansID"/>
-              </a:rPr>
               <a:t>:</a:t>
             </a:r>
             <a:r>
@@ -4580,7 +4564,7 @@
                   </a:schemeClr>
                 </a:solidFill>
               </a:rPr>
-              <a:t> ____________________________________________</a:t>
+              <a:t>_______________________________________</a:t>
             </a:r>
             <a:endParaRPr/>
           </a:p>
@@ -4789,7 +4773,7 @@
                   </a:schemeClr>
                 </a:solidFill>
               </a:rPr>
-              <a:t>_________________</a:t>
+              <a:t>________________</a:t>
             </a:r>
             <a:endParaRPr/>
           </a:p>
@@ -4847,7 +4831,7 @@
       </p:sp>
       <p:cxnSp>
         <p:nvCxnSpPr>
-          <p:cNvPr id="199944628" name="Connecteur droit 342798987"/>
+          <p:cNvPr id="695690565" name="Connecteur droit 342798987"/>
           <p:cNvCxnSpPr/>
           <p:nvPr/>
         </p:nvCxnSpPr>
@@ -4888,7 +4872,7 @@
       </p:cxnSp>
       <p:sp>
         <p:nvSpPr>
-          <p:cNvPr id="947162490" name="ZoneTexte 966486802"/>
+          <p:cNvPr id="229361036" name="ZoneTexte 966486802"/>
           <p:cNvSpPr txBox="1"/>
           <p:nvPr/>
         </p:nvSpPr>
@@ -4931,13 +4915,13 @@
       </p:sp>
       <p:sp>
         <p:nvSpPr>
-          <p:cNvPr id="1517250762" name="Rectangle 38344096"/>
+          <p:cNvPr id="750979298" name="Rectangle 38344096"/>
           <p:cNvSpPr/>
           <p:nvPr/>
         </p:nvSpPr>
         <p:spPr bwMode="auto">
           <a:xfrm flipH="0" flipV="0">
-            <a:off x="3678865" y="298814"/>
+            <a:off x="3642230" y="298813"/>
             <a:ext cx="168518" cy="1739168"/>
           </a:xfrm>
           <a:prstGeom prst="rect">
@@ -4971,80 +4955,14 @@
       </p:sp>
       <p:sp>
         <p:nvSpPr>
-          <p:cNvPr id="1464999668" name="ZoneTexte 1527388901"/>
+          <p:cNvPr id="1092231530" name=""/>
           <p:cNvSpPr txBox="1"/>
           <p:nvPr/>
         </p:nvSpPr>
         <p:spPr bwMode="auto">
-          <a:xfrm flipH="0" flipV="0">
-            <a:off x="4741267" y="6429585"/>
-            <a:ext cx="2154263" cy="1692000"/>
-          </a:xfrm>
-          <a:prstGeom prst="rect">
-            <a:avLst/>
-          </a:prstGeom>
-          <a:noFill/>
-        </p:spPr>
-        <p:txBody>
-          <a:bodyPr vertOverflow="overflow" horzOverflow="overflow" vert="horz" wrap="square" lIns="91440" tIns="45720" rIns="91440" bIns="45720" numCol="1" spcCol="0" rtlCol="0" fromWordArt="0" anchor="t" anchorCtr="0" forceAA="0" compatLnSpc="0">
-            <a:spAutoFit/>
-          </a:bodyPr>
-          <a:lstStyle/>
-          <a:p>
-            <a:pPr>
-              <a:lnSpc>
-                <a:spcPct val="150000"/>
-              </a:lnSpc>
-              <a:defRPr/>
-            </a:pPr>
-            <a:r>
-              <a:rPr lang="fr-FR" sz="1000" b="0" i="0" u="none" strike="noStrike" cap="none" spc="0">
-                <a:solidFill>
-                  <a:schemeClr val="bg2">
-                    <a:lumMod val="90000"/>
-                  </a:schemeClr>
-                </a:solidFill>
-                <a:latin typeface="Arial"/>
-                <a:ea typeface="Arial"/>
-                <a:cs typeface="Arial"/>
-              </a:rPr>
-              <a:t>_____</a:t>
-            </a:r>
-            <a:r>
-              <a:rPr lang="fr-FR" sz="1000" b="0" i="0" u="none" strike="noStrike" cap="none" spc="0">
-                <a:solidFill>
-                  <a:schemeClr val="bg2">
-                    <a:lumMod val="90000"/>
-                  </a:schemeClr>
-                </a:solidFill>
-                <a:latin typeface="Arial"/>
-                <a:ea typeface="Arial"/>
-                <a:cs typeface="Arial"/>
-              </a:rPr>
-              <a:t>________________________________________________________________________________________________________________________________________________________________________________________</a:t>
-            </a:r>
-            <a:endParaRPr sz="1000" b="0" i="0" u="none" strike="noStrike" cap="none" spc="0">
-              <a:solidFill>
-                <a:schemeClr val="bg2">
-                  <a:lumMod val="90000"/>
-                </a:schemeClr>
-              </a:solidFill>
-              <a:latin typeface="Times New Roman"/>
-              <a:cs typeface="Times New Roman"/>
-            </a:endParaRPr>
-          </a:p>
-        </p:txBody>
-      </p:sp>
-      <p:sp>
-        <p:nvSpPr>
-          <p:cNvPr id="1026145733" name=""/>
-          <p:cNvSpPr txBox="1"/>
-          <p:nvPr/>
-        </p:nvSpPr>
-        <p:spPr bwMode="auto">
           <a:xfrm rot="0" flipH="0" flipV="0">
-            <a:off x="142540" y="8821296"/>
-            <a:ext cx="4497784" cy="1021111"/>
+            <a:off x="142539" y="8821296"/>
+            <a:ext cx="4590946" cy="1028567"/>
           </a:xfrm>
           <a:prstGeom prst="rect">
             <a:avLst/>
@@ -5174,8 +5092,20 @@
                 <a:ea typeface="Arial"/>
                 <a:cs typeface="Arial"/>
               </a:rPr>
-              <a:t>____________	</a:t>
-            </a:r>
+              <a:t>____________	__________________________________</a:t>
+            </a:r>
+            <a:br>
+              <a:rPr lang="fr-FR" sz="1000" b="0" i="0" u="none" strike="noStrike" cap="none" spc="0">
+                <a:solidFill>
+                  <a:schemeClr val="bg2">
+                    <a:lumMod val="90000"/>
+                  </a:schemeClr>
+                </a:solidFill>
+                <a:latin typeface="Arial"/>
+                <a:ea typeface="Arial"/>
+                <a:cs typeface="Arial"/>
+              </a:rPr>
+            </a:br>
             <a:r>
               <a:rPr lang="fr-FR" sz="1000" b="0" i="0" u="none" strike="noStrike" cap="none" spc="0">
                 <a:solidFill>
@@ -5198,9 +5128,9 @@
                 <a:ea typeface="Arial"/>
                 <a:cs typeface="Arial"/>
               </a:rPr>
-              <a:t> _______________________</a:t>
-            </a:r>
-            <a:br>
+              <a:t> _____</a:t>
+            </a:r>
+            <a:r>
               <a:rPr lang="fr-FR" sz="1000" b="0" i="0" u="none" strike="noStrike" cap="none" spc="0">
                 <a:solidFill>
                   <a:schemeClr val="bg2">
@@ -5211,7 +5141,8 @@
                 <a:ea typeface="Arial"/>
                 <a:cs typeface="Arial"/>
               </a:rPr>
-            </a:br>
+              <a:t>_____________________</a:t>
+            </a:r>
             <a:r>
               <a:rPr lang="fr-FR" sz="1000" b="0" i="0" u="none" strike="noStrike" cap="none" spc="0">
                 <a:solidFill>
@@ -5223,9 +5154,33 @@
                 <a:ea typeface="Arial"/>
                 <a:cs typeface="Arial"/>
               </a:rPr>
-              <a:t>		                     ________________________</a:t>
-            </a:r>
-            <a:br>
+              <a:t>_______________________</a:t>
+            </a:r>
+            <a:endParaRPr lang="fr-FR" sz="1000" b="0" i="0" u="none" strike="noStrike" cap="none" spc="0">
+              <a:solidFill>
+                <a:schemeClr val="bg2">
+                  <a:lumMod val="90000"/>
+                </a:schemeClr>
+              </a:solidFill>
+              <a:latin typeface="Arial"/>
+              <a:ea typeface="Arial"/>
+              <a:cs typeface="Arial"/>
+            </a:endParaRPr>
+          </a:p>
+          <a:p>
+            <a:pPr marL="0" marR="0" indent="0" algn="l">
+              <a:lnSpc>
+                <a:spcPct val="150000"/>
+              </a:lnSpc>
+              <a:spcBef>
+                <a:spcPts val="0"/>
+              </a:spcBef>
+              <a:spcAft>
+                <a:spcPts val="0"/>
+              </a:spcAft>
+              <a:defRPr/>
+            </a:pPr>
+            <a:r>
               <a:rPr lang="fr-FR" sz="1000" b="0" i="0" u="none" strike="noStrike" cap="none" spc="0">
                 <a:solidFill>
                   <a:schemeClr val="bg2">
@@ -5236,19 +5191,7 @@
                 <a:ea typeface="Arial"/>
                 <a:cs typeface="Arial"/>
               </a:rPr>
-            </a:br>
-            <a:r>
-              <a:rPr lang="fr-FR" sz="1000" b="0" i="0" u="none" strike="noStrike" cap="none" spc="0">
-                <a:solidFill>
-                  <a:schemeClr val="bg2">
-                    <a:lumMod val="90000"/>
-                  </a:schemeClr>
-                </a:solidFill>
-                <a:latin typeface="Arial"/>
-                <a:ea typeface="Arial"/>
-                <a:cs typeface="Arial"/>
-              </a:rPr>
-              <a:t>		                     _______________________</a:t>
+              <a:t>____________________________________________________________</a:t>
             </a:r>
             <a:endParaRPr lang="fr-FR" sz="1200" b="0" i="0" u="none" strike="noStrike" cap="none" spc="0">
               <a:solidFill>
@@ -5265,790 +5208,14 @@
       </p:sp>
       <p:sp>
         <p:nvSpPr>
-          <p:cNvPr id="40390728" name="ZoneTexte 1440859034"/>
-          <p:cNvSpPr txBox="1"/>
-          <p:nvPr/>
-        </p:nvSpPr>
-        <p:spPr bwMode="auto">
-          <a:xfrm>
-            <a:off x="193230" y="9620488"/>
-            <a:ext cx="1076955" cy="274679"/>
-          </a:xfrm>
-          <a:prstGeom prst="rect">
-            <a:avLst/>
-          </a:prstGeom>
-          <a:noFill/>
-        </p:spPr>
-        <p:txBody>
-          <a:bodyPr vertOverflow="overflow" horzOverflow="overflow" vert="horz" wrap="none" lIns="91440" tIns="45720" rIns="91440" bIns="45720" numCol="1" spcCol="0" rtlCol="0" fromWordArt="0" anchor="t" anchorCtr="0" forceAA="0" compatLnSpc="0">
-            <a:spAutoFit/>
-          </a:bodyPr>
-          <a:lstStyle/>
-          <a:p>
-            <a:pPr>
-              <a:defRPr/>
-            </a:pPr>
-            <a:r>
-              <a:rPr sz="1200" b="1">
-                <a:solidFill>
-                  <a:schemeClr val="bg1">
-                    <a:lumMod val="65000"/>
-                  </a:schemeClr>
-                </a:solidFill>
-                <a:latin typeface="ComicNeueSansID"/>
-                <a:ea typeface="ComicNeueSansID"/>
-                <a:cs typeface="ComicNeueSansID"/>
-              </a:rPr>
-              <a:t>ECONOMIES</a:t>
-            </a:r>
-            <a:endParaRPr/>
-          </a:p>
-        </p:txBody>
-      </p:sp>
-      <p:sp>
-        <p:nvSpPr>
-          <p:cNvPr id="705908278" name="ZoneTexte 1440859034"/>
-          <p:cNvSpPr txBox="1"/>
-          <p:nvPr/>
-        </p:nvSpPr>
-        <p:spPr bwMode="auto">
-          <a:xfrm>
-            <a:off x="1704450" y="9620489"/>
-            <a:ext cx="781455" cy="274679"/>
-          </a:xfrm>
-          <a:prstGeom prst="rect">
-            <a:avLst/>
-          </a:prstGeom>
-          <a:noFill/>
-        </p:spPr>
-        <p:txBody>
-          <a:bodyPr vertOverflow="overflow" horzOverflow="overflow" vert="horz" wrap="none" lIns="91440" tIns="45720" rIns="91440" bIns="45720" numCol="1" spcCol="0" rtlCol="0" fromWordArt="0" anchor="t" anchorCtr="0" forceAA="0" compatLnSpc="0">
-            <a:spAutoFit/>
-          </a:bodyPr>
-          <a:lstStyle/>
-          <a:p>
-            <a:pPr>
-              <a:defRPr/>
-            </a:pPr>
-            <a:r>
-              <a:rPr sz="1200" b="1">
-                <a:solidFill>
-                  <a:schemeClr val="bg1">
-                    <a:lumMod val="65000"/>
-                  </a:schemeClr>
-                </a:solidFill>
-                <a:latin typeface="ComicNeueSansID"/>
-                <a:ea typeface="ComicNeueSansID"/>
-                <a:cs typeface="ComicNeueSansID"/>
-              </a:rPr>
-              <a:t>DETTES</a:t>
-            </a:r>
-            <a:endParaRPr/>
-          </a:p>
-        </p:txBody>
-      </p:sp>
-      <p:cxnSp>
-        <p:nvCxnSpPr>
-          <p:cNvPr id="669274534" name=""/>
-          <p:cNvCxnSpPr/>
-          <p:nvPr/>
-        </p:nvCxnSpPr>
-        <p:spPr bwMode="auto">
-          <a:xfrm flipH="0" flipV="1">
-            <a:off x="1411153" y="9338886"/>
-            <a:ext cx="0" cy="418942"/>
-          </a:xfrm>
-          <a:prstGeom prst="line">
-            <a:avLst/>
-          </a:prstGeom>
-          <a:ln w="12700" cap="flat" cmpd="sng" algn="ctr">
-            <a:solidFill>
-              <a:schemeClr val="bg1">
-                <a:lumMod val="74901"/>
-              </a:schemeClr>
-            </a:solidFill>
-            <a:prstDash val="solid"/>
-            <a:miter lim="800000"/>
-          </a:ln>
-        </p:spPr>
-        <p:style>
-          <a:lnRef idx="1">
-            <a:schemeClr val="accent1">
-              <a:shade val="50000"/>
-            </a:schemeClr>
-          </a:lnRef>
-          <a:fillRef idx="0">
-            <a:schemeClr val="accent1"/>
-          </a:fillRef>
-          <a:effectRef idx="0">
-            <a:schemeClr val="accent1"/>
-          </a:effectRef>
-          <a:fontRef idx="minor">
-            <a:schemeClr val="tx1"/>
-          </a:fontRef>
-        </p:style>
-      </p:cxnSp>
-      <p:sp>
-        <p:nvSpPr>
-          <p:cNvPr id="35004426" name=""/>
-          <p:cNvSpPr txBox="1"/>
-          <p:nvPr/>
-        </p:nvSpPr>
-        <p:spPr bwMode="auto">
-          <a:xfrm rot="0" flipH="0" flipV="0">
-            <a:off x="45663" y="9265758"/>
-            <a:ext cx="1381485" cy="427079"/>
-          </a:xfrm>
-          <a:prstGeom prst="rect">
-            <a:avLst/>
-          </a:prstGeom>
-          <a:noFill/>
-        </p:spPr>
-        <p:txBody>
-          <a:bodyPr vertOverflow="overflow" horzOverflow="overflow" vert="horz" wrap="none" lIns="91440" tIns="45720" rIns="91440" bIns="45720" numCol="1" spcCol="0" rtlCol="0" fromWordArt="0" anchor="t" anchorCtr="0" forceAA="0" upright="0" compatLnSpc="0">
-            <a:spAutoFit/>
-          </a:bodyPr>
-          <a:p>
-            <a:pPr>
-              <a:defRPr/>
-            </a:pPr>
-            <a:r>
-              <a:rPr sz="1100">
-                <a:solidFill>
-                  <a:schemeClr val="bg1">
-                    <a:lumMod val="65000"/>
-                  </a:schemeClr>
-                </a:solidFill>
-                <a:latin typeface="Cambria Math"/>
-                <a:ea typeface="Cambria Math"/>
-                <a:cs typeface="Cambria Math"/>
-              </a:rPr>
-              <a:t>▢</a:t>
-            </a:r>
-            <a:r>
-              <a:rPr lang="fr-FR" sz="1100" b="0" i="0" u="none" strike="noStrike" cap="none" spc="0">
-                <a:solidFill>
-                  <a:schemeClr val="bg1">
-                    <a:lumMod val="65000"/>
-                  </a:schemeClr>
-                </a:solidFill>
-                <a:latin typeface="Cambria Math"/>
-                <a:ea typeface="Cambria Math"/>
-                <a:cs typeface="Cambria Math"/>
-              </a:rPr>
-              <a:t>▢</a:t>
-            </a:r>
-            <a:r>
-              <a:rPr lang="fr-FR" sz="1100" b="0" i="0" u="none" strike="noStrike" cap="none" spc="0">
-                <a:solidFill>
-                  <a:schemeClr val="bg1">
-                    <a:lumMod val="65000"/>
-                  </a:schemeClr>
-                </a:solidFill>
-                <a:latin typeface="Cambria Math"/>
-                <a:ea typeface="Cambria Math"/>
-                <a:cs typeface="Cambria Math"/>
-              </a:rPr>
-              <a:t>▢</a:t>
-            </a:r>
-            <a:r>
-              <a:rPr lang="fr-FR" sz="1100" b="0" i="0" u="none" strike="noStrike" cap="none" spc="0">
-                <a:solidFill>
-                  <a:schemeClr val="bg1">
-                    <a:lumMod val="65000"/>
-                  </a:schemeClr>
-                </a:solidFill>
-                <a:latin typeface="Cambria Math"/>
-                <a:ea typeface="Cambria Math"/>
-                <a:cs typeface="Cambria Math"/>
-              </a:rPr>
-              <a:t>▢</a:t>
-            </a:r>
-            <a:r>
-              <a:rPr lang="fr-FR" sz="1100" b="0" i="0" u="none" strike="noStrike" cap="none" spc="0">
-                <a:solidFill>
-                  <a:schemeClr val="bg1">
-                    <a:lumMod val="65000"/>
-                  </a:schemeClr>
-                </a:solidFill>
-                <a:latin typeface="Cambria Math"/>
-                <a:ea typeface="Cambria Math"/>
-                <a:cs typeface="Cambria Math"/>
-              </a:rPr>
-              <a:t>▢</a:t>
-            </a:r>
-            <a:r>
-              <a:rPr lang="fr-FR" sz="1100" b="0" i="0" u="none" strike="noStrike" cap="none" spc="0">
-                <a:solidFill>
-                  <a:schemeClr val="bg1">
-                    <a:lumMod val="65000"/>
-                  </a:schemeClr>
-                </a:solidFill>
-                <a:latin typeface="Cambria Math"/>
-                <a:ea typeface="Cambria Math"/>
-                <a:cs typeface="Cambria Math"/>
-              </a:rPr>
-              <a:t> </a:t>
-            </a:r>
-            <a:r>
-              <a:rPr lang="fr-FR" sz="1100" b="0" i="0" u="none" strike="noStrike" cap="none" spc="0">
-                <a:solidFill>
-                  <a:schemeClr val="bg1">
-                    <a:lumMod val="65000"/>
-                  </a:schemeClr>
-                </a:solidFill>
-                <a:latin typeface="Cambria Math"/>
-                <a:ea typeface="Cambria Math"/>
-                <a:cs typeface="Cambria Math"/>
-              </a:rPr>
-              <a:t>▢</a:t>
-            </a:r>
-            <a:r>
-              <a:rPr lang="fr-FR" sz="1100" b="0" i="0" u="none" strike="noStrike" cap="none" spc="0">
-                <a:solidFill>
-                  <a:schemeClr val="bg1">
-                    <a:lumMod val="65000"/>
-                  </a:schemeClr>
-                </a:solidFill>
-                <a:latin typeface="Cambria Math"/>
-                <a:ea typeface="Cambria Math"/>
-                <a:cs typeface="Cambria Math"/>
-              </a:rPr>
-              <a:t>▢</a:t>
-            </a:r>
-            <a:r>
-              <a:rPr lang="fr-FR" sz="1100" b="0" i="0" u="none" strike="noStrike" cap="none" spc="0">
-                <a:solidFill>
-                  <a:schemeClr val="bg1">
-                    <a:lumMod val="65000"/>
-                  </a:schemeClr>
-                </a:solidFill>
-                <a:latin typeface="Cambria Math"/>
-                <a:ea typeface="Cambria Math"/>
-                <a:cs typeface="Cambria Math"/>
-              </a:rPr>
-              <a:t>▢</a:t>
-            </a:r>
-            <a:r>
-              <a:rPr lang="fr-FR" sz="1100" b="0" i="0" u="none" strike="noStrike" cap="none" spc="0">
-                <a:solidFill>
-                  <a:schemeClr val="bg1">
-                    <a:lumMod val="65000"/>
-                  </a:schemeClr>
-                </a:solidFill>
-                <a:latin typeface="Cambria Math"/>
-                <a:ea typeface="Cambria Math"/>
-                <a:cs typeface="Cambria Math"/>
-              </a:rPr>
-              <a:t>▢</a:t>
-            </a:r>
-            <a:r>
-              <a:rPr lang="fr-FR" sz="1100" b="0" i="0" u="none" strike="noStrike" cap="none" spc="0">
-                <a:solidFill>
-                  <a:schemeClr val="bg1">
-                    <a:lumMod val="65000"/>
-                  </a:schemeClr>
-                </a:solidFill>
-                <a:latin typeface="Cambria Math"/>
-                <a:ea typeface="Cambria Math"/>
-                <a:cs typeface="Cambria Math"/>
-              </a:rPr>
-              <a:t>▢</a:t>
-            </a:r>
-            <a:br>
-              <a:rPr lang="fr-FR" sz="1100" b="0" i="0" u="none" strike="noStrike" cap="none" spc="0">
-                <a:solidFill>
-                  <a:schemeClr val="bg1">
-                    <a:lumMod val="65000"/>
-                  </a:schemeClr>
-                </a:solidFill>
-                <a:latin typeface="Cambria Math"/>
-                <a:ea typeface="Cambria Math"/>
-                <a:cs typeface="Cambria Math"/>
-              </a:rPr>
-            </a:br>
-            <a:r>
-              <a:rPr lang="fr-FR" sz="1100" b="0" i="0" u="none" strike="noStrike" cap="none" spc="0">
-                <a:solidFill>
-                  <a:schemeClr val="bg1">
-                    <a:lumMod val="65000"/>
-                  </a:schemeClr>
-                </a:solidFill>
-                <a:latin typeface="Cambria Math"/>
-                <a:ea typeface="Cambria Math"/>
-                <a:cs typeface="Cambria Math"/>
-              </a:rPr>
-              <a:t>▢</a:t>
-            </a:r>
-            <a:r>
-              <a:rPr lang="fr-FR" sz="1100" b="0" i="0" u="none" strike="noStrike" cap="none" spc="0">
-                <a:solidFill>
-                  <a:schemeClr val="bg1">
-                    <a:lumMod val="65000"/>
-                  </a:schemeClr>
-                </a:solidFill>
-                <a:latin typeface="Cambria Math"/>
-                <a:ea typeface="Cambria Math"/>
-                <a:cs typeface="Cambria Math"/>
-              </a:rPr>
-              <a:t>▢</a:t>
-            </a:r>
-            <a:r>
-              <a:rPr lang="fr-FR" sz="1100" b="0" i="0" u="none" strike="noStrike" cap="none" spc="0">
-                <a:solidFill>
-                  <a:schemeClr val="bg1">
-                    <a:lumMod val="65000"/>
-                  </a:schemeClr>
-                </a:solidFill>
-                <a:latin typeface="Cambria Math"/>
-                <a:ea typeface="Cambria Math"/>
-                <a:cs typeface="Cambria Math"/>
-              </a:rPr>
-              <a:t>▢</a:t>
-            </a:r>
-            <a:r>
-              <a:rPr lang="fr-FR" sz="1100" b="0" i="0" u="none" strike="noStrike" cap="none" spc="0">
-                <a:solidFill>
-                  <a:schemeClr val="bg1">
-                    <a:lumMod val="65000"/>
-                  </a:schemeClr>
-                </a:solidFill>
-                <a:latin typeface="Cambria Math"/>
-                <a:ea typeface="Cambria Math"/>
-                <a:cs typeface="Cambria Math"/>
-              </a:rPr>
-              <a:t>▢</a:t>
-            </a:r>
-            <a:r>
-              <a:rPr lang="fr-FR" sz="1100" b="0" i="0" u="none" strike="noStrike" cap="none" spc="0">
-                <a:solidFill>
-                  <a:schemeClr val="bg1">
-                    <a:lumMod val="65000"/>
-                  </a:schemeClr>
-                </a:solidFill>
-                <a:latin typeface="Cambria Math"/>
-                <a:ea typeface="Cambria Math"/>
-                <a:cs typeface="Cambria Math"/>
-              </a:rPr>
-              <a:t>▢</a:t>
-            </a:r>
-            <a:r>
-              <a:rPr lang="fr-FR" sz="1100" b="0" i="0" u="none" strike="noStrike" cap="none" spc="0">
-                <a:solidFill>
-                  <a:schemeClr val="bg1">
-                    <a:lumMod val="65000"/>
-                  </a:schemeClr>
-                </a:solidFill>
-                <a:latin typeface="Cambria Math"/>
-                <a:ea typeface="Cambria Math"/>
-                <a:cs typeface="Cambria Math"/>
-              </a:rPr>
-              <a:t> </a:t>
-            </a:r>
-            <a:r>
-              <a:rPr lang="fr-FR" sz="1100" b="0" i="0" u="none" strike="noStrike" cap="none" spc="0">
-                <a:solidFill>
-                  <a:schemeClr val="bg1">
-                    <a:lumMod val="65000"/>
-                  </a:schemeClr>
-                </a:solidFill>
-                <a:latin typeface="Cambria Math"/>
-                <a:ea typeface="Cambria Math"/>
-                <a:cs typeface="Cambria Math"/>
-              </a:rPr>
-              <a:t>▢</a:t>
-            </a:r>
-            <a:r>
-              <a:rPr lang="fr-FR" sz="1100" b="0" i="0" u="none" strike="noStrike" cap="none" spc="0">
-                <a:solidFill>
-                  <a:schemeClr val="bg1">
-                    <a:lumMod val="65000"/>
-                  </a:schemeClr>
-                </a:solidFill>
-                <a:latin typeface="Cambria Math"/>
-                <a:ea typeface="Cambria Math"/>
-                <a:cs typeface="Cambria Math"/>
-              </a:rPr>
-              <a:t>▢</a:t>
-            </a:r>
-            <a:r>
-              <a:rPr lang="fr-FR" sz="1100" b="0" i="0" u="none" strike="noStrike" cap="none" spc="0">
-                <a:solidFill>
-                  <a:schemeClr val="bg1">
-                    <a:lumMod val="65000"/>
-                  </a:schemeClr>
-                </a:solidFill>
-                <a:latin typeface="Cambria Math"/>
-                <a:ea typeface="Cambria Math"/>
-                <a:cs typeface="Cambria Math"/>
-              </a:rPr>
-              <a:t>▢</a:t>
-            </a:r>
-            <a:r>
-              <a:rPr lang="fr-FR" sz="1100" b="0" i="0" u="none" strike="noStrike" cap="none" spc="0">
-                <a:solidFill>
-                  <a:schemeClr val="bg1">
-                    <a:lumMod val="65000"/>
-                  </a:schemeClr>
-                </a:solidFill>
-                <a:latin typeface="Cambria Math"/>
-                <a:ea typeface="Cambria Math"/>
-                <a:cs typeface="Cambria Math"/>
-              </a:rPr>
-              <a:t>▢</a:t>
-            </a:r>
-            <a:r>
-              <a:rPr lang="fr-FR" sz="1100" b="0" i="0" u="none" strike="noStrike" cap="none" spc="0">
-                <a:solidFill>
-                  <a:schemeClr val="bg1">
-                    <a:lumMod val="65000"/>
-                  </a:schemeClr>
-                </a:solidFill>
-                <a:latin typeface="Cambria Math"/>
-                <a:ea typeface="Cambria Math"/>
-                <a:cs typeface="Cambria Math"/>
-              </a:rPr>
-              <a:t>▢</a:t>
-            </a:r>
-            <a:endParaRPr>
-              <a:solidFill>
-                <a:schemeClr val="bg1">
-                  <a:lumMod val="65000"/>
-                </a:schemeClr>
-              </a:solidFill>
-            </a:endParaRPr>
-          </a:p>
-        </p:txBody>
-      </p:sp>
-      <p:sp>
-        <p:nvSpPr>
-          <p:cNvPr id="1059929852" name=""/>
-          <p:cNvSpPr txBox="1"/>
-          <p:nvPr/>
-        </p:nvSpPr>
-        <p:spPr bwMode="auto">
-          <a:xfrm rot="0" flipH="0" flipV="0">
-            <a:off x="1384600" y="9267359"/>
-            <a:ext cx="1381485" cy="427079"/>
-          </a:xfrm>
-          <a:prstGeom prst="rect">
-            <a:avLst/>
-          </a:prstGeom>
-          <a:noFill/>
-        </p:spPr>
-        <p:txBody>
-          <a:bodyPr vertOverflow="overflow" horzOverflow="overflow" vert="horz" wrap="none" lIns="91440" tIns="45720" rIns="91440" bIns="45720" numCol="1" spcCol="0" rtlCol="0" fromWordArt="0" anchor="t" anchorCtr="0" forceAA="0" upright="0" compatLnSpc="0">
-            <a:spAutoFit/>
-          </a:bodyPr>
-          <a:p>
-            <a:pPr>
-              <a:defRPr/>
-            </a:pPr>
-            <a:r>
-              <a:rPr sz="1100">
-                <a:solidFill>
-                  <a:schemeClr val="bg1">
-                    <a:lumMod val="65000"/>
-                  </a:schemeClr>
-                </a:solidFill>
-                <a:latin typeface="Cambria Math"/>
-                <a:ea typeface="Cambria Math"/>
-                <a:cs typeface="Cambria Math"/>
-              </a:rPr>
-              <a:t>▢</a:t>
-            </a:r>
-            <a:r>
-              <a:rPr lang="fr-FR" sz="1100" b="0" i="0" u="none" strike="noStrike" cap="none" spc="0">
-                <a:solidFill>
-                  <a:schemeClr val="bg1">
-                    <a:lumMod val="65000"/>
-                  </a:schemeClr>
-                </a:solidFill>
-                <a:latin typeface="Cambria Math"/>
-                <a:ea typeface="Cambria Math"/>
-                <a:cs typeface="Cambria Math"/>
-              </a:rPr>
-              <a:t>▢</a:t>
-            </a:r>
-            <a:r>
-              <a:rPr lang="fr-FR" sz="1100" b="0" i="0" u="none" strike="noStrike" cap="none" spc="0">
-                <a:solidFill>
-                  <a:schemeClr val="bg1">
-                    <a:lumMod val="65000"/>
-                  </a:schemeClr>
-                </a:solidFill>
-                <a:latin typeface="Cambria Math"/>
-                <a:ea typeface="Cambria Math"/>
-                <a:cs typeface="Cambria Math"/>
-              </a:rPr>
-              <a:t>▢</a:t>
-            </a:r>
-            <a:r>
-              <a:rPr lang="fr-FR" sz="1100" b="0" i="0" u="none" strike="noStrike" cap="none" spc="0">
-                <a:solidFill>
-                  <a:schemeClr val="bg1">
-                    <a:lumMod val="65000"/>
-                  </a:schemeClr>
-                </a:solidFill>
-                <a:latin typeface="Cambria Math"/>
-                <a:ea typeface="Cambria Math"/>
-                <a:cs typeface="Cambria Math"/>
-              </a:rPr>
-              <a:t>▢</a:t>
-            </a:r>
-            <a:r>
-              <a:rPr lang="fr-FR" sz="1100" b="0" i="0" u="none" strike="noStrike" cap="none" spc="0">
-                <a:solidFill>
-                  <a:schemeClr val="bg1">
-                    <a:lumMod val="65000"/>
-                  </a:schemeClr>
-                </a:solidFill>
-                <a:latin typeface="Cambria Math"/>
-                <a:ea typeface="Cambria Math"/>
-                <a:cs typeface="Cambria Math"/>
-              </a:rPr>
-              <a:t>▢</a:t>
-            </a:r>
-            <a:r>
-              <a:rPr lang="fr-FR" sz="1100" b="0" i="0" u="none" strike="noStrike" cap="none" spc="0">
-                <a:solidFill>
-                  <a:schemeClr val="bg1">
-                    <a:lumMod val="65000"/>
-                  </a:schemeClr>
-                </a:solidFill>
-                <a:latin typeface="Cambria Math"/>
-                <a:ea typeface="Cambria Math"/>
-                <a:cs typeface="Cambria Math"/>
-              </a:rPr>
-              <a:t> </a:t>
-            </a:r>
-            <a:r>
-              <a:rPr lang="fr-FR" sz="1100" b="0" i="0" u="none" strike="noStrike" cap="none" spc="0">
-                <a:solidFill>
-                  <a:schemeClr val="bg1">
-                    <a:lumMod val="65000"/>
-                  </a:schemeClr>
-                </a:solidFill>
-                <a:latin typeface="Cambria Math"/>
-                <a:ea typeface="Cambria Math"/>
-                <a:cs typeface="Cambria Math"/>
-              </a:rPr>
-              <a:t>▢</a:t>
-            </a:r>
-            <a:r>
-              <a:rPr lang="fr-FR" sz="1100" b="0" i="0" u="none" strike="noStrike" cap="none" spc="0">
-                <a:solidFill>
-                  <a:schemeClr val="bg1">
-                    <a:lumMod val="65000"/>
-                  </a:schemeClr>
-                </a:solidFill>
-                <a:latin typeface="Cambria Math"/>
-                <a:ea typeface="Cambria Math"/>
-                <a:cs typeface="Cambria Math"/>
-              </a:rPr>
-              <a:t>▢</a:t>
-            </a:r>
-            <a:r>
-              <a:rPr lang="fr-FR" sz="1100" b="0" i="0" u="none" strike="noStrike" cap="none" spc="0">
-                <a:solidFill>
-                  <a:schemeClr val="bg1">
-                    <a:lumMod val="65000"/>
-                  </a:schemeClr>
-                </a:solidFill>
-                <a:latin typeface="Cambria Math"/>
-                <a:ea typeface="Cambria Math"/>
-                <a:cs typeface="Cambria Math"/>
-              </a:rPr>
-              <a:t>▢</a:t>
-            </a:r>
-            <a:r>
-              <a:rPr lang="fr-FR" sz="1100" b="0" i="0" u="none" strike="noStrike" cap="none" spc="0">
-                <a:solidFill>
-                  <a:schemeClr val="bg1">
-                    <a:lumMod val="65000"/>
-                  </a:schemeClr>
-                </a:solidFill>
-                <a:latin typeface="Cambria Math"/>
-                <a:ea typeface="Cambria Math"/>
-                <a:cs typeface="Cambria Math"/>
-              </a:rPr>
-              <a:t>▢</a:t>
-            </a:r>
-            <a:r>
-              <a:rPr lang="fr-FR" sz="1100" b="0" i="0" u="none" strike="noStrike" cap="none" spc="0">
-                <a:solidFill>
-                  <a:schemeClr val="bg1">
-                    <a:lumMod val="65000"/>
-                  </a:schemeClr>
-                </a:solidFill>
-                <a:latin typeface="Cambria Math"/>
-                <a:ea typeface="Cambria Math"/>
-                <a:cs typeface="Cambria Math"/>
-              </a:rPr>
-              <a:t>▢</a:t>
-            </a:r>
-            <a:br>
-              <a:rPr lang="fr-FR" sz="1100" b="0" i="0" u="none" strike="noStrike" cap="none" spc="0">
-                <a:solidFill>
-                  <a:schemeClr val="bg1">
-                    <a:lumMod val="65000"/>
-                  </a:schemeClr>
-                </a:solidFill>
-                <a:latin typeface="Cambria Math"/>
-                <a:ea typeface="Cambria Math"/>
-                <a:cs typeface="Cambria Math"/>
-              </a:rPr>
-            </a:br>
-            <a:r>
-              <a:rPr lang="fr-FR" sz="1100" b="0" i="0" u="none" strike="noStrike" cap="none" spc="0">
-                <a:solidFill>
-                  <a:schemeClr val="bg1">
-                    <a:lumMod val="65000"/>
-                  </a:schemeClr>
-                </a:solidFill>
-                <a:latin typeface="Cambria Math"/>
-                <a:ea typeface="Cambria Math"/>
-                <a:cs typeface="Cambria Math"/>
-              </a:rPr>
-              <a:t>▢</a:t>
-            </a:r>
-            <a:r>
-              <a:rPr lang="fr-FR" sz="1100" b="0" i="0" u="none" strike="noStrike" cap="none" spc="0">
-                <a:solidFill>
-                  <a:schemeClr val="bg1">
-                    <a:lumMod val="65000"/>
-                  </a:schemeClr>
-                </a:solidFill>
-                <a:latin typeface="Cambria Math"/>
-                <a:ea typeface="Cambria Math"/>
-                <a:cs typeface="Cambria Math"/>
-              </a:rPr>
-              <a:t>▢</a:t>
-            </a:r>
-            <a:r>
-              <a:rPr lang="fr-FR" sz="1100" b="0" i="0" u="none" strike="noStrike" cap="none" spc="0">
-                <a:solidFill>
-                  <a:schemeClr val="bg1">
-                    <a:lumMod val="65000"/>
-                  </a:schemeClr>
-                </a:solidFill>
-                <a:latin typeface="Cambria Math"/>
-                <a:ea typeface="Cambria Math"/>
-                <a:cs typeface="Cambria Math"/>
-              </a:rPr>
-              <a:t>▢</a:t>
-            </a:r>
-            <a:r>
-              <a:rPr lang="fr-FR" sz="1100" b="0" i="0" u="none" strike="noStrike" cap="none" spc="0">
-                <a:solidFill>
-                  <a:schemeClr val="bg1">
-                    <a:lumMod val="65000"/>
-                  </a:schemeClr>
-                </a:solidFill>
-                <a:latin typeface="Cambria Math"/>
-                <a:ea typeface="Cambria Math"/>
-                <a:cs typeface="Cambria Math"/>
-              </a:rPr>
-              <a:t>▢</a:t>
-            </a:r>
-            <a:r>
-              <a:rPr lang="fr-FR" sz="1100" b="0" i="0" u="none" strike="noStrike" cap="none" spc="0">
-                <a:solidFill>
-                  <a:schemeClr val="bg1">
-                    <a:lumMod val="65000"/>
-                  </a:schemeClr>
-                </a:solidFill>
-                <a:latin typeface="Cambria Math"/>
-                <a:ea typeface="Cambria Math"/>
-                <a:cs typeface="Cambria Math"/>
-              </a:rPr>
-              <a:t>▢</a:t>
-            </a:r>
-            <a:r>
-              <a:rPr lang="fr-FR" sz="1100" b="0" i="0" u="none" strike="noStrike" cap="none" spc="0">
-                <a:solidFill>
-                  <a:schemeClr val="bg1">
-                    <a:lumMod val="65000"/>
-                  </a:schemeClr>
-                </a:solidFill>
-                <a:latin typeface="Cambria Math"/>
-                <a:ea typeface="Cambria Math"/>
-                <a:cs typeface="Cambria Math"/>
-              </a:rPr>
-              <a:t> ▢</a:t>
-            </a:r>
-            <a:r>
-              <a:rPr lang="fr-FR" sz="1100" b="0" i="0" u="none" strike="noStrike" cap="none" spc="0">
-                <a:solidFill>
-                  <a:schemeClr val="bg1">
-                    <a:lumMod val="65000"/>
-                  </a:schemeClr>
-                </a:solidFill>
-                <a:latin typeface="Cambria Math"/>
-                <a:ea typeface="Cambria Math"/>
-                <a:cs typeface="Cambria Math"/>
-              </a:rPr>
-              <a:t>▢</a:t>
-            </a:r>
-            <a:r>
-              <a:rPr lang="fr-FR" sz="1100" b="0" i="0" u="none" strike="noStrike" cap="none" spc="0">
-                <a:solidFill>
-                  <a:schemeClr val="bg1">
-                    <a:lumMod val="65000"/>
-                  </a:schemeClr>
-                </a:solidFill>
-                <a:latin typeface="Cambria Math"/>
-                <a:ea typeface="Cambria Math"/>
-                <a:cs typeface="Cambria Math"/>
-              </a:rPr>
-              <a:t>▢</a:t>
-            </a:r>
-            <a:r>
-              <a:rPr lang="fr-FR" sz="1100" b="0" i="0" u="none" strike="noStrike" cap="none" spc="0">
-                <a:solidFill>
-                  <a:schemeClr val="bg1">
-                    <a:lumMod val="65000"/>
-                  </a:schemeClr>
-                </a:solidFill>
-                <a:latin typeface="Cambria Math"/>
-                <a:ea typeface="Cambria Math"/>
-                <a:cs typeface="Cambria Math"/>
-              </a:rPr>
-              <a:t>▢</a:t>
-            </a:r>
-            <a:r>
-              <a:rPr lang="fr-FR" sz="1100" b="0" i="0" u="none" strike="noStrike" cap="none" spc="0">
-                <a:solidFill>
-                  <a:schemeClr val="bg1">
-                    <a:lumMod val="65000"/>
-                  </a:schemeClr>
-                </a:solidFill>
-                <a:latin typeface="Cambria Math"/>
-                <a:ea typeface="Cambria Math"/>
-                <a:cs typeface="Cambria Math"/>
-              </a:rPr>
-              <a:t>▢</a:t>
-            </a:r>
-            <a:endParaRPr sz="1600">
-              <a:solidFill>
-                <a:schemeClr val="bg1">
-                  <a:lumMod val="65000"/>
-                </a:schemeClr>
-              </a:solidFill>
-            </a:endParaRPr>
-          </a:p>
-        </p:txBody>
-      </p:sp>
-      <p:sp>
-        <p:nvSpPr>
-          <p:cNvPr id="2087658548" name="Rectangle 954364527"/>
+          <p:cNvPr id="2003362713" name="Rectangle 954364527"/>
           <p:cNvSpPr/>
           <p:nvPr/>
         </p:nvSpPr>
         <p:spPr bwMode="auto">
           <a:xfrm flipH="0" flipV="0">
-            <a:off x="4432771" y="8823120"/>
-            <a:ext cx="162576" cy="934708"/>
+            <a:off x="4396136" y="8823119"/>
+            <a:ext cx="207553" cy="934707"/>
           </a:xfrm>
           <a:prstGeom prst="rect">
             <a:avLst/>
@@ -6081,14 +5248,14 @@
       </p:sp>
       <p:sp>
         <p:nvSpPr>
-          <p:cNvPr id="9049958" name="ZoneTexte 1302587497"/>
+          <p:cNvPr id="239020028" name="ZoneTexte 1302587497"/>
           <p:cNvSpPr txBox="1"/>
           <p:nvPr/>
         </p:nvSpPr>
         <p:spPr bwMode="auto">
           <a:xfrm flipH="0" flipV="0">
-            <a:off x="4640324" y="3132851"/>
-            <a:ext cx="1488142" cy="3109319"/>
+            <a:off x="4383880" y="3499196"/>
+            <a:ext cx="1488861" cy="2405211"/>
           </a:xfrm>
           <a:prstGeom prst="rect">
             <a:avLst/>
@@ -6103,7 +5270,7 @@
           <a:p>
             <a:pPr algn="r">
               <a:lnSpc>
-                <a:spcPct val="150000"/>
+                <a:spcPct val="114999"/>
               </a:lnSpc>
               <a:defRPr/>
             </a:pPr>
@@ -6113,7 +5280,7 @@
                 <a:ea typeface="ComicNeueSansID"/>
                 <a:cs typeface="ComicNeueSansID"/>
               </a:rPr>
-              <a:t>Arts</a:t>
+              <a:t>Art</a:t>
             </a:r>
             <a:endParaRPr sz="1100">
               <a:latin typeface="ComicNeueSansID"/>
@@ -6123,7 +5290,7 @@
           <a:p>
             <a:pPr algn="r">
               <a:lnSpc>
-                <a:spcPct val="150000"/>
+                <a:spcPct val="114999"/>
               </a:lnSpc>
               <a:defRPr/>
             </a:pPr>
@@ -6143,7 +5310,7 @@
           <a:p>
             <a:pPr algn="r">
               <a:lnSpc>
-                <a:spcPct val="150000"/>
+                <a:spcPct val="114999"/>
               </a:lnSpc>
               <a:defRPr/>
             </a:pPr>
@@ -6163,7 +5330,7 @@
           <a:p>
             <a:pPr algn="r">
               <a:lnSpc>
-                <a:spcPct val="150000"/>
+                <a:spcPct val="114999"/>
               </a:lnSpc>
               <a:defRPr/>
             </a:pPr>
@@ -6183,7 +5350,7 @@
           <a:p>
             <a:pPr algn="r">
               <a:lnSpc>
-                <a:spcPct val="150000"/>
+                <a:spcPct val="114999"/>
               </a:lnSpc>
               <a:defRPr/>
             </a:pPr>
@@ -6203,7 +5370,7 @@
           <a:p>
             <a:pPr algn="r">
               <a:lnSpc>
-                <a:spcPct val="150000"/>
+                <a:spcPct val="114999"/>
               </a:lnSpc>
               <a:defRPr/>
             </a:pPr>
@@ -6223,7 +5390,7 @@
           <a:p>
             <a:pPr algn="r">
               <a:lnSpc>
-                <a:spcPct val="150000"/>
+                <a:spcPct val="114999"/>
               </a:lnSpc>
               <a:defRPr/>
             </a:pPr>
@@ -6243,7 +5410,7 @@
           <a:p>
             <a:pPr algn="r">
               <a:lnSpc>
-                <a:spcPct val="150000"/>
+                <a:spcPct val="114999"/>
               </a:lnSpc>
               <a:defRPr/>
             </a:pPr>
@@ -6263,7 +5430,7 @@
           <a:p>
             <a:pPr algn="r">
               <a:lnSpc>
-                <a:spcPct val="150000"/>
+                <a:spcPct val="114999"/>
               </a:lnSpc>
               <a:defRPr/>
             </a:pPr>
@@ -6283,7 +5450,7 @@
           <a:p>
             <a:pPr algn="r">
               <a:lnSpc>
-                <a:spcPct val="150000"/>
+                <a:spcPct val="114999"/>
               </a:lnSpc>
               <a:defRPr/>
             </a:pPr>
@@ -6303,7 +5470,7 @@
           <a:p>
             <a:pPr algn="r">
               <a:lnSpc>
-                <a:spcPct val="150000"/>
+                <a:spcPct val="114999"/>
               </a:lnSpc>
               <a:defRPr/>
             </a:pPr>
@@ -6323,7 +5490,7 @@
           <a:p>
             <a:pPr algn="r">
               <a:lnSpc>
-                <a:spcPct val="150000"/>
+                <a:spcPct val="114999"/>
               </a:lnSpc>
               <a:defRPr/>
             </a:pPr>
@@ -6344,14 +5511,14 @@
       </p:sp>
       <p:sp>
         <p:nvSpPr>
-          <p:cNvPr id="737174628" name="ZoneTexte 1302587497"/>
+          <p:cNvPr id="1058184716" name="ZoneTexte 1302587497"/>
           <p:cNvSpPr txBox="1"/>
           <p:nvPr/>
         </p:nvSpPr>
         <p:spPr bwMode="auto">
           <a:xfrm flipH="0" flipV="0">
-            <a:off x="6059712" y="3140178"/>
-            <a:ext cx="786821" cy="3109319"/>
+            <a:off x="5803269" y="3506523"/>
+            <a:ext cx="787900" cy="2405232"/>
           </a:xfrm>
           <a:prstGeom prst="rect">
             <a:avLst/>
@@ -6364,9 +5531,9 @@
           </a:bodyPr>
           <a:lstStyle/>
           <a:p>
-            <a:pPr algn="l">
+            <a:pPr algn="r">
               <a:lnSpc>
-                <a:spcPct val="150000"/>
+                <a:spcPct val="114999"/>
               </a:lnSpc>
               <a:defRPr/>
             </a:pPr>
@@ -6444,9 +5611,9 @@
             </a:endParaRPr>
           </a:p>
           <a:p>
-            <a:pPr algn="l">
+            <a:pPr algn="r">
               <a:lnSpc>
-                <a:spcPct val="150000"/>
+                <a:spcPct val="114999"/>
               </a:lnSpc>
               <a:defRPr/>
             </a:pPr>
@@ -6524,9 +5691,9 @@
             </a:endParaRPr>
           </a:p>
           <a:p>
-            <a:pPr algn="l">
+            <a:pPr algn="r">
               <a:lnSpc>
-                <a:spcPct val="150000"/>
+                <a:spcPct val="114999"/>
               </a:lnSpc>
               <a:defRPr/>
             </a:pPr>
@@ -6604,9 +5771,9 @@
             </a:endParaRPr>
           </a:p>
           <a:p>
-            <a:pPr algn="l">
+            <a:pPr algn="r">
               <a:lnSpc>
-                <a:spcPct val="150000"/>
+                <a:spcPct val="114999"/>
               </a:lnSpc>
               <a:defRPr/>
             </a:pPr>
@@ -6684,9 +5851,9 @@
             </a:endParaRPr>
           </a:p>
           <a:p>
-            <a:pPr algn="l">
+            <a:pPr algn="r">
               <a:lnSpc>
-                <a:spcPct val="150000"/>
+                <a:spcPct val="114999"/>
               </a:lnSpc>
               <a:defRPr/>
             </a:pPr>
@@ -6764,9 +5931,9 @@
             </a:endParaRPr>
           </a:p>
           <a:p>
-            <a:pPr algn="l">
+            <a:pPr algn="r">
               <a:lnSpc>
-                <a:spcPct val="150000"/>
+                <a:spcPct val="114999"/>
               </a:lnSpc>
               <a:defRPr/>
             </a:pPr>
@@ -6844,9 +6011,9 @@
             </a:endParaRPr>
           </a:p>
           <a:p>
-            <a:pPr algn="l">
+            <a:pPr algn="r">
               <a:lnSpc>
-                <a:spcPct val="150000"/>
+                <a:spcPct val="114999"/>
               </a:lnSpc>
               <a:defRPr/>
             </a:pPr>
@@ -6924,9 +6091,9 @@
             </a:endParaRPr>
           </a:p>
           <a:p>
-            <a:pPr algn="l">
+            <a:pPr algn="r">
               <a:lnSpc>
-                <a:spcPct val="150000"/>
+                <a:spcPct val="114999"/>
               </a:lnSpc>
               <a:defRPr/>
             </a:pPr>
@@ -7004,9 +6171,9 @@
             </a:endParaRPr>
           </a:p>
           <a:p>
-            <a:pPr algn="l">
+            <a:pPr algn="r">
               <a:lnSpc>
-                <a:spcPct val="150000"/>
+                <a:spcPct val="114999"/>
               </a:lnSpc>
               <a:defRPr/>
             </a:pPr>
@@ -7084,9 +6251,9 @@
             </a:endParaRPr>
           </a:p>
           <a:p>
-            <a:pPr algn="l">
+            <a:pPr algn="r">
               <a:lnSpc>
-                <a:spcPct val="150000"/>
+                <a:spcPct val="114999"/>
               </a:lnSpc>
               <a:defRPr/>
             </a:pPr>
@@ -7164,9 +6331,9 @@
             </a:endParaRPr>
           </a:p>
           <a:p>
-            <a:pPr algn="l">
+            <a:pPr algn="r">
               <a:lnSpc>
-                <a:spcPct val="150000"/>
+                <a:spcPct val="114999"/>
               </a:lnSpc>
               <a:defRPr/>
             </a:pPr>
@@ -7244,9 +6411,9 @@
             </a:endParaRPr>
           </a:p>
           <a:p>
-            <a:pPr algn="l">
+            <a:pPr algn="r">
               <a:lnSpc>
-                <a:spcPct val="150000"/>
+                <a:spcPct val="114999"/>
               </a:lnSpc>
               <a:defRPr/>
             </a:pPr>
@@ -7330,14 +6497,14 @@
       </p:sp>
       <p:sp>
         <p:nvSpPr>
-          <p:cNvPr id="117346770" name=""/>
+          <p:cNvPr id="1751551300" name=""/>
           <p:cNvSpPr txBox="1"/>
           <p:nvPr/>
         </p:nvSpPr>
         <p:spPr bwMode="auto">
           <a:xfrm rot="0" flipH="0" flipV="0">
-            <a:off x="3859652" y="897511"/>
-            <a:ext cx="1267284" cy="731879"/>
+            <a:off x="3993313" y="860876"/>
+            <a:ext cx="1112467" cy="899519"/>
           </a:xfrm>
           <a:prstGeom prst="rect">
             <a:avLst/>
@@ -7356,14 +6523,14 @@
               <a:defRPr/>
             </a:pPr>
             <a:r>
-              <a:rPr sz="1400">
+              <a:rPr sz="1200">
                 <a:latin typeface="ComicNeueSansID"/>
                 <a:ea typeface="ComicNeueSansID"/>
                 <a:cs typeface="ComicNeueSansID"/>
               </a:rPr>
               <a:t>Énergie</a:t>
             </a:r>
-            <a:endParaRPr sz="1400">
+            <a:endParaRPr sz="1200">
               <a:latin typeface="ComicNeueSansID"/>
               <a:cs typeface="ComicNeueSansID"/>
             </a:endParaRPr>
@@ -7376,14 +6543,14 @@
               <a:defRPr/>
             </a:pPr>
             <a:r>
-              <a:rPr sz="1400">
+              <a:rPr sz="1200">
                 <a:latin typeface="ComicNeueSansID"/>
                 <a:ea typeface="ComicNeueSansID"/>
                 <a:cs typeface="ComicNeueSansID"/>
               </a:rPr>
               <a:t>Récupération</a:t>
             </a:r>
-            <a:endParaRPr sz="1400">
+            <a:endParaRPr sz="1200">
               <a:latin typeface="ComicNeueSansID"/>
               <a:cs typeface="ComicNeueSansID"/>
             </a:endParaRPr>
@@ -7396,27 +6563,49 @@
               <a:defRPr/>
             </a:pPr>
             <a:r>
-              <a:rPr sz="1400">
+              <a:rPr sz="1200">
                 <a:latin typeface="ComicNeueSansID"/>
                 <a:ea typeface="ComicNeueSansID"/>
                 <a:cs typeface="ComicNeueSansID"/>
               </a:rPr>
               <a:t>Vigueur</a:t>
             </a:r>
-            <a:endParaRPr/>
+            <a:br>
+              <a:rPr sz="1200">
+                <a:latin typeface="ComicNeueSansID"/>
+                <a:ea typeface="ComicNeueSansID"/>
+                <a:cs typeface="ComicNeueSansID"/>
+              </a:rPr>
+            </a:br>
+            <a:br>
+              <a:rPr sz="500">
+                <a:latin typeface="ComicNeueSansID"/>
+                <a:ea typeface="ComicNeueSansID"/>
+                <a:cs typeface="ComicNeueSansID"/>
+              </a:rPr>
+            </a:br>
+            <a:r>
+              <a:rPr sz="1200">
+                <a:latin typeface="ComicNeueSansID"/>
+                <a:ea typeface="ComicNeueSansID"/>
+                <a:cs typeface="ComicNeueSansID"/>
+              </a:rPr>
+              <a:t>Actuelle</a:t>
+            </a:r>
+            <a:endParaRPr sz="1600"/>
           </a:p>
         </p:txBody>
       </p:sp>
       <p:sp>
         <p:nvSpPr>
-          <p:cNvPr id="182134270" name=""/>
+          <p:cNvPr id="1248809236" name=""/>
           <p:cNvSpPr txBox="1"/>
           <p:nvPr/>
         </p:nvSpPr>
         <p:spPr bwMode="auto">
           <a:xfrm rot="0" flipH="0" flipV="0">
-            <a:off x="5058142" y="897511"/>
-            <a:ext cx="1718413" cy="731879"/>
+            <a:off x="5021507" y="860876"/>
+            <a:ext cx="1523274" cy="876659"/>
           </a:xfrm>
           <a:prstGeom prst="rect">
             <a:avLst/>
@@ -7435,7 +6624,7 @@
               <a:defRPr/>
             </a:pPr>
             <a:r>
-              <a:rPr lang="fr-FR" sz="1400" b="0" i="0" u="none" strike="noStrike" cap="none" spc="0">
+              <a:rPr lang="fr-FR" sz="1200" b="0" i="0" u="none" strike="noStrike" cap="none" spc="0">
                 <a:solidFill>
                   <a:schemeClr val="bg1">
                     <a:lumMod val="75000"/>
@@ -7448,7 +6637,7 @@
               <a:t>▢</a:t>
             </a:r>
             <a:r>
-              <a:rPr lang="fr-FR" sz="1400" b="0" i="0" u="none" strike="noStrike" cap="none" spc="0">
+              <a:rPr lang="fr-FR" sz="1200" b="0" i="0" u="none" strike="noStrike" cap="none" spc="0">
                 <a:solidFill>
                   <a:schemeClr val="bg1">
                     <a:lumMod val="75000"/>
@@ -7461,7 +6650,7 @@
               <a:t>▢</a:t>
             </a:r>
             <a:r>
-              <a:rPr lang="fr-FR" sz="1400" b="0" i="0" u="none" strike="noStrike" cap="none" spc="0">
+              <a:rPr lang="fr-FR" sz="1200" b="0" i="0" u="none" strike="noStrike" cap="none" spc="0">
                 <a:solidFill>
                   <a:schemeClr val="bg1">
                     <a:lumMod val="75000"/>
@@ -7474,7 +6663,7 @@
               <a:t>▢</a:t>
             </a:r>
             <a:r>
-              <a:rPr lang="fr-FR" sz="1400" b="0" i="0" u="none" strike="noStrike" cap="none" spc="0">
+              <a:rPr lang="fr-FR" sz="1200" b="0" i="0" u="none" strike="noStrike" cap="none" spc="0">
                 <a:solidFill>
                   <a:schemeClr val="bg1">
                     <a:lumMod val="75000"/>
@@ -7487,7 +6676,7 @@
               <a:t>▢</a:t>
             </a:r>
             <a:r>
-              <a:rPr lang="fr-FR" sz="1400" b="0" i="0" u="none" strike="noStrike" cap="none" spc="0">
+              <a:rPr lang="fr-FR" sz="1200" b="0" i="0" u="none" strike="noStrike" cap="none" spc="0">
                 <a:solidFill>
                   <a:schemeClr val="bg1">
                     <a:lumMod val="75000"/>
@@ -7500,7 +6689,7 @@
               <a:t>▢</a:t>
             </a:r>
             <a:r>
-              <a:rPr sz="1400">
+              <a:rPr sz="1200">
                 <a:solidFill>
                   <a:schemeClr val="bg1">
                     <a:lumMod val="75000"/>
@@ -7510,7 +6699,7 @@
               <a:t> </a:t>
             </a:r>
             <a:r>
-              <a:rPr lang="fr-FR" sz="1400" b="0" i="0" u="none" strike="noStrike" cap="none" spc="0">
+              <a:rPr lang="fr-FR" sz="1200" b="0" i="0" u="none" strike="noStrike" cap="none" spc="0">
                 <a:solidFill>
                   <a:schemeClr val="bg1">
                     <a:lumMod val="75000"/>
@@ -7523,7 +6712,7 @@
               <a:t>▢</a:t>
             </a:r>
             <a:r>
-              <a:rPr lang="fr-FR" sz="1400" b="0" i="0" u="none" strike="noStrike" cap="none" spc="0">
+              <a:rPr lang="fr-FR" sz="1200" b="0" i="0" u="none" strike="noStrike" cap="none" spc="0">
                 <a:solidFill>
                   <a:schemeClr val="bg1">
                     <a:lumMod val="75000"/>
@@ -7536,7 +6725,7 @@
               <a:t>▢</a:t>
             </a:r>
             <a:r>
-              <a:rPr lang="fr-FR" sz="1400" b="0" i="0" u="none" strike="noStrike" cap="none" spc="0">
+              <a:rPr lang="fr-FR" sz="1200" b="0" i="0" u="none" strike="noStrike" cap="none" spc="0">
                 <a:solidFill>
                   <a:schemeClr val="bg1">
                     <a:lumMod val="75000"/>
@@ -7549,7 +6738,7 @@
               <a:t>▢</a:t>
             </a:r>
             <a:r>
-              <a:rPr lang="fr-FR" sz="1400" b="0" i="0" u="none" strike="noStrike" cap="none" spc="0">
+              <a:rPr lang="fr-FR" sz="1200" b="0" i="0" u="none" strike="noStrike" cap="none" spc="0">
                 <a:solidFill>
                   <a:schemeClr val="bg1">
                     <a:lumMod val="75000"/>
@@ -7562,7 +6751,7 @@
               <a:t>▢</a:t>
             </a:r>
             <a:r>
-              <a:rPr lang="fr-FR" sz="1400" b="0" i="0" u="none" strike="noStrike" cap="none" spc="0">
+              <a:rPr lang="fr-FR" sz="1200" b="0" i="0" u="none" strike="noStrike" cap="none" spc="0">
                 <a:solidFill>
                   <a:schemeClr val="bg1">
                     <a:lumMod val="75000"/>
@@ -7574,7 +6763,7 @@
               </a:rPr>
               <a:t>▢</a:t>
             </a:r>
-            <a:endParaRPr sz="1400">
+            <a:endParaRPr sz="1200">
               <a:solidFill>
                 <a:schemeClr val="bg1">
                   <a:lumMod val="75000"/>
@@ -7590,7 +6779,7 @@
               <a:defRPr/>
             </a:pPr>
             <a:r>
-              <a:rPr lang="fr-FR" sz="1400" b="0" i="0" u="none" strike="noStrike" cap="none" spc="0">
+              <a:rPr lang="fr-FR" sz="1200" b="0" i="0" u="none" strike="noStrike" cap="none" spc="0">
                 <a:solidFill>
                   <a:schemeClr val="bg1">
                     <a:lumMod val="75000"/>
@@ -7603,7 +6792,7 @@
               <a:t>▢</a:t>
             </a:r>
             <a:r>
-              <a:rPr lang="fr-FR" sz="1400" b="0" i="0" u="none" strike="noStrike" cap="none" spc="0">
+              <a:rPr lang="fr-FR" sz="1200" b="0" i="0" u="none" strike="noStrike" cap="none" spc="0">
                 <a:solidFill>
                   <a:schemeClr val="bg1">
                     <a:lumMod val="75000"/>
@@ -7616,7 +6805,7 @@
               <a:t>▢</a:t>
             </a:r>
             <a:r>
-              <a:rPr lang="fr-FR" sz="1400" b="0" i="0" u="none" strike="noStrike" cap="none" spc="0">
+              <a:rPr lang="fr-FR" sz="1200" b="0" i="0" u="none" strike="noStrike" cap="none" spc="0">
                 <a:solidFill>
                   <a:schemeClr val="bg1">
                     <a:lumMod val="75000"/>
@@ -7629,7 +6818,7 @@
               <a:t>▢</a:t>
             </a:r>
             <a:r>
-              <a:rPr lang="fr-FR" sz="1400" b="0" i="0" u="none" strike="noStrike" cap="none" spc="0">
+              <a:rPr lang="fr-FR" sz="1200" b="0" i="0" u="none" strike="noStrike" cap="none" spc="0">
                 <a:solidFill>
                   <a:schemeClr val="bg1">
                     <a:lumMod val="75000"/>
@@ -7642,7 +6831,7 @@
               <a:t>▢</a:t>
             </a:r>
             <a:r>
-              <a:rPr lang="fr-FR" sz="1400" b="0" i="0" u="none" strike="noStrike" cap="none" spc="0">
+              <a:rPr lang="fr-FR" sz="1200" b="0" i="0" u="none" strike="noStrike" cap="none" spc="0">
                 <a:solidFill>
                   <a:schemeClr val="bg1">
                     <a:lumMod val="75000"/>
@@ -7655,7 +6844,7 @@
               <a:t>▢</a:t>
             </a:r>
             <a:r>
-              <a:rPr sz="1400">
+              <a:rPr sz="1200">
                 <a:solidFill>
                   <a:schemeClr val="bg1">
                     <a:lumMod val="75000"/>
@@ -7665,7 +6854,7 @@
               <a:t> </a:t>
             </a:r>
             <a:r>
-              <a:rPr lang="fr-FR" sz="1400" b="0" i="0" u="none" strike="noStrike" cap="none" spc="0">
+              <a:rPr lang="fr-FR" sz="1200" b="0" i="0" u="none" strike="noStrike" cap="none" spc="0">
                 <a:solidFill>
                   <a:schemeClr val="bg1">
                     <a:lumMod val="75000"/>
@@ -7678,7 +6867,7 @@
               <a:t>▢</a:t>
             </a:r>
             <a:r>
-              <a:rPr lang="fr-FR" sz="1400" b="0" i="0" u="none" strike="noStrike" cap="none" spc="0">
+              <a:rPr lang="fr-FR" sz="1200" b="0" i="0" u="none" strike="noStrike" cap="none" spc="0">
                 <a:solidFill>
                   <a:schemeClr val="bg1">
                     <a:lumMod val="75000"/>
@@ -7691,7 +6880,7 @@
               <a:t>▢</a:t>
             </a:r>
             <a:r>
-              <a:rPr lang="fr-FR" sz="1400" b="0" i="0" u="none" strike="noStrike" cap="none" spc="0">
+              <a:rPr lang="fr-FR" sz="1200" b="0" i="0" u="none" strike="noStrike" cap="none" spc="0">
                 <a:solidFill>
                   <a:schemeClr val="bg1">
                     <a:lumMod val="75000"/>
@@ -7704,7 +6893,7 @@
               <a:t>▢</a:t>
             </a:r>
             <a:r>
-              <a:rPr lang="fr-FR" sz="1400" b="0" i="0" u="none" strike="noStrike" cap="none" spc="0">
+              <a:rPr lang="fr-FR" sz="1200" b="0" i="0" u="none" strike="noStrike" cap="none" spc="0">
                 <a:solidFill>
                   <a:schemeClr val="bg1">
                     <a:lumMod val="75000"/>
@@ -7717,7 +6906,7 @@
               <a:t>▢</a:t>
             </a:r>
             <a:r>
-              <a:rPr lang="fr-FR" sz="1400" b="0" i="0" u="none" strike="noStrike" cap="none" spc="0">
+              <a:rPr lang="fr-FR" sz="1200" b="0" i="0" u="none" strike="noStrike" cap="none" spc="0">
                 <a:solidFill>
                   <a:schemeClr val="bg1">
                     <a:lumMod val="75000"/>
@@ -7729,7 +6918,7 @@
               </a:rPr>
               <a:t>▢</a:t>
             </a:r>
-            <a:endParaRPr sz="1400">
+            <a:endParaRPr sz="1200">
               <a:solidFill>
                 <a:schemeClr val="bg1">
                   <a:lumMod val="75000"/>
@@ -7738,14 +6927,14 @@
             </a:endParaRPr>
           </a:p>
           <a:p>
-            <a:pPr algn="l">
+            <a:pPr algn="ctr">
               <a:lnSpc>
                 <a:spcPct val="100000"/>
               </a:lnSpc>
               <a:defRPr/>
             </a:pPr>
             <a:r>
-              <a:rPr lang="fr-FR" sz="1400" b="0" i="0" u="none" strike="noStrike" cap="none" spc="0">
+              <a:rPr lang="fr-FR" sz="1200" b="0" i="0" u="none" strike="noStrike" cap="none" spc="0">
                 <a:solidFill>
                   <a:schemeClr val="bg1">
                     <a:lumMod val="75000"/>
@@ -7758,7 +6947,7 @@
               <a:t>▢</a:t>
             </a:r>
             <a:r>
-              <a:rPr lang="fr-FR" sz="1400" b="0" i="0" u="none" strike="noStrike" cap="none" spc="0">
+              <a:rPr lang="fr-FR" sz="1200" b="0" i="0" u="none" strike="noStrike" cap="none" spc="0">
                 <a:solidFill>
                   <a:schemeClr val="bg1">
                     <a:lumMod val="75000"/>
@@ -7771,7 +6960,7 @@
               <a:t>▢</a:t>
             </a:r>
             <a:r>
-              <a:rPr lang="fr-FR" sz="1400" b="0" i="0" u="none" strike="noStrike" cap="none" spc="0">
+              <a:rPr lang="fr-FR" sz="1200" b="0" i="0" u="none" strike="noStrike" cap="none" spc="0">
                 <a:solidFill>
                   <a:schemeClr val="bg1">
                     <a:lumMod val="75000"/>
@@ -7784,7 +6973,7 @@
               <a:t>▢</a:t>
             </a:r>
             <a:r>
-              <a:rPr lang="fr-FR" sz="1400" b="0" i="0" u="none" strike="noStrike" cap="none" spc="0">
+              <a:rPr lang="fr-FR" sz="1200" b="0" i="0" u="none" strike="noStrike" cap="none" spc="0">
                 <a:solidFill>
                   <a:schemeClr val="bg1">
                     <a:lumMod val="75000"/>
@@ -7797,7 +6986,7 @@
               <a:t>▢</a:t>
             </a:r>
             <a:r>
-              <a:rPr lang="fr-FR" sz="1400" b="0" i="0" u="none" strike="noStrike" cap="none" spc="0">
+              <a:rPr lang="fr-FR" sz="1200" b="0" i="0" u="none" strike="noStrike" cap="none" spc="0">
                 <a:solidFill>
                   <a:schemeClr val="bg1">
                     <a:lumMod val="75000"/>
@@ -7810,7 +6999,7 @@
               <a:t>▢</a:t>
             </a:r>
             <a:r>
-              <a:rPr sz="1400">
+              <a:rPr sz="1200">
                 <a:solidFill>
                   <a:schemeClr val="bg1">
                     <a:lumMod val="75000"/>
@@ -7820,7 +7009,7 @@
               <a:t> </a:t>
             </a:r>
             <a:r>
-              <a:rPr lang="fr-FR" sz="1400" b="0" i="0" u="none" strike="noStrike" cap="none" spc="0">
+              <a:rPr lang="fr-FR" sz="1200" b="0" i="0" u="none" strike="noStrike" cap="none" spc="0">
                 <a:solidFill>
                   <a:schemeClr val="bg1">
                     <a:lumMod val="75000"/>
@@ -7833,7 +7022,7 @@
               <a:t>▢</a:t>
             </a:r>
             <a:r>
-              <a:rPr lang="fr-FR" sz="1400" b="0" i="0" u="none" strike="noStrike" cap="none" spc="0">
+              <a:rPr lang="fr-FR" sz="1200" b="0" i="0" u="none" strike="noStrike" cap="none" spc="0">
                 <a:solidFill>
                   <a:schemeClr val="bg1">
                     <a:lumMod val="75000"/>
@@ -7846,7 +7035,7 @@
               <a:t>▢</a:t>
             </a:r>
             <a:r>
-              <a:rPr lang="fr-FR" sz="1400" b="0" i="0" u="none" strike="noStrike" cap="none" spc="0">
+              <a:rPr lang="fr-FR" sz="1200" b="0" i="0" u="none" strike="noStrike" cap="none" spc="0">
                 <a:solidFill>
                   <a:schemeClr val="bg1">
                     <a:lumMod val="75000"/>
@@ -7859,7 +7048,7 @@
               <a:t>▢</a:t>
             </a:r>
             <a:r>
-              <a:rPr lang="fr-FR" sz="1400" b="0" i="0" u="none" strike="noStrike" cap="none" spc="0">
+              <a:rPr lang="fr-FR" sz="1200" b="0" i="0" u="none" strike="noStrike" cap="none" spc="0">
                 <a:solidFill>
                   <a:schemeClr val="bg1">
                     <a:lumMod val="75000"/>
@@ -7872,7 +7061,7 @@
               <a:t>▢</a:t>
             </a:r>
             <a:r>
-              <a:rPr lang="fr-FR" sz="1400" b="0" i="0" u="none" strike="noStrike" cap="none" spc="0">
+              <a:rPr lang="fr-FR" sz="1200" b="0" i="0" u="none" strike="noStrike" cap="none" spc="0">
                 <a:solidFill>
                   <a:schemeClr val="bg1">
                     <a:lumMod val="75000"/>
@@ -7884,20 +7073,187 @@
               </a:rPr>
               <a:t>▢</a:t>
             </a:r>
-            <a:endParaRPr/>
+            <a:br>
+              <a:rPr lang="fr-FR" sz="1200" b="0" i="0" u="none" strike="noStrike" cap="none" spc="0">
+                <a:solidFill>
+                  <a:schemeClr val="bg1">
+                    <a:lumMod val="75000"/>
+                  </a:schemeClr>
+                </a:solidFill>
+                <a:latin typeface="Cambria Math"/>
+                <a:ea typeface="Cambria Math"/>
+                <a:cs typeface="Cambria Math"/>
+              </a:rPr>
+            </a:br>
+            <a:br>
+              <a:rPr lang="fr-FR" sz="600" b="0" i="0" u="none" strike="noStrike" cap="none" spc="0">
+                <a:solidFill>
+                  <a:schemeClr val="bg1">
+                    <a:lumMod val="75000"/>
+                  </a:schemeClr>
+                </a:solidFill>
+                <a:latin typeface="Cambria Math"/>
+                <a:ea typeface="Cambria Math"/>
+                <a:cs typeface="Cambria Math"/>
+              </a:rPr>
+            </a:br>
+            <a:r>
+              <a:rPr lang="fr-FR" sz="950" b="0" i="0" u="none" strike="noStrike" cap="none" spc="0">
+                <a:solidFill>
+                  <a:schemeClr val="bg1">
+                    <a:lumMod val="75000"/>
+                  </a:schemeClr>
+                </a:solidFill>
+                <a:latin typeface="Cambria Math"/>
+                <a:ea typeface="Cambria Math"/>
+                <a:cs typeface="Cambria Math"/>
+              </a:rPr>
+              <a:t>◯</a:t>
+            </a:r>
+            <a:r>
+              <a:rPr lang="fr-FR" sz="950" b="0" i="0" u="none" strike="noStrike" cap="none" spc="0">
+                <a:solidFill>
+                  <a:schemeClr val="bg1">
+                    <a:lumMod val="75000"/>
+                  </a:schemeClr>
+                </a:solidFill>
+                <a:latin typeface="Cambria Math"/>
+                <a:ea typeface="Cambria Math"/>
+                <a:cs typeface="Cambria Math"/>
+              </a:rPr>
+              <a:t>◯</a:t>
+            </a:r>
+            <a:r>
+              <a:rPr lang="fr-FR" sz="950" b="0" i="0" u="none" strike="noStrike" cap="none" spc="0">
+                <a:solidFill>
+                  <a:schemeClr val="bg1">
+                    <a:lumMod val="75000"/>
+                  </a:schemeClr>
+                </a:solidFill>
+                <a:latin typeface="Cambria Math"/>
+                <a:ea typeface="Cambria Math"/>
+                <a:cs typeface="Cambria Math"/>
+              </a:rPr>
+              <a:t>◯</a:t>
+            </a:r>
+            <a:r>
+              <a:rPr lang="fr-FR" sz="950" b="0" i="0" u="none" strike="noStrike" cap="none" spc="0">
+                <a:solidFill>
+                  <a:schemeClr val="bg1">
+                    <a:lumMod val="75000"/>
+                  </a:schemeClr>
+                </a:solidFill>
+                <a:latin typeface="Cambria Math"/>
+                <a:ea typeface="Cambria Math"/>
+                <a:cs typeface="Cambria Math"/>
+              </a:rPr>
+              <a:t>◯</a:t>
+            </a:r>
+            <a:r>
+              <a:rPr lang="fr-FR" sz="950" b="0" i="0" u="none" strike="noStrike" cap="none" spc="0">
+                <a:solidFill>
+                  <a:schemeClr val="bg1">
+                    <a:lumMod val="75000"/>
+                  </a:schemeClr>
+                </a:solidFill>
+                <a:latin typeface="Cambria Math"/>
+                <a:ea typeface="Cambria Math"/>
+                <a:cs typeface="Cambria Math"/>
+              </a:rPr>
+              <a:t>◯</a:t>
+            </a:r>
+            <a:r>
+              <a:rPr lang="fr-FR" sz="950" b="0" i="0" u="none" strike="noStrike" cap="none" spc="0">
+                <a:solidFill>
+                  <a:schemeClr val="bg1">
+                    <a:lumMod val="75000"/>
+                  </a:schemeClr>
+                </a:solidFill>
+                <a:latin typeface="Cambria Math"/>
+                <a:ea typeface="Cambria Math"/>
+                <a:cs typeface="Cambria Math"/>
+              </a:rPr>
+              <a:t> </a:t>
+            </a:r>
+            <a:r>
+              <a:rPr lang="fr-FR" sz="950" b="0" i="0" u="none" strike="noStrike" cap="none" spc="0">
+                <a:solidFill>
+                  <a:schemeClr val="bg1">
+                    <a:lumMod val="75000"/>
+                  </a:schemeClr>
+                </a:solidFill>
+                <a:latin typeface="Cambria Math"/>
+                <a:ea typeface="Cambria Math"/>
+                <a:cs typeface="Cambria Math"/>
+              </a:rPr>
+              <a:t>◯</a:t>
+            </a:r>
+            <a:r>
+              <a:rPr lang="fr-FR" sz="950" b="0" i="0" u="none" strike="noStrike" cap="none" spc="0">
+                <a:solidFill>
+                  <a:schemeClr val="bg1">
+                    <a:lumMod val="75000"/>
+                  </a:schemeClr>
+                </a:solidFill>
+                <a:latin typeface="Cambria Math"/>
+                <a:ea typeface="Cambria Math"/>
+                <a:cs typeface="Cambria Math"/>
+              </a:rPr>
+              <a:t>◯</a:t>
+            </a:r>
+            <a:r>
+              <a:rPr lang="fr-FR" sz="950" b="0" i="0" u="none" strike="noStrike" cap="none" spc="0">
+                <a:solidFill>
+                  <a:schemeClr val="bg1">
+                    <a:lumMod val="75000"/>
+                  </a:schemeClr>
+                </a:solidFill>
+                <a:latin typeface="Cambria Math"/>
+                <a:ea typeface="Cambria Math"/>
+                <a:cs typeface="Cambria Math"/>
+              </a:rPr>
+              <a:t>◯</a:t>
+            </a:r>
+            <a:r>
+              <a:rPr lang="fr-FR" sz="950" b="0" i="0" u="none" strike="noStrike" cap="none" spc="0">
+                <a:solidFill>
+                  <a:schemeClr val="bg1">
+                    <a:lumMod val="75000"/>
+                  </a:schemeClr>
+                </a:solidFill>
+                <a:latin typeface="Cambria Math"/>
+                <a:ea typeface="Cambria Math"/>
+                <a:cs typeface="Cambria Math"/>
+              </a:rPr>
+              <a:t>◯</a:t>
+            </a:r>
+            <a:r>
+              <a:rPr lang="fr-FR" sz="950" b="0" i="0" u="none" strike="noStrike" cap="none" spc="0">
+                <a:solidFill>
+                  <a:schemeClr val="bg1">
+                    <a:lumMod val="75000"/>
+                  </a:schemeClr>
+                </a:solidFill>
+                <a:latin typeface="Cambria Math"/>
+                <a:ea typeface="Cambria Math"/>
+                <a:cs typeface="Cambria Math"/>
+              </a:rPr>
+              <a:t>◯</a:t>
+            </a:r>
+            <a:endParaRPr sz="1600"/>
           </a:p>
         </p:txBody>
       </p:sp>
       <p:cxnSp>
         <p:nvCxnSpPr>
-          <p:cNvPr id="299186467" name="Connecteur droit 806540798"/>
+          <p:cNvPr id="1302749076" name="Connecteur droit 806540798"/>
           <p:cNvCxnSpPr/>
           <p:nvPr/>
         </p:nvCxnSpPr>
         <p:spPr bwMode="auto">
           <a:xfrm flipH="0" flipV="1">
-            <a:off x="4741267" y="6359193"/>
-            <a:ext cx="2192728" cy="0"/>
+            <a:off x="4741266" y="6066115"/>
+            <a:ext cx="2127233" cy="0"/>
           </a:xfrm>
           <a:prstGeom prst="line">
             <a:avLst/>
@@ -7931,13 +7287,13 @@
       </p:cxnSp>
       <p:sp>
         <p:nvSpPr>
-          <p:cNvPr id="1887723397" name="ZoneTexte 406616703"/>
+          <p:cNvPr id="2034341687" name="ZoneTexte 406616703"/>
           <p:cNvSpPr txBox="1"/>
           <p:nvPr/>
         </p:nvSpPr>
         <p:spPr bwMode="auto">
           <a:xfrm flipH="0" flipV="0">
-            <a:off x="4778845" y="6176131"/>
+            <a:off x="4705575" y="5883053"/>
             <a:ext cx="1314883" cy="366120"/>
           </a:xfrm>
           <a:prstGeom prst="rect">
@@ -7974,7 +7330,7 @@
       </p:sp>
       <p:cxnSp>
         <p:nvCxnSpPr>
-          <p:cNvPr id="983280546" name="Connecteur droit 858914340"/>
+          <p:cNvPr id="244751663" name="Connecteur droit 858914340"/>
           <p:cNvCxnSpPr/>
           <p:nvPr/>
         </p:nvCxnSpPr>
@@ -8015,7 +7371,7 @@
       </p:cxnSp>
       <p:sp>
         <p:nvSpPr>
-          <p:cNvPr id="461086853" name="ZoneTexte 2018177722"/>
+          <p:cNvPr id="798421218" name="ZoneTexte 2018177722"/>
           <p:cNvSpPr txBox="1"/>
           <p:nvPr/>
         </p:nvSpPr>
@@ -8065,14 +7421,14 @@
       </p:sp>
       <p:sp>
         <p:nvSpPr>
-          <p:cNvPr id="1253007721" name=""/>
+          <p:cNvPr id="1525461952" name=""/>
           <p:cNvSpPr/>
           <p:nvPr/>
         </p:nvSpPr>
         <p:spPr bwMode="auto">
           <a:xfrm rot="0" flipH="0" flipV="0">
-            <a:off x="2369061" y="2420283"/>
-            <a:ext cx="2193145" cy="973546"/>
+            <a:off x="2295791" y="2420282"/>
+            <a:ext cx="2130852" cy="973545"/>
           </a:xfrm>
           <a:prstGeom prst="snip1Rect">
             <a:avLst>
@@ -8111,14 +7467,14 @@
       </p:sp>
       <p:sp>
         <p:nvSpPr>
-          <p:cNvPr id="1123510803" name=""/>
+          <p:cNvPr id="409169157" name=""/>
           <p:cNvSpPr/>
           <p:nvPr/>
         </p:nvSpPr>
         <p:spPr bwMode="auto">
           <a:xfrm rot="0" flipH="0" flipV="0">
-            <a:off x="83769" y="3473894"/>
-            <a:ext cx="2193145" cy="973546"/>
+            <a:off x="83768" y="3473893"/>
+            <a:ext cx="2146353" cy="973545"/>
           </a:xfrm>
           <a:prstGeom prst="snip1Rect">
             <a:avLst>
@@ -8157,14 +7513,14 @@
       </p:sp>
       <p:sp>
         <p:nvSpPr>
-          <p:cNvPr id="59160611" name=""/>
+          <p:cNvPr id="994198624" name=""/>
           <p:cNvSpPr/>
           <p:nvPr/>
         </p:nvSpPr>
         <p:spPr bwMode="auto">
           <a:xfrm rot="0" flipH="0" flipV="0">
-            <a:off x="2369061" y="3473894"/>
-            <a:ext cx="2193145" cy="973546"/>
+            <a:off x="2295791" y="3473893"/>
+            <a:ext cx="2130852" cy="973545"/>
           </a:xfrm>
           <a:prstGeom prst="snip1Rect">
             <a:avLst>
@@ -8203,14 +7559,14 @@
       </p:sp>
       <p:sp>
         <p:nvSpPr>
-          <p:cNvPr id="1264174807" name=""/>
+          <p:cNvPr id="284728901" name=""/>
           <p:cNvSpPr/>
           <p:nvPr/>
         </p:nvSpPr>
         <p:spPr bwMode="auto">
           <a:xfrm rot="0" flipH="0" flipV="0">
-            <a:off x="83769" y="4528971"/>
-            <a:ext cx="2193145" cy="973546"/>
+            <a:off x="83768" y="4528970"/>
+            <a:ext cx="2146353" cy="973545"/>
           </a:xfrm>
           <a:prstGeom prst="snip1Rect">
             <a:avLst>
@@ -8249,14 +7605,14 @@
       </p:sp>
       <p:sp>
         <p:nvSpPr>
-          <p:cNvPr id="30355592" name=""/>
+          <p:cNvPr id="489248542" name=""/>
           <p:cNvSpPr/>
           <p:nvPr/>
         </p:nvSpPr>
         <p:spPr bwMode="auto">
           <a:xfrm rot="0" flipH="0" flipV="0">
-            <a:off x="2369061" y="4528971"/>
-            <a:ext cx="2193145" cy="973546"/>
+            <a:off x="2295791" y="4528970"/>
+            <a:ext cx="2130852" cy="973545"/>
           </a:xfrm>
           <a:prstGeom prst="snip1Rect">
             <a:avLst>
@@ -8295,14 +7651,14 @@
       </p:sp>
       <p:sp>
         <p:nvSpPr>
-          <p:cNvPr id="42340312" name=""/>
+          <p:cNvPr id="332023648" name=""/>
           <p:cNvSpPr txBox="1"/>
           <p:nvPr/>
         </p:nvSpPr>
         <p:spPr bwMode="auto">
           <a:xfrm rot="0" flipH="0" flipV="0">
-            <a:off x="4513610" y="510900"/>
-            <a:ext cx="614406" cy="305159"/>
+            <a:off x="4538879" y="474265"/>
+            <a:ext cx="552861" cy="274679"/>
           </a:xfrm>
           <a:prstGeom prst="rect">
             <a:avLst/>
@@ -8321,27 +7677,27 @@
               <a:defRPr/>
             </a:pPr>
             <a:r>
-              <a:rPr sz="1400">
+              <a:rPr sz="1200">
                 <a:latin typeface="ComicNeueSansID"/>
                 <a:ea typeface="ComicNeueSansID"/>
                 <a:cs typeface="ComicNeueSansID"/>
               </a:rPr>
               <a:t>Rang</a:t>
             </a:r>
-            <a:endParaRPr/>
+            <a:endParaRPr sz="1600"/>
           </a:p>
         </p:txBody>
       </p:sp>
       <p:sp>
         <p:nvSpPr>
-          <p:cNvPr id="1158598029" name=""/>
+          <p:cNvPr id="1087923788" name=""/>
           <p:cNvSpPr txBox="1"/>
           <p:nvPr/>
         </p:nvSpPr>
         <p:spPr bwMode="auto">
           <a:xfrm rot="0" flipH="0" flipV="0">
-            <a:off x="5057424" y="510900"/>
-            <a:ext cx="1718413" cy="305159"/>
+            <a:off x="5020788" y="474265"/>
+            <a:ext cx="1499146" cy="274679"/>
           </a:xfrm>
           <a:prstGeom prst="rect">
             <a:avLst/>
@@ -8360,7 +7716,7 @@
               <a:defRPr/>
             </a:pPr>
             <a:r>
-              <a:rPr lang="fr-FR" sz="1400" b="0" i="0" u="none" strike="noStrike" cap="none" spc="0">
+              <a:rPr lang="fr-FR" sz="1200" b="0" i="0" u="none" strike="noStrike" cap="none" spc="0">
                 <a:solidFill>
                   <a:schemeClr val="bg1">
                     <a:lumMod val="75000"/>
@@ -8373,7 +7729,7 @@
               <a:t>▢</a:t>
             </a:r>
             <a:r>
-              <a:rPr lang="fr-FR" sz="1400" b="0" i="0" u="none" strike="noStrike" cap="none" spc="0">
+              <a:rPr lang="fr-FR" sz="1200" b="0" i="0" u="none" strike="noStrike" cap="none" spc="0">
                 <a:solidFill>
                   <a:schemeClr val="bg1">
                     <a:lumMod val="75000"/>
@@ -8386,7 +7742,7 @@
               <a:t>▢</a:t>
             </a:r>
             <a:r>
-              <a:rPr lang="fr-FR" sz="1400" b="0" i="0" u="none" strike="noStrike" cap="none" spc="0">
+              <a:rPr lang="fr-FR" sz="1200" b="0" i="0" u="none" strike="noStrike" cap="none" spc="0">
                 <a:solidFill>
                   <a:schemeClr val="bg1">
                     <a:lumMod val="75000"/>
@@ -8399,7 +7755,7 @@
               <a:t>▢</a:t>
             </a:r>
             <a:r>
-              <a:rPr lang="fr-FR" sz="1400" b="0" i="0" u="none" strike="noStrike" cap="none" spc="0">
+              <a:rPr lang="fr-FR" sz="1200" b="0" i="0" u="none" strike="noStrike" cap="none" spc="0">
                 <a:solidFill>
                   <a:schemeClr val="bg1">
                     <a:lumMod val="75000"/>
@@ -8412,7 +7768,7 @@
               <a:t>▢</a:t>
             </a:r>
             <a:r>
-              <a:rPr lang="fr-FR" sz="1400" b="0" i="0" u="none" strike="noStrike" cap="none" spc="0">
+              <a:rPr lang="fr-FR" sz="1200" b="0" i="0" u="none" strike="noStrike" cap="none" spc="0">
                 <a:solidFill>
                   <a:schemeClr val="bg1">
                     <a:lumMod val="75000"/>
@@ -8425,7 +7781,7 @@
               <a:t>▢</a:t>
             </a:r>
             <a:r>
-              <a:rPr sz="1400">
+              <a:rPr sz="1200">
                 <a:solidFill>
                   <a:schemeClr val="bg1">
                     <a:lumMod val="75000"/>
@@ -8435,7 +7791,7 @@
               <a:t> </a:t>
             </a:r>
             <a:r>
-              <a:rPr lang="fr-FR" sz="1400" b="0" i="0" u="none" strike="noStrike" cap="none" spc="0">
+              <a:rPr lang="fr-FR" sz="1200" b="0" i="0" u="none" strike="noStrike" cap="none" spc="0">
                 <a:solidFill>
                   <a:schemeClr val="bg1">
                     <a:lumMod val="75000"/>
@@ -8448,7 +7804,7 @@
               <a:t>▢</a:t>
             </a:r>
             <a:r>
-              <a:rPr lang="fr-FR" sz="1400" b="0" i="0" u="none" strike="noStrike" cap="none" spc="0">
+              <a:rPr lang="fr-FR" sz="1200" b="0" i="0" u="none" strike="noStrike" cap="none" spc="0">
                 <a:solidFill>
                   <a:schemeClr val="bg1">
                     <a:lumMod val="75000"/>
@@ -8461,7 +7817,7 @@
               <a:t>▢</a:t>
             </a:r>
             <a:r>
-              <a:rPr lang="fr-FR" sz="1400" b="0" i="0" u="none" strike="noStrike" cap="none" spc="0">
+              <a:rPr lang="fr-FR" sz="1200" b="0" i="0" u="none" strike="noStrike" cap="none" spc="0">
                 <a:solidFill>
                   <a:schemeClr val="bg1">
                     <a:lumMod val="75000"/>
@@ -8474,7 +7830,7 @@
               <a:t>▢</a:t>
             </a:r>
             <a:r>
-              <a:rPr lang="fr-FR" sz="1400" b="0" i="0" u="none" strike="noStrike" cap="none" spc="0">
+              <a:rPr lang="fr-FR" sz="1200" b="0" i="0" u="none" strike="noStrike" cap="none" spc="0">
                 <a:solidFill>
                   <a:schemeClr val="bg1">
                     <a:lumMod val="75000"/>
@@ -8487,7 +7843,7 @@
               <a:t>▢</a:t>
             </a:r>
             <a:r>
-              <a:rPr lang="fr-FR" sz="1400" b="0" i="0" u="none" strike="noStrike" cap="none" spc="0">
+              <a:rPr lang="fr-FR" sz="1200" b="0" i="0" u="none" strike="noStrike" cap="none" spc="0">
                 <a:solidFill>
                   <a:schemeClr val="bg1">
                     <a:lumMod val="75000"/>
@@ -8499,19 +7855,19 @@
               </a:rPr>
               <a:t>▢</a:t>
             </a:r>
-            <a:endParaRPr sz="1400"/>
+            <a:endParaRPr sz="1200"/>
           </a:p>
         </p:txBody>
       </p:sp>
       <p:cxnSp>
         <p:nvCxnSpPr>
-          <p:cNvPr id="1155068513" name=""/>
+          <p:cNvPr id="777786734" name=""/>
           <p:cNvCxnSpPr/>
           <p:nvPr/>
         </p:nvCxnSpPr>
         <p:spPr bwMode="auto">
           <a:xfrm rot="5400000" flipH="1" flipV="1">
-            <a:off x="5905202" y="482408"/>
+            <a:off x="5758663" y="445773"/>
             <a:ext cx="0" cy="761999"/>
           </a:xfrm>
           <a:prstGeom prst="line">
@@ -8546,7 +7902,7 @@
       </p:cxnSp>
       <p:cxnSp>
         <p:nvCxnSpPr>
-          <p:cNvPr id="308482460" name="Connecteur droit 342798987"/>
+          <p:cNvPr id="529966544" name="Connecteur droit 342798987"/>
           <p:cNvCxnSpPr/>
           <p:nvPr/>
         </p:nvCxnSpPr>
@@ -8587,7 +7943,7 @@
       </p:cxnSp>
       <p:sp>
         <p:nvSpPr>
-          <p:cNvPr id="1399061698" name="ZoneTexte 966486802"/>
+          <p:cNvPr id="1816912868" name="ZoneTexte 966486802"/>
           <p:cNvSpPr txBox="1"/>
           <p:nvPr/>
         </p:nvSpPr>
@@ -8676,7 +8032,7 @@
       </p:sp>
       <p:cxnSp>
         <p:nvCxnSpPr>
-          <p:cNvPr id="333348597" name="Connecteur droit 806540798"/>
+          <p:cNvPr id="1524338625" name="Connecteur droit 806540798"/>
           <p:cNvCxnSpPr/>
           <p:nvPr/>
         </p:nvCxnSpPr>
@@ -8717,7 +8073,7 @@
       </p:cxnSp>
       <p:sp>
         <p:nvSpPr>
-          <p:cNvPr id="967386440" name="ZoneTexte 406616703"/>
+          <p:cNvPr id="483216912" name="ZoneTexte 406616703"/>
           <p:cNvSpPr txBox="1"/>
           <p:nvPr/>
         </p:nvSpPr>
@@ -8760,14 +8116,14 @@
       </p:sp>
       <p:sp>
         <p:nvSpPr>
-          <p:cNvPr id="307152589" name=""/>
+          <p:cNvPr id="483460242" name=""/>
           <p:cNvSpPr txBox="1"/>
           <p:nvPr/>
         </p:nvSpPr>
         <p:spPr bwMode="auto">
           <a:xfrm rot="0" flipH="0" flipV="0">
-            <a:off x="2424655" y="6202249"/>
-            <a:ext cx="2342712" cy="2392711"/>
+            <a:off x="2386090" y="6202248"/>
+            <a:ext cx="2181685" cy="2392711"/>
           </a:xfrm>
           <a:prstGeom prst="rect">
             <a:avLst/>
@@ -8820,7 +8176,7 @@
                 <a:ea typeface="Arial"/>
                 <a:cs typeface="Arial"/>
               </a:rPr>
-              <a:t>___________________</a:t>
+              <a:t>__________________</a:t>
             </a:r>
             <a:endParaRPr lang="fr-FR" sz="1000" b="0" i="0" u="none" strike="noStrike" cap="none" spc="0">
               <a:solidFill>
@@ -8851,7 +8207,7 @@
                 <a:ea typeface="Arial"/>
                 <a:cs typeface="Arial"/>
               </a:rPr>
-              <a:t>____________________________</a:t>
+              <a:t>___________________________</a:t>
             </a:r>
             <a:endParaRPr lang="fr-FR" sz="1200" b="0" i="0" u="none" strike="noStrike" cap="none" spc="0">
               <a:solidFill>
@@ -8888,7 +8244,7 @@
                 <a:ea typeface="Arial"/>
                 <a:cs typeface="Arial"/>
               </a:rPr>
-              <a:t>____________________________</a:t>
+              <a:t>___________________________</a:t>
             </a:r>
             <a:br>
               <a:rPr lang="fr-FR" sz="1000" b="0" i="0" u="none" strike="noStrike" cap="none" spc="0">
@@ -8913,7 +8269,7 @@
                 <a:ea typeface="Arial"/>
                 <a:cs typeface="Arial"/>
               </a:rPr>
-              <a:t>____________________________</a:t>
+              <a:t>___________________________</a:t>
             </a:r>
             <a:endParaRPr sz="1000" b="0" i="0" u="none" strike="noStrike" cap="none" spc="0">
               <a:solidFill>
@@ -8961,7 +8317,7 @@
                 <a:ea typeface="Arial"/>
                 <a:cs typeface="Arial"/>
               </a:rPr>
-              <a:t> _______________</a:t>
+              <a:t> ______________</a:t>
             </a:r>
             <a:endParaRPr sz="1000" b="0" i="0" u="none" strike="noStrike" cap="none" spc="0">
               <a:solidFill>
@@ -8998,7 +8354,7 @@
                 <a:ea typeface="Arial"/>
                 <a:cs typeface="Arial"/>
               </a:rPr>
-              <a:t>____________________________</a:t>
+              <a:t>___________________________</a:t>
             </a:r>
             <a:endParaRPr sz="1000" b="0" i="0" u="none" strike="noStrike" cap="none" spc="0">
               <a:solidFill>
@@ -9035,7 +8391,7 @@
                 <a:ea typeface="Arial"/>
                 <a:cs typeface="Arial"/>
               </a:rPr>
-              <a:t>____________________________</a:t>
+              <a:t>___________________________</a:t>
             </a:r>
             <a:endParaRPr sz="1000" b="0" i="0" u="none" strike="noStrike" cap="none" spc="0">
               <a:solidFill>
@@ -9072,7 +8428,7 @@
                 <a:ea typeface="Arial"/>
                 <a:cs typeface="Arial"/>
               </a:rPr>
-              <a:t>____________________________</a:t>
+              <a:t>___________________________</a:t>
             </a:r>
             <a:endParaRPr sz="1000" b="0" i="0" u="none" strike="noStrike" cap="none" spc="0">
               <a:solidFill>
@@ -9103,7 +8459,7 @@
                 <a:ea typeface="Arial"/>
                 <a:cs typeface="Arial"/>
               </a:rPr>
-              <a:t>____________________________</a:t>
+              <a:t>___________________________</a:t>
             </a:r>
             <a:br>
               <a:rPr lang="fr-FR" sz="1000" b="0" i="0" u="none" strike="noStrike" cap="none" spc="0">
@@ -9128,7 +8484,7 @@
                 <a:ea typeface="Arial"/>
                 <a:cs typeface="Arial"/>
               </a:rPr>
-              <a:t>____________________________</a:t>
+              <a:t>___________________________</a:t>
             </a:r>
             <a:endParaRPr lang="fr-FR" sz="1000" b="0" i="0" u="none" strike="noStrike" cap="none" spc="0">
               <a:solidFill>
@@ -9145,7 +8501,7 @@
       </p:sp>
       <p:sp>
         <p:nvSpPr>
-          <p:cNvPr id="575670035" name=""/>
+          <p:cNvPr id="326731330" name=""/>
           <p:cNvSpPr/>
           <p:nvPr/>
         </p:nvSpPr>
@@ -9187,7 +8543,7 @@
       </p:sp>
       <p:sp>
         <p:nvSpPr>
-          <p:cNvPr id="993740740" name=""/>
+          <p:cNvPr id="915077500" name=""/>
           <p:cNvSpPr/>
           <p:nvPr/>
         </p:nvSpPr>
@@ -9229,7 +8585,7 @@
       </p:sp>
       <p:sp>
         <p:nvSpPr>
-          <p:cNvPr id="311621164" name=""/>
+          <p:cNvPr id="2069249005" name=""/>
           <p:cNvSpPr/>
           <p:nvPr/>
         </p:nvSpPr>
@@ -9271,7 +8627,7 @@
       </p:sp>
       <p:sp>
         <p:nvSpPr>
-          <p:cNvPr id="895687994" name=""/>
+          <p:cNvPr id="2122069353" name=""/>
           <p:cNvSpPr/>
           <p:nvPr/>
         </p:nvSpPr>
@@ -9313,7 +8669,7 @@
       </p:sp>
       <p:sp>
         <p:nvSpPr>
-          <p:cNvPr id="1604718400" name=""/>
+          <p:cNvPr id="1230424828" name=""/>
           <p:cNvSpPr/>
           <p:nvPr/>
         </p:nvSpPr>
@@ -9355,7 +8711,7 @@
       </p:sp>
       <p:sp>
         <p:nvSpPr>
-          <p:cNvPr id="1048284134" name=""/>
+          <p:cNvPr id="1737642139" name=""/>
           <p:cNvSpPr/>
           <p:nvPr/>
         </p:nvSpPr>
@@ -9397,7 +8753,7 @@
       </p:sp>
       <p:sp>
         <p:nvSpPr>
-          <p:cNvPr id="1727588171" name=""/>
+          <p:cNvPr id="1675463889" name=""/>
           <p:cNvSpPr/>
           <p:nvPr/>
         </p:nvSpPr>
@@ -9439,7 +8795,7 @@
       </p:sp>
       <p:sp>
         <p:nvSpPr>
-          <p:cNvPr id="1889027659" name=""/>
+          <p:cNvPr id="1343254621" name=""/>
           <p:cNvSpPr/>
           <p:nvPr/>
         </p:nvSpPr>
@@ -9481,7 +8837,7 @@
       </p:sp>
       <p:sp>
         <p:nvSpPr>
-          <p:cNvPr id="1462076599" name=""/>
+          <p:cNvPr id="1532276431" name=""/>
           <p:cNvSpPr/>
           <p:nvPr/>
         </p:nvSpPr>
@@ -9523,7 +8879,7 @@
       </p:sp>
       <p:sp>
         <p:nvSpPr>
-          <p:cNvPr id="997330002" name=""/>
+          <p:cNvPr id="1481221347" name=""/>
           <p:cNvSpPr/>
           <p:nvPr/>
         </p:nvSpPr>
@@ -9565,13 +8921,101 @@
       </p:sp>
       <p:sp>
         <p:nvSpPr>
-          <p:cNvPr id="117775383" name="Flèche : pentagone 1880610112"/>
+          <p:cNvPr id="300197371" name="Flèche : pentagone 1980093981"/>
           <p:cNvSpPr/>
           <p:nvPr/>
         </p:nvSpPr>
         <p:spPr bwMode="auto">
           <a:xfrm>
-            <a:off x="2550591" y="5977434"/>
+            <a:off x="2677303" y="5977432"/>
+            <a:ext cx="188775" cy="182466"/>
+          </a:xfrm>
+          <a:prstGeom prst="homePlate">
+            <a:avLst>
+              <a:gd name="adj" fmla="val 50000"/>
+            </a:avLst>
+          </a:prstGeom>
+          <a:noFill/>
+          <a:ln w="12700" cap="flat" cmpd="sng" algn="ctr">
+            <a:solidFill>
+              <a:schemeClr val="bg1">
+                <a:lumMod val="74901"/>
+              </a:schemeClr>
+            </a:solidFill>
+            <a:prstDash val="solid"/>
+            <a:miter lim="800000"/>
+          </a:ln>
+        </p:spPr>
+        <p:style>
+          <a:lnRef idx="2">
+            <a:schemeClr val="accent1">
+              <a:shade val="50000"/>
+            </a:schemeClr>
+          </a:lnRef>
+          <a:fillRef idx="1">
+            <a:schemeClr val="accent1"/>
+          </a:fillRef>
+          <a:effectRef idx="0">
+            <a:schemeClr val="accent1"/>
+          </a:effectRef>
+          <a:fontRef idx="minor">
+            <a:schemeClr val="lt1"/>
+          </a:fontRef>
+        </p:style>
+      </p:sp>
+      <p:sp>
+        <p:nvSpPr>
+          <p:cNvPr id="137954018" name="Flèche : pentagone 905284374"/>
+          <p:cNvSpPr/>
+          <p:nvPr/>
+        </p:nvSpPr>
+        <p:spPr bwMode="auto">
+          <a:xfrm>
+            <a:off x="2866077" y="5977432"/>
+            <a:ext cx="188775" cy="182466"/>
+          </a:xfrm>
+          <a:prstGeom prst="homePlate">
+            <a:avLst>
+              <a:gd name="adj" fmla="val 50000"/>
+            </a:avLst>
+          </a:prstGeom>
+          <a:noFill/>
+          <a:ln w="12700" cap="flat" cmpd="sng" algn="ctr">
+            <a:solidFill>
+              <a:schemeClr val="bg1">
+                <a:lumMod val="74901"/>
+              </a:schemeClr>
+            </a:solidFill>
+            <a:prstDash val="solid"/>
+            <a:miter lim="800000"/>
+          </a:ln>
+        </p:spPr>
+        <p:style>
+          <a:lnRef idx="2">
+            <a:schemeClr val="accent1">
+              <a:shade val="50000"/>
+            </a:schemeClr>
+          </a:lnRef>
+          <a:fillRef idx="1">
+            <a:schemeClr val="accent1"/>
+          </a:fillRef>
+          <a:effectRef idx="0">
+            <a:schemeClr val="accent1"/>
+          </a:effectRef>
+          <a:fontRef idx="minor">
+            <a:schemeClr val="lt1"/>
+          </a:fontRef>
+        </p:style>
+      </p:sp>
+      <p:sp>
+        <p:nvSpPr>
+          <p:cNvPr id="245861856" name="Flèche : pentagone 1880610112"/>
+          <p:cNvSpPr/>
+          <p:nvPr/>
+        </p:nvSpPr>
+        <p:spPr bwMode="auto">
+          <a:xfrm>
+            <a:off x="3054853" y="5977432"/>
             <a:ext cx="188775" cy="182467"/>
           </a:xfrm>
           <a:prstGeom prst="homePlate">
@@ -9609,13 +9053,13 @@
       </p:sp>
       <p:sp>
         <p:nvSpPr>
-          <p:cNvPr id="762810976" name="Flèche : pentagone 446859139"/>
+          <p:cNvPr id="2098114432" name="Flèche : pentagone 446859139"/>
           <p:cNvSpPr/>
           <p:nvPr/>
         </p:nvSpPr>
         <p:spPr bwMode="auto">
           <a:xfrm>
-            <a:off x="2739366" y="5977434"/>
+            <a:off x="3243628" y="5977432"/>
             <a:ext cx="188775" cy="182466"/>
           </a:xfrm>
           <a:prstGeom prst="homePlate">
@@ -9653,13 +9097,13 @@
       </p:sp>
       <p:sp>
         <p:nvSpPr>
-          <p:cNvPr id="1680469240" name="Flèche : pentagone 2055848356"/>
+          <p:cNvPr id="1204851735" name="Flèche : pentagone 2055848356"/>
           <p:cNvSpPr/>
           <p:nvPr/>
         </p:nvSpPr>
         <p:spPr bwMode="auto">
           <a:xfrm>
-            <a:off x="2928144" y="5977434"/>
+            <a:off x="3505678" y="5977432"/>
             <a:ext cx="188775" cy="182466"/>
           </a:xfrm>
           <a:prstGeom prst="homePlate">
@@ -9667,7 +9111,12 @@
               <a:gd name="adj" fmla="val 50000"/>
             </a:avLst>
           </a:prstGeom>
-          <a:noFill/>
+          <a:solidFill>
+            <a:schemeClr val="bg1">
+              <a:lumMod val="75000"/>
+              <a:alpha val="72999"/>
+            </a:schemeClr>
+          </a:solidFill>
           <a:ln w="12700" cap="flat" cmpd="sng" algn="ctr">
             <a:solidFill>
               <a:schemeClr val="bg1">
@@ -9697,13 +9146,13 @@
       </p:sp>
       <p:sp>
         <p:nvSpPr>
-          <p:cNvPr id="135137532" name="Flèche : pentagone 1980093981"/>
+          <p:cNvPr id="427319200" name="Flèche : pentagone 1980093981"/>
           <p:cNvSpPr/>
           <p:nvPr/>
         </p:nvSpPr>
         <p:spPr bwMode="auto">
           <a:xfrm>
-            <a:off x="3116919" y="5977434"/>
+            <a:off x="3694453" y="5977432"/>
             <a:ext cx="188775" cy="182466"/>
           </a:xfrm>
           <a:prstGeom prst="homePlate">
@@ -9711,7 +9160,12 @@
               <a:gd name="adj" fmla="val 50000"/>
             </a:avLst>
           </a:prstGeom>
-          <a:noFill/>
+          <a:solidFill>
+            <a:schemeClr val="bg1">
+              <a:lumMod val="75000"/>
+              <a:alpha val="72999"/>
+            </a:schemeClr>
+          </a:solidFill>
           <a:ln w="12700" cap="flat" cmpd="sng" algn="ctr">
             <a:solidFill>
               <a:schemeClr val="bg1">
@@ -9741,13 +9195,13 @@
       </p:sp>
       <p:sp>
         <p:nvSpPr>
-          <p:cNvPr id="667786963" name="Flèche : pentagone 905284374"/>
+          <p:cNvPr id="1532360509" name="Flèche : pentagone 905284374"/>
           <p:cNvSpPr/>
           <p:nvPr/>
         </p:nvSpPr>
         <p:spPr bwMode="auto">
           <a:xfrm>
-            <a:off x="3305693" y="5977434"/>
+            <a:off x="3956497" y="5977432"/>
             <a:ext cx="188775" cy="182466"/>
           </a:xfrm>
           <a:prstGeom prst="homePlate">
@@ -9755,7 +9209,12 @@
               <a:gd name="adj" fmla="val 50000"/>
             </a:avLst>
           </a:prstGeom>
-          <a:noFill/>
+          <a:solidFill>
+            <a:schemeClr val="bg1">
+              <a:lumMod val="75000"/>
+              <a:alpha val="72999"/>
+            </a:schemeClr>
+          </a:solidFill>
           <a:ln w="12700" cap="flat" cmpd="sng" algn="ctr">
             <a:solidFill>
               <a:schemeClr val="bg1">
@@ -9783,236 +9242,16 @@
           </a:fontRef>
         </p:style>
       </p:sp>
-      <p:sp>
-        <p:nvSpPr>
-          <p:cNvPr id="973877689" name="Flèche : pentagone 1880610112"/>
-          <p:cNvSpPr/>
-          <p:nvPr/>
-        </p:nvSpPr>
-        <p:spPr bwMode="auto">
-          <a:xfrm>
-            <a:off x="3494469" y="5977434"/>
-            <a:ext cx="188775" cy="182467"/>
-          </a:xfrm>
-          <a:prstGeom prst="homePlate">
-            <a:avLst>
-              <a:gd name="adj" fmla="val 50000"/>
-            </a:avLst>
-          </a:prstGeom>
-          <a:noFill/>
-          <a:ln w="12700" cap="flat" cmpd="sng" algn="ctr">
-            <a:solidFill>
-              <a:schemeClr val="bg1">
-                <a:lumMod val="74901"/>
-              </a:schemeClr>
-            </a:solidFill>
-            <a:prstDash val="solid"/>
-            <a:miter lim="800000"/>
-          </a:ln>
-        </p:spPr>
-        <p:style>
-          <a:lnRef idx="2">
-            <a:schemeClr val="accent1">
-              <a:shade val="50000"/>
-            </a:schemeClr>
-          </a:lnRef>
-          <a:fillRef idx="1">
-            <a:schemeClr val="accent1"/>
-          </a:fillRef>
-          <a:effectRef idx="0">
-            <a:schemeClr val="accent1"/>
-          </a:effectRef>
-          <a:fontRef idx="minor">
-            <a:schemeClr val="lt1"/>
-          </a:fontRef>
-        </p:style>
-      </p:sp>
-      <p:sp>
-        <p:nvSpPr>
-          <p:cNvPr id="1849378226" name="Flèche : pentagone 446859139"/>
-          <p:cNvSpPr/>
-          <p:nvPr/>
-        </p:nvSpPr>
-        <p:spPr bwMode="auto">
-          <a:xfrm>
-            <a:off x="3683244" y="5977434"/>
-            <a:ext cx="188775" cy="182466"/>
-          </a:xfrm>
-          <a:prstGeom prst="homePlate">
-            <a:avLst>
-              <a:gd name="adj" fmla="val 50000"/>
-            </a:avLst>
-          </a:prstGeom>
-          <a:noFill/>
-          <a:ln w="12700" cap="flat" cmpd="sng" algn="ctr">
-            <a:solidFill>
-              <a:schemeClr val="bg1">
-                <a:lumMod val="74901"/>
-              </a:schemeClr>
-            </a:solidFill>
-            <a:prstDash val="solid"/>
-            <a:miter lim="800000"/>
-          </a:ln>
-        </p:spPr>
-        <p:style>
-          <a:lnRef idx="2">
-            <a:schemeClr val="accent1">
-              <a:shade val="50000"/>
-            </a:schemeClr>
-          </a:lnRef>
-          <a:fillRef idx="1">
-            <a:schemeClr val="accent1"/>
-          </a:fillRef>
-          <a:effectRef idx="0">
-            <a:schemeClr val="accent1"/>
-          </a:effectRef>
-          <a:fontRef idx="minor">
-            <a:schemeClr val="lt1"/>
-          </a:fontRef>
-        </p:style>
-      </p:sp>
-      <p:sp>
-        <p:nvSpPr>
-          <p:cNvPr id="1997608083" name="Flèche : pentagone 2055848356"/>
-          <p:cNvSpPr/>
-          <p:nvPr/>
-        </p:nvSpPr>
-        <p:spPr bwMode="auto">
-          <a:xfrm>
-            <a:off x="3872025" y="5977434"/>
-            <a:ext cx="188775" cy="182466"/>
-          </a:xfrm>
-          <a:prstGeom prst="homePlate">
-            <a:avLst>
-              <a:gd name="adj" fmla="val 50000"/>
-            </a:avLst>
-          </a:prstGeom>
-          <a:noFill/>
-          <a:ln w="12700" cap="flat" cmpd="sng" algn="ctr">
-            <a:solidFill>
-              <a:schemeClr val="bg1">
-                <a:lumMod val="74901"/>
-              </a:schemeClr>
-            </a:solidFill>
-            <a:prstDash val="solid"/>
-            <a:miter lim="800000"/>
-          </a:ln>
-        </p:spPr>
-        <p:style>
-          <a:lnRef idx="2">
-            <a:schemeClr val="accent1">
-              <a:shade val="50000"/>
-            </a:schemeClr>
-          </a:lnRef>
-          <a:fillRef idx="1">
-            <a:schemeClr val="accent1"/>
-          </a:fillRef>
-          <a:effectRef idx="0">
-            <a:schemeClr val="accent1"/>
-          </a:effectRef>
-          <a:fontRef idx="minor">
-            <a:schemeClr val="lt1"/>
-          </a:fontRef>
-        </p:style>
-      </p:sp>
-      <p:sp>
-        <p:nvSpPr>
-          <p:cNvPr id="1196698702" name="Flèche : pentagone 1980093981"/>
-          <p:cNvSpPr/>
-          <p:nvPr/>
-        </p:nvSpPr>
-        <p:spPr bwMode="auto">
-          <a:xfrm>
-            <a:off x="4060800" y="5977434"/>
-            <a:ext cx="188775" cy="182466"/>
-          </a:xfrm>
-          <a:prstGeom prst="homePlate">
-            <a:avLst>
-              <a:gd name="adj" fmla="val 50000"/>
-            </a:avLst>
-          </a:prstGeom>
-          <a:noFill/>
-          <a:ln w="12700" cap="flat" cmpd="sng" algn="ctr">
-            <a:solidFill>
-              <a:schemeClr val="bg1">
-                <a:lumMod val="74901"/>
-              </a:schemeClr>
-            </a:solidFill>
-            <a:prstDash val="solid"/>
-            <a:miter lim="800000"/>
-          </a:ln>
-        </p:spPr>
-        <p:style>
-          <a:lnRef idx="2">
-            <a:schemeClr val="accent1">
-              <a:shade val="50000"/>
-            </a:schemeClr>
-          </a:lnRef>
-          <a:fillRef idx="1">
-            <a:schemeClr val="accent1"/>
-          </a:fillRef>
-          <a:effectRef idx="0">
-            <a:schemeClr val="accent1"/>
-          </a:effectRef>
-          <a:fontRef idx="minor">
-            <a:schemeClr val="lt1"/>
-          </a:fontRef>
-        </p:style>
-      </p:sp>
-      <p:sp>
-        <p:nvSpPr>
-          <p:cNvPr id="1273336765" name="Flèche : pentagone 905284374"/>
-          <p:cNvSpPr/>
-          <p:nvPr/>
-        </p:nvSpPr>
-        <p:spPr bwMode="auto">
-          <a:xfrm>
-            <a:off x="4249575" y="5977434"/>
-            <a:ext cx="188775" cy="182466"/>
-          </a:xfrm>
-          <a:prstGeom prst="homePlate">
-            <a:avLst>
-              <a:gd name="adj" fmla="val 50000"/>
-            </a:avLst>
-          </a:prstGeom>
-          <a:noFill/>
-          <a:ln w="12700" cap="flat" cmpd="sng" algn="ctr">
-            <a:solidFill>
-              <a:schemeClr val="bg1">
-                <a:lumMod val="74901"/>
-              </a:schemeClr>
-            </a:solidFill>
-            <a:prstDash val="solid"/>
-            <a:miter lim="800000"/>
-          </a:ln>
-        </p:spPr>
-        <p:style>
-          <a:lnRef idx="2">
-            <a:schemeClr val="accent1">
-              <a:shade val="50000"/>
-            </a:schemeClr>
-          </a:lnRef>
-          <a:fillRef idx="1">
-            <a:schemeClr val="accent1"/>
-          </a:fillRef>
-          <a:effectRef idx="0">
-            <a:schemeClr val="accent1"/>
-          </a:effectRef>
-          <a:fontRef idx="minor">
-            <a:schemeClr val="lt1"/>
-          </a:fontRef>
-        </p:style>
-      </p:sp>
       <p:cxnSp>
         <p:nvCxnSpPr>
-          <p:cNvPr id="729436316" name="Connecteur droit 806540798"/>
+          <p:cNvPr id="670065936" name="Connecteur droit 806540798"/>
           <p:cNvCxnSpPr/>
           <p:nvPr/>
         </p:nvCxnSpPr>
         <p:spPr bwMode="auto">
           <a:xfrm flipH="0" flipV="1">
-            <a:off x="4733316" y="8357478"/>
-            <a:ext cx="2192727" cy="0"/>
+            <a:off x="4660046" y="8357477"/>
+            <a:ext cx="2135184" cy="0"/>
           </a:xfrm>
           <a:prstGeom prst="line">
             <a:avLst/>
@@ -10046,13 +9285,13 @@
       </p:cxnSp>
       <p:sp>
         <p:nvSpPr>
-          <p:cNvPr id="975670295" name="ZoneTexte 406616703"/>
+          <p:cNvPr id="1458806844" name="ZoneTexte 406616703"/>
           <p:cNvSpPr txBox="1"/>
           <p:nvPr/>
         </p:nvSpPr>
         <p:spPr bwMode="auto">
           <a:xfrm flipH="0" flipV="0">
-            <a:off x="4787347" y="8170164"/>
+            <a:off x="4714077" y="8170164"/>
             <a:ext cx="1447218" cy="366120"/>
           </a:xfrm>
           <a:prstGeom prst="rect">
@@ -10089,13 +9328,13 @@
       </p:sp>
       <p:sp>
         <p:nvSpPr>
-          <p:cNvPr id="1345984351" name=""/>
+          <p:cNvPr id="1122321781" name=""/>
           <p:cNvSpPr txBox="1"/>
           <p:nvPr/>
         </p:nvSpPr>
         <p:spPr bwMode="auto">
           <a:xfrm rot="0" flipH="0" flipV="0">
-            <a:off x="5247907" y="8525760"/>
+            <a:off x="5101368" y="8525759"/>
             <a:ext cx="1381485" cy="594720"/>
           </a:xfrm>
           <a:prstGeom prst="rect">
@@ -10580,13 +9819,13 @@
       </p:sp>
       <p:sp>
         <p:nvSpPr>
-          <p:cNvPr id="612643664" name=""/>
+          <p:cNvPr id="149167253" name=""/>
           <p:cNvSpPr txBox="1"/>
           <p:nvPr/>
         </p:nvSpPr>
         <p:spPr bwMode="auto">
           <a:xfrm rot="0" flipH="0" flipV="0">
-            <a:off x="5247907" y="9247634"/>
+            <a:off x="5101368" y="9247633"/>
             <a:ext cx="1381485" cy="594720"/>
           </a:xfrm>
           <a:prstGeom prst="rect">
@@ -11071,13 +10310,13 @@
       </p:sp>
       <p:sp>
         <p:nvSpPr>
-          <p:cNvPr id="536089919" name="ZoneTexte 1440859034"/>
+          <p:cNvPr id="1905679531" name="ZoneTexte 1440859034"/>
           <p:cNvSpPr txBox="1"/>
           <p:nvPr/>
         </p:nvSpPr>
         <p:spPr bwMode="auto">
           <a:xfrm rot="16199998">
-            <a:off x="4860173" y="8700061"/>
+            <a:off x="4713634" y="8700060"/>
             <a:ext cx="601174" cy="274679"/>
           </a:xfrm>
           <a:prstGeom prst="rect">
@@ -11113,13 +10352,13 @@
       </p:sp>
       <p:sp>
         <p:nvSpPr>
-          <p:cNvPr id="918899322" name="ZoneTexte 1440859034"/>
+          <p:cNvPr id="441820079" name="ZoneTexte 1440859034"/>
           <p:cNvSpPr txBox="1"/>
           <p:nvPr/>
         </p:nvSpPr>
         <p:spPr bwMode="auto">
           <a:xfrm rot="16199998">
-            <a:off x="4904306" y="9416298"/>
+            <a:off x="4757767" y="9416297"/>
             <a:ext cx="522989" cy="274679"/>
           </a:xfrm>
           <a:prstGeom prst="rect">
@@ -11155,13 +10394,13 @@
       </p:sp>
       <p:cxnSp>
         <p:nvCxnSpPr>
-          <p:cNvPr id="1577982127" name=""/>
+          <p:cNvPr id="8580475" name=""/>
           <p:cNvCxnSpPr/>
           <p:nvPr/>
         </p:nvCxnSpPr>
         <p:spPr bwMode="auto">
           <a:xfrm flipH="0" flipV="1">
-            <a:off x="5573414" y="9190971"/>
+            <a:off x="5426875" y="9190971"/>
             <a:ext cx="730472" cy="0"/>
           </a:xfrm>
           <a:prstGeom prst="line">
@@ -11196,14 +10435,14 @@
       </p:cxnSp>
       <p:cxnSp>
         <p:nvCxnSpPr>
-          <p:cNvPr id="295864995" name="Connecteur droit 806540798"/>
+          <p:cNvPr id="1793899453" name="Connecteur droit 806540798"/>
           <p:cNvCxnSpPr/>
           <p:nvPr/>
         </p:nvCxnSpPr>
         <p:spPr bwMode="auto">
           <a:xfrm flipH="0" flipV="1">
-            <a:off x="4710807" y="1795906"/>
-            <a:ext cx="2199065" cy="0"/>
+            <a:off x="4674172" y="2015713"/>
+            <a:ext cx="2157693" cy="0"/>
           </a:xfrm>
           <a:prstGeom prst="line">
             <a:avLst/>
@@ -11237,13 +10476,13 @@
       </p:cxnSp>
       <p:sp>
         <p:nvSpPr>
-          <p:cNvPr id="2132288853" name="ZoneTexte 406616703"/>
+          <p:cNvPr id="1113290954" name="ZoneTexte 406616703"/>
           <p:cNvSpPr txBox="1"/>
           <p:nvPr/>
         </p:nvSpPr>
         <p:spPr bwMode="auto">
           <a:xfrm flipH="0" flipV="0">
-            <a:off x="4744825" y="1612845"/>
+            <a:off x="4708190" y="1832651"/>
             <a:ext cx="875729" cy="366120"/>
           </a:xfrm>
           <a:prstGeom prst="rect">
@@ -11280,14 +10519,14 @@
       </p:sp>
       <p:sp>
         <p:nvSpPr>
-          <p:cNvPr id="1311097024" name=""/>
+          <p:cNvPr id="1342925620" name=""/>
           <p:cNvSpPr txBox="1"/>
           <p:nvPr/>
         </p:nvSpPr>
         <p:spPr bwMode="auto">
           <a:xfrm rot="0" flipH="0" flipV="0">
-            <a:off x="4765437" y="2003615"/>
-            <a:ext cx="1192703" cy="686004"/>
+            <a:off x="4564268" y="2186787"/>
+            <a:ext cx="2163445" cy="884065"/>
           </a:xfrm>
           <a:prstGeom prst="rect">
             <a:avLst/>
@@ -11340,45 +10579,23 @@
                 <a:ea typeface="ComicNeueSansID"/>
                 <a:cs typeface="ComicNeueSansID"/>
               </a:rPr>
-              <a:t> Épuisé</a:t>
-            </a:r>
-            <a:br>
-              <a:rPr lang="fr-FR" sz="1100" b="0" i="0" u="none" strike="noStrike" cap="none" spc="0">
-                <a:solidFill>
-                  <a:schemeClr val="bg1">
-                    <a:lumMod val="65000"/>
-                  </a:schemeClr>
-                </a:solidFill>
-                <a:latin typeface="Cambria Math"/>
-                <a:ea typeface="Cambria Math"/>
-                <a:cs typeface="Cambria Math"/>
-              </a:rPr>
-            </a:br>
-            <a:r>
-              <a:rPr lang="fr-FR" sz="1100" b="0" i="0" u="none" strike="noStrike" cap="none" spc="0">
-                <a:solidFill>
-                  <a:schemeClr val="bg1">
-                    <a:lumMod val="65000"/>
-                  </a:schemeClr>
-                </a:solidFill>
-                <a:latin typeface="Cambria Math"/>
-                <a:ea typeface="Cambria Math"/>
-                <a:cs typeface="Cambria Math"/>
-              </a:rPr>
-              <a:t>▢</a:t>
-            </a:r>
-            <a:r>
-              <a:rPr lang="fr-FR" sz="1100" b="0" i="0" u="none" strike="noStrike" cap="none" spc="0">
-                <a:solidFill>
-                  <a:srgbClr val="000000"/>
+              <a:t> Blessé</a:t>
+            </a:r>
+            <a:r>
+              <a:rPr lang="fr-FR" sz="900" b="0" i="0" u="none" strike="noStrike" cap="none" spc="0">
+                <a:solidFill>
+                  <a:schemeClr val="tx1">
+                    <a:lumMod val="50000"/>
+                    <a:lumOff val="50000"/>
+                  </a:schemeClr>
                 </a:solidFill>
                 <a:latin typeface="ComicNeueSansID"/>
                 <a:ea typeface="ComicNeueSansID"/>
                 <a:cs typeface="ComicNeueSansID"/>
               </a:rPr>
-              <a:t> Blessé</a:t>
-            </a:r>
-            <a:endParaRPr sz="1100">
+              <a:t> (1/2 vigueur max)</a:t>
+            </a:r>
+            <a:endParaRPr sz="900">
               <a:latin typeface="ComicNeueSansID"/>
               <a:cs typeface="ComicNeueSansID"/>
             </a:endParaRPr>
@@ -11427,33 +10644,95 @@
               </a:rPr>
               <a:t> Incapacité</a:t>
             </a:r>
-            <a:endParaRPr sz="1100">
+            <a:r>
+              <a:rPr sz="900">
+                <a:solidFill>
+                  <a:schemeClr val="tx1">
+                    <a:lumMod val="50000"/>
+                    <a:lumOff val="50000"/>
+                  </a:schemeClr>
+                </a:solidFill>
+                <a:latin typeface="ComicNeueSansID"/>
+                <a:cs typeface="ComicNeueSansID"/>
+              </a:rPr>
+              <a:t> (hors jeu)</a:t>
+            </a:r>
+            <a:endParaRPr lang="fr-FR" sz="1100" b="0" i="0" u="none" strike="noStrike" cap="none" spc="0">
+              <a:solidFill>
+                <a:srgbClr val="000000"/>
+              </a:solidFill>
               <a:latin typeface="ComicNeueSansID"/>
+              <a:ea typeface="ComicNeueSansID"/>
               <a:cs typeface="ComicNeueSansID"/>
             </a:endParaRPr>
           </a:p>
-        </p:txBody>
-      </p:sp>
-      <p:sp>
-        <p:nvSpPr>
-          <p:cNvPr id="1470328114" name=""/>
-          <p:cNvSpPr txBox="1"/>
-          <p:nvPr/>
-        </p:nvSpPr>
-        <p:spPr bwMode="auto">
-          <a:xfrm rot="0" flipH="0" flipV="0">
-            <a:off x="5715696" y="2003615"/>
-            <a:ext cx="1152065" cy="686004"/>
-          </a:xfrm>
-          <a:prstGeom prst="rect">
-            <a:avLst/>
-          </a:prstGeom>
-          <a:noFill/>
-        </p:spPr>
-        <p:txBody>
-          <a:bodyPr vertOverflow="overflow" horzOverflow="overflow" vert="horz" wrap="square" lIns="91440" tIns="45720" rIns="91440" bIns="45720" numCol="1" spcCol="0" rtlCol="0" fromWordArt="0" anchor="t" anchorCtr="0" forceAA="0" upright="0" compatLnSpc="0">
-            <a:spAutoFit/>
-          </a:bodyPr>
+          <a:p>
+            <a:pPr marL="0" marR="0" lvl="0" indent="0" algn="l" defTabSz="914400" rtl="0">
+              <a:lnSpc>
+                <a:spcPct val="114999"/>
+              </a:lnSpc>
+              <a:spcBef>
+                <a:spcPts val="0"/>
+              </a:spcBef>
+              <a:spcAft>
+                <a:spcPts val="0"/>
+              </a:spcAft>
+              <a:defRPr lang="fr-FR" b="0" i="0" u="none" strike="noStrike" cap="none" spc="0">
+                <a:solidFill>
+                  <a:srgbClr val="000000"/>
+                </a:solidFill>
+                <a:latin typeface="Arial"/>
+                <a:ea typeface="Arial"/>
+                <a:cs typeface="Arial"/>
+              </a:defRPr>
+            </a:pPr>
+            <a:r>
+              <a:rPr lang="fr-FR" sz="1100" b="0" i="0" u="none" strike="noStrike" cap="none" spc="0">
+                <a:solidFill>
+                  <a:schemeClr val="bg1">
+                    <a:lumMod val="65000"/>
+                  </a:schemeClr>
+                </a:solidFill>
+                <a:latin typeface="Cambria Math"/>
+                <a:ea typeface="Cambria Math"/>
+                <a:cs typeface="Cambria Math"/>
+              </a:rPr>
+              <a:t>▢</a:t>
+            </a:r>
+            <a:r>
+              <a:rPr lang="fr-FR" sz="1100" b="0" i="0" u="none" strike="noStrike" cap="none" spc="0">
+                <a:solidFill>
+                  <a:srgbClr val="000000"/>
+                </a:solidFill>
+                <a:latin typeface="ComicNeueSansID"/>
+                <a:ea typeface="ComicNeueSansID"/>
+                <a:cs typeface="ComicNeueSansID"/>
+              </a:rPr>
+              <a:t> Angoissé</a:t>
+            </a:r>
+            <a:r>
+              <a:rPr lang="fr-FR" sz="900" b="0" i="0" u="none" strike="noStrike" cap="none" spc="0">
+                <a:solidFill>
+                  <a:schemeClr val="tx1">
+                    <a:lumMod val="50000"/>
+                    <a:lumOff val="50000"/>
+                  </a:schemeClr>
+                </a:solidFill>
+                <a:latin typeface="ComicNeueSansID"/>
+                <a:ea typeface="ComicNeueSansID"/>
+                <a:cs typeface="ComicNeueSansID"/>
+              </a:rPr>
+              <a:t> (-2 aptitude -1 énergie)</a:t>
+            </a:r>
+            <a:endParaRPr sz="1100" b="0" i="0" u="none" strike="noStrike" cap="none" spc="0">
+              <a:solidFill>
+                <a:srgbClr val="000000"/>
+              </a:solidFill>
+              <a:latin typeface="ComicNeueSansID"/>
+              <a:ea typeface="ComicNeueSansID"/>
+              <a:cs typeface="ComicNeueSansID"/>
+            </a:endParaRPr>
+          </a:p>
           <a:p>
             <a:pPr marL="0" marR="0" lvl="0" indent="0" algn="l" defTabSz="914400" rtl="0">
               <a:lnSpc>
@@ -11496,120 +10775,32 @@
                 <a:ea typeface="ComicNeueSansID"/>
                 <a:cs typeface="ComicNeueSansID"/>
               </a:rPr>
-              <a:t> </a:t>
-            </a:r>
-            <a:r>
-              <a:rPr lang="fr-FR" sz="1100" b="0" i="0" u="none" strike="noStrike" cap="none" spc="0">
-                <a:solidFill>
-                  <a:srgbClr val="000000"/>
+              <a:t> Brisé</a:t>
+            </a:r>
+            <a:r>
+              <a:rPr lang="fr-FR" sz="900" b="0" i="0" u="none" strike="noStrike" cap="none" spc="0">
+                <a:solidFill>
+                  <a:schemeClr val="tx1">
+                    <a:lumMod val="50000"/>
+                    <a:lumOff val="50000"/>
+                  </a:schemeClr>
                 </a:solidFill>
                 <a:latin typeface="ComicNeueSansID"/>
                 <a:ea typeface="ComicNeueSansID"/>
                 <a:cs typeface="ComicNeueSansID"/>
               </a:rPr>
-              <a:t>Troublé</a:t>
-            </a:r>
-            <a:br>
-              <a:rPr lang="fr-FR" sz="1100" b="0" i="0" u="none" strike="noStrike" cap="none" spc="0">
-                <a:solidFill>
-                  <a:srgbClr val="000000"/>
-                </a:solidFill>
-                <a:latin typeface="ComicNeueSansID"/>
-                <a:ea typeface="ComicNeueSansID"/>
-                <a:cs typeface="ComicNeueSansID"/>
-              </a:rPr>
-            </a:br>
-            <a:r>
-              <a:rPr lang="fr-FR" sz="1100" b="0" i="0" u="none" strike="noStrike" cap="none" spc="0">
-                <a:solidFill>
-                  <a:schemeClr val="bg1">
-                    <a:lumMod val="65000"/>
-                  </a:schemeClr>
-                </a:solidFill>
-                <a:latin typeface="Cambria Math"/>
-                <a:ea typeface="Cambria Math"/>
-                <a:cs typeface="Cambria Math"/>
-              </a:rPr>
-              <a:t>▢</a:t>
-            </a:r>
-            <a:r>
-              <a:rPr lang="fr-FR" sz="1100" b="0" i="0" u="none" strike="noStrike" cap="none" spc="0">
-                <a:solidFill>
-                  <a:srgbClr val="000000"/>
-                </a:solidFill>
-                <a:latin typeface="ComicNeueSansID"/>
-                <a:ea typeface="ComicNeueSansID"/>
-                <a:cs typeface="ComicNeueSansID"/>
-              </a:rPr>
-              <a:t> Démoralisé</a:t>
-            </a:r>
-            <a:endParaRPr lang="fr-FR" sz="1100" b="0" i="0" u="none" strike="noStrike" cap="none" spc="0">
-              <a:solidFill>
-                <a:srgbClr val="000000"/>
-              </a:solidFill>
+              <a:t> (hors jeu)</a:t>
+            </a:r>
+            <a:endParaRPr sz="1100">
               <a:latin typeface="ComicNeueSansID"/>
-              <a:ea typeface="ComicNeueSansID"/>
               <a:cs typeface="ComicNeueSansID"/>
             </a:endParaRPr>
           </a:p>
-          <a:p>
-            <a:pPr marL="0" marR="0" lvl="0" indent="0" algn="l" defTabSz="914400" rtl="0">
-              <a:lnSpc>
-                <a:spcPct val="114999"/>
-              </a:lnSpc>
-              <a:spcBef>
-                <a:spcPts val="0"/>
-              </a:spcBef>
-              <a:spcAft>
-                <a:spcPts val="0"/>
-              </a:spcAft>
-              <a:defRPr lang="fr-FR" sz="1800" b="0" i="0" u="none" strike="noStrike" cap="none" spc="0">
-                <a:solidFill>
-                  <a:srgbClr val="000000"/>
-                </a:solidFill>
-                <a:latin typeface="Arial"/>
-                <a:ea typeface="Arial"/>
-                <a:cs typeface="Arial"/>
-              </a:defRPr>
-            </a:pPr>
-            <a:r>
-              <a:rPr lang="fr-FR" sz="1100" b="0" i="0" u="none" strike="noStrike" cap="none" spc="0">
-                <a:solidFill>
-                  <a:schemeClr val="bg1">
-                    <a:lumMod val="65000"/>
-                  </a:schemeClr>
-                </a:solidFill>
-                <a:latin typeface="Cambria Math"/>
-                <a:ea typeface="Cambria Math"/>
-                <a:cs typeface="Cambria Math"/>
-              </a:rPr>
-              <a:t>▢</a:t>
-            </a:r>
-            <a:r>
-              <a:rPr lang="fr-FR" sz="1100" b="0" i="0" u="none" strike="noStrike" cap="none" spc="0">
-                <a:solidFill>
-                  <a:srgbClr val="000000"/>
-                </a:solidFill>
-                <a:latin typeface="ComicNeueSansID"/>
-                <a:ea typeface="ComicNeueSansID"/>
-                <a:cs typeface="ComicNeueSansID"/>
-              </a:rPr>
-              <a:t> Brisé</a:t>
-            </a:r>
-            <a:endParaRPr lang="fr-FR" sz="1100" b="0" i="0" u="none" strike="noStrike" cap="none" spc="0">
-              <a:solidFill>
-                <a:srgbClr val="000000"/>
-              </a:solidFill>
-              <a:latin typeface="ComicNeueSansID"/>
-              <a:ea typeface="ComicNeueSansID"/>
-              <a:cs typeface="ComicNeueSansID"/>
-            </a:endParaRPr>
-          </a:p>
         </p:txBody>
       </p:sp>
       <p:sp>
         <p:nvSpPr>
-          <p:cNvPr id="699965565" name=""/>
+          <p:cNvPr id="601435318" name=""/>
           <p:cNvSpPr/>
           <p:nvPr/>
         </p:nvSpPr>
@@ -11651,7 +10842,7 @@
       </p:sp>
       <p:sp>
         <p:nvSpPr>
-          <p:cNvPr id="482761280" name=""/>
+          <p:cNvPr id="1108808203" name=""/>
           <p:cNvSpPr/>
           <p:nvPr/>
         </p:nvSpPr>
@@ -11693,7 +10884,7 @@
       </p:sp>
       <p:sp>
         <p:nvSpPr>
-          <p:cNvPr id="2022997315" name=""/>
+          <p:cNvPr id="1809874802" name=""/>
           <p:cNvSpPr/>
           <p:nvPr/>
         </p:nvSpPr>
@@ -11732,6 +10923,2025 @@
             <a:schemeClr val="lt1"/>
           </a:fontRef>
         </p:style>
+      </p:sp>
+      <p:sp>
+        <p:nvSpPr>
+          <p:cNvPr id="976828829" name="ZoneTexte 1302587497"/>
+          <p:cNvSpPr txBox="1"/>
+          <p:nvPr/>
+        </p:nvSpPr>
+        <p:spPr bwMode="auto">
+          <a:xfrm flipH="0" flipV="0">
+            <a:off x="4454364" y="6216493"/>
+            <a:ext cx="2138245" cy="2103480"/>
+          </a:xfrm>
+          <a:prstGeom prst="rect">
+            <a:avLst/>
+          </a:prstGeom>
+          <a:noFill/>
+        </p:spPr>
+        <p:txBody>
+          <a:bodyPr vertOverflow="overflow" horzOverflow="overflow" vert="horz" wrap="square" lIns="91440" tIns="45720" rIns="91440" bIns="45720" numCol="1" spcCol="0" rtlCol="0" fromWordArt="0" anchor="t" anchorCtr="0" forceAA="0" compatLnSpc="0">
+            <a:spAutoFit/>
+          </a:bodyPr>
+          <a:lstStyle/>
+          <a:p>
+            <a:pPr algn="r">
+              <a:lnSpc>
+                <a:spcPct val="150000"/>
+              </a:lnSpc>
+              <a:defRPr/>
+            </a:pPr>
+            <a:r>
+              <a:rPr sz="1000">
+                <a:solidFill>
+                  <a:schemeClr val="bg1">
+                    <a:lumMod val="75000"/>
+                  </a:schemeClr>
+                </a:solidFill>
+                <a:latin typeface="Arial"/>
+                <a:ea typeface="Arial"/>
+                <a:cs typeface="Arial"/>
+              </a:rPr>
+              <a:t>_________________</a:t>
+            </a:r>
+            <a:r>
+              <a:rPr sz="1000">
+                <a:solidFill>
+                  <a:schemeClr val="bg1">
+                    <a:lumMod val="75000"/>
+                  </a:schemeClr>
+                </a:solidFill>
+                <a:latin typeface="Arial"/>
+                <a:ea typeface="Arial"/>
+                <a:cs typeface="Arial"/>
+              </a:rPr>
+              <a:t>  </a:t>
+            </a:r>
+            <a:r>
+              <a:rPr sz="1100">
+                <a:solidFill>
+                  <a:schemeClr val="bg1">
+                    <a:lumMod val="75000"/>
+                  </a:schemeClr>
+                </a:solidFill>
+                <a:latin typeface="Cambria Math"/>
+                <a:ea typeface="Cambria Math"/>
+                <a:cs typeface="Cambria Math"/>
+              </a:rPr>
+              <a:t> </a:t>
+            </a:r>
+            <a:r>
+              <a:rPr sz="1100">
+                <a:solidFill>
+                  <a:schemeClr val="bg1">
+                    <a:lumMod val="65000"/>
+                  </a:schemeClr>
+                </a:solidFill>
+                <a:latin typeface="Cambria Math"/>
+                <a:ea typeface="Cambria Math"/>
+                <a:cs typeface="Cambria Math"/>
+              </a:rPr>
+              <a:t>▢</a:t>
+            </a:r>
+            <a:r>
+              <a:rPr lang="fr-FR" sz="1100" b="0" i="0" u="none" strike="noStrike" cap="none" spc="0">
+                <a:solidFill>
+                  <a:schemeClr val="bg1">
+                    <a:lumMod val="65000"/>
+                  </a:schemeClr>
+                </a:solidFill>
+                <a:latin typeface="Cambria Math"/>
+                <a:ea typeface="Cambria Math"/>
+                <a:cs typeface="Cambria Math"/>
+              </a:rPr>
+              <a:t>▢</a:t>
+            </a:r>
+            <a:r>
+              <a:rPr lang="fr-FR" sz="1100" b="0" i="0" u="none" strike="noStrike" cap="none" spc="0">
+                <a:solidFill>
+                  <a:schemeClr val="bg1">
+                    <a:lumMod val="65000"/>
+                  </a:schemeClr>
+                </a:solidFill>
+                <a:latin typeface="Cambria Math"/>
+                <a:ea typeface="Cambria Math"/>
+                <a:cs typeface="Cambria Math"/>
+              </a:rPr>
+              <a:t>▢</a:t>
+            </a:r>
+            <a:r>
+              <a:rPr lang="fr-FR" sz="1100" b="0" i="0" u="none" strike="noStrike" cap="none" spc="0">
+                <a:solidFill>
+                  <a:schemeClr val="bg1">
+                    <a:lumMod val="65000"/>
+                  </a:schemeClr>
+                </a:solidFill>
+                <a:latin typeface="Cambria Math"/>
+                <a:ea typeface="Cambria Math"/>
+                <a:cs typeface="Cambria Math"/>
+              </a:rPr>
+              <a:t>▢</a:t>
+            </a:r>
+            <a:r>
+              <a:rPr lang="fr-FR" sz="1100" b="0" i="0" u="none" strike="noStrike" cap="none" spc="0">
+                <a:solidFill>
+                  <a:schemeClr val="bg1">
+                    <a:lumMod val="65000"/>
+                  </a:schemeClr>
+                </a:solidFill>
+                <a:latin typeface="Cambria Math"/>
+                <a:ea typeface="Cambria Math"/>
+                <a:cs typeface="Cambria Math"/>
+              </a:rPr>
+              <a:t>▢</a:t>
+            </a:r>
+            <a:endParaRPr lang="fr-FR" sz="1100" b="0" i="0" u="none" strike="noStrike" cap="none" spc="0">
+              <a:solidFill>
+                <a:schemeClr val="bg1">
+                  <a:lumMod val="65000"/>
+                </a:schemeClr>
+              </a:solidFill>
+              <a:latin typeface="Cambria Math"/>
+              <a:ea typeface="Cambria Math"/>
+              <a:cs typeface="Cambria Math"/>
+            </a:endParaRPr>
+          </a:p>
+          <a:p>
+            <a:pPr algn="r">
+              <a:lnSpc>
+                <a:spcPct val="150000"/>
+              </a:lnSpc>
+              <a:defRPr/>
+            </a:pPr>
+            <a:r>
+              <a:rPr lang="fr-FR" sz="1000" b="0" i="0" u="none" strike="noStrike" cap="none" spc="0">
+                <a:solidFill>
+                  <a:schemeClr val="bg1">
+                    <a:lumMod val="75000"/>
+                  </a:schemeClr>
+                </a:solidFill>
+                <a:latin typeface="Arial"/>
+                <a:ea typeface="Arial"/>
+                <a:cs typeface="Arial"/>
+              </a:rPr>
+              <a:t>_________________</a:t>
+            </a:r>
+            <a:r>
+              <a:rPr lang="fr-FR" sz="1000" b="0" i="0" u="none" strike="noStrike" cap="none" spc="0">
+                <a:solidFill>
+                  <a:schemeClr val="bg1">
+                    <a:lumMod val="75000"/>
+                  </a:schemeClr>
+                </a:solidFill>
+                <a:latin typeface="Arial"/>
+                <a:ea typeface="Arial"/>
+                <a:cs typeface="Arial"/>
+              </a:rPr>
+              <a:t>  </a:t>
+            </a:r>
+            <a:r>
+              <a:rPr lang="fr-FR" sz="1000" b="0" i="0" u="none" strike="noStrike" cap="none" spc="0">
+                <a:solidFill>
+                  <a:schemeClr val="bg1">
+                    <a:lumMod val="75000"/>
+                  </a:schemeClr>
+                </a:solidFill>
+                <a:latin typeface="Cambria Math"/>
+                <a:ea typeface="Cambria Math"/>
+                <a:cs typeface="Cambria Math"/>
+              </a:rPr>
+              <a:t> </a:t>
+            </a:r>
+            <a:r>
+              <a:rPr lang="fr-FR" sz="1100" b="0" i="0" u="none" strike="noStrike" cap="none" spc="0">
+                <a:solidFill>
+                  <a:schemeClr val="bg1">
+                    <a:lumMod val="65000"/>
+                  </a:schemeClr>
+                </a:solidFill>
+                <a:latin typeface="Cambria Math"/>
+                <a:ea typeface="Cambria Math"/>
+                <a:cs typeface="Cambria Math"/>
+              </a:rPr>
+              <a:t>▢</a:t>
+            </a:r>
+            <a:r>
+              <a:rPr lang="fr-FR" sz="1100" b="0" i="0" u="none" strike="noStrike" cap="none" spc="0">
+                <a:solidFill>
+                  <a:schemeClr val="bg1">
+                    <a:lumMod val="65000"/>
+                  </a:schemeClr>
+                </a:solidFill>
+                <a:latin typeface="Cambria Math"/>
+                <a:ea typeface="Cambria Math"/>
+                <a:cs typeface="Cambria Math"/>
+              </a:rPr>
+              <a:t>▢</a:t>
+            </a:r>
+            <a:r>
+              <a:rPr lang="fr-FR" sz="1100" b="0" i="0" u="none" strike="noStrike" cap="none" spc="0">
+                <a:solidFill>
+                  <a:schemeClr val="bg1">
+                    <a:lumMod val="65000"/>
+                  </a:schemeClr>
+                </a:solidFill>
+                <a:latin typeface="Cambria Math"/>
+                <a:ea typeface="Cambria Math"/>
+                <a:cs typeface="Cambria Math"/>
+              </a:rPr>
+              <a:t>▢</a:t>
+            </a:r>
+            <a:r>
+              <a:rPr lang="fr-FR" sz="1100" b="0" i="0" u="none" strike="noStrike" cap="none" spc="0">
+                <a:solidFill>
+                  <a:schemeClr val="bg1">
+                    <a:lumMod val="65000"/>
+                  </a:schemeClr>
+                </a:solidFill>
+                <a:latin typeface="Cambria Math"/>
+                <a:ea typeface="Cambria Math"/>
+                <a:cs typeface="Cambria Math"/>
+              </a:rPr>
+              <a:t>▢</a:t>
+            </a:r>
+            <a:r>
+              <a:rPr lang="fr-FR" sz="1100" b="0" i="0" u="none" strike="noStrike" cap="none" spc="0">
+                <a:solidFill>
+                  <a:schemeClr val="bg1">
+                    <a:lumMod val="65000"/>
+                  </a:schemeClr>
+                </a:solidFill>
+                <a:latin typeface="Cambria Math"/>
+                <a:ea typeface="Cambria Math"/>
+                <a:cs typeface="Cambria Math"/>
+              </a:rPr>
+              <a:t>▢</a:t>
+            </a:r>
+            <a:br>
+              <a:rPr lang="fr-FR" sz="1100" b="0" i="0" u="none" strike="noStrike" cap="none" spc="0">
+                <a:solidFill>
+                  <a:schemeClr val="bg1">
+                    <a:lumMod val="65000"/>
+                  </a:schemeClr>
+                </a:solidFill>
+                <a:latin typeface="Cambria Math"/>
+                <a:ea typeface="Cambria Math"/>
+                <a:cs typeface="Cambria Math"/>
+              </a:rPr>
+            </a:br>
+            <a:r>
+              <a:rPr lang="fr-FR" sz="1000" b="0" i="0" u="none" strike="noStrike" cap="none" spc="0">
+                <a:solidFill>
+                  <a:schemeClr val="bg1">
+                    <a:lumMod val="75000"/>
+                  </a:schemeClr>
+                </a:solidFill>
+                <a:latin typeface="Arial"/>
+                <a:ea typeface="Arial"/>
+                <a:cs typeface="Arial"/>
+              </a:rPr>
+              <a:t>_________________</a:t>
+            </a:r>
+            <a:r>
+              <a:rPr lang="fr-FR" sz="1000" b="0" i="0" u="none" strike="noStrike" cap="none" spc="0">
+                <a:solidFill>
+                  <a:schemeClr val="bg1">
+                    <a:lumMod val="75000"/>
+                  </a:schemeClr>
+                </a:solidFill>
+                <a:latin typeface="Arial"/>
+                <a:ea typeface="Arial"/>
+                <a:cs typeface="Arial"/>
+              </a:rPr>
+              <a:t>  </a:t>
+            </a:r>
+            <a:r>
+              <a:rPr lang="fr-FR" sz="1000" b="0" i="0" u="none" strike="noStrike" cap="none" spc="0">
+                <a:solidFill>
+                  <a:schemeClr val="bg1">
+                    <a:lumMod val="75000"/>
+                  </a:schemeClr>
+                </a:solidFill>
+                <a:latin typeface="Cambria Math"/>
+                <a:ea typeface="Cambria Math"/>
+                <a:cs typeface="Cambria Math"/>
+              </a:rPr>
+              <a:t> </a:t>
+            </a:r>
+            <a:r>
+              <a:rPr lang="fr-FR" sz="1100" b="0" i="0" u="none" strike="noStrike" cap="none" spc="0">
+                <a:solidFill>
+                  <a:schemeClr val="bg1">
+                    <a:lumMod val="65000"/>
+                  </a:schemeClr>
+                </a:solidFill>
+                <a:latin typeface="Cambria Math"/>
+                <a:ea typeface="Cambria Math"/>
+                <a:cs typeface="Cambria Math"/>
+              </a:rPr>
+              <a:t>▢</a:t>
+            </a:r>
+            <a:r>
+              <a:rPr lang="fr-FR" sz="1100" b="0" i="0" u="none" strike="noStrike" cap="none" spc="0">
+                <a:solidFill>
+                  <a:schemeClr val="bg1">
+                    <a:lumMod val="65000"/>
+                  </a:schemeClr>
+                </a:solidFill>
+                <a:latin typeface="Cambria Math"/>
+                <a:ea typeface="Cambria Math"/>
+                <a:cs typeface="Cambria Math"/>
+              </a:rPr>
+              <a:t>▢</a:t>
+            </a:r>
+            <a:r>
+              <a:rPr lang="fr-FR" sz="1100" b="0" i="0" u="none" strike="noStrike" cap="none" spc="0">
+                <a:solidFill>
+                  <a:schemeClr val="bg1">
+                    <a:lumMod val="65000"/>
+                  </a:schemeClr>
+                </a:solidFill>
+                <a:latin typeface="Cambria Math"/>
+                <a:ea typeface="Cambria Math"/>
+                <a:cs typeface="Cambria Math"/>
+              </a:rPr>
+              <a:t>▢</a:t>
+            </a:r>
+            <a:r>
+              <a:rPr lang="fr-FR" sz="1100" b="0" i="0" u="none" strike="noStrike" cap="none" spc="0">
+                <a:solidFill>
+                  <a:schemeClr val="bg1">
+                    <a:lumMod val="65000"/>
+                  </a:schemeClr>
+                </a:solidFill>
+                <a:latin typeface="Cambria Math"/>
+                <a:ea typeface="Cambria Math"/>
+                <a:cs typeface="Cambria Math"/>
+              </a:rPr>
+              <a:t>▢</a:t>
+            </a:r>
+            <a:r>
+              <a:rPr lang="fr-FR" sz="1100" b="0" i="0" u="none" strike="noStrike" cap="none" spc="0">
+                <a:solidFill>
+                  <a:schemeClr val="bg1">
+                    <a:lumMod val="65000"/>
+                  </a:schemeClr>
+                </a:solidFill>
+                <a:latin typeface="Cambria Math"/>
+                <a:ea typeface="Cambria Math"/>
+                <a:cs typeface="Cambria Math"/>
+              </a:rPr>
+              <a:t>▢</a:t>
+            </a:r>
+            <a:endParaRPr sz="1100" b="0" i="0" u="none" strike="noStrike" cap="none" spc="0">
+              <a:solidFill>
+                <a:schemeClr val="bg1">
+                  <a:lumMod val="65000"/>
+                </a:schemeClr>
+              </a:solidFill>
+              <a:latin typeface="Cambria Math"/>
+              <a:ea typeface="Cambria Math"/>
+              <a:cs typeface="Cambria Math"/>
+            </a:endParaRPr>
+          </a:p>
+          <a:p>
+            <a:pPr algn="r">
+              <a:lnSpc>
+                <a:spcPct val="150000"/>
+              </a:lnSpc>
+              <a:defRPr/>
+            </a:pPr>
+            <a:r>
+              <a:rPr lang="fr-FR" sz="1000" b="0" i="0" u="none" strike="noStrike" cap="none" spc="0">
+                <a:solidFill>
+                  <a:schemeClr val="bg1">
+                    <a:lumMod val="75000"/>
+                  </a:schemeClr>
+                </a:solidFill>
+                <a:latin typeface="Arial"/>
+                <a:ea typeface="Arial"/>
+                <a:cs typeface="Arial"/>
+              </a:rPr>
+              <a:t>_________________</a:t>
+            </a:r>
+            <a:r>
+              <a:rPr lang="fr-FR" sz="1000" b="0" i="0" u="none" strike="noStrike" cap="none" spc="0">
+                <a:solidFill>
+                  <a:schemeClr val="bg1">
+                    <a:lumMod val="75000"/>
+                  </a:schemeClr>
+                </a:solidFill>
+                <a:latin typeface="Arial"/>
+                <a:ea typeface="Arial"/>
+                <a:cs typeface="Arial"/>
+              </a:rPr>
+              <a:t>  </a:t>
+            </a:r>
+            <a:r>
+              <a:rPr lang="fr-FR" sz="1000" b="0" i="0" u="none" strike="noStrike" cap="none" spc="0">
+                <a:solidFill>
+                  <a:schemeClr val="bg1">
+                    <a:lumMod val="75000"/>
+                  </a:schemeClr>
+                </a:solidFill>
+                <a:latin typeface="Cambria Math"/>
+                <a:ea typeface="Cambria Math"/>
+                <a:cs typeface="Cambria Math"/>
+              </a:rPr>
+              <a:t> </a:t>
+            </a:r>
+            <a:r>
+              <a:rPr lang="fr-FR" sz="1100" b="0" i="0" u="none" strike="noStrike" cap="none" spc="0">
+                <a:solidFill>
+                  <a:schemeClr val="bg1">
+                    <a:lumMod val="65000"/>
+                  </a:schemeClr>
+                </a:solidFill>
+                <a:latin typeface="Cambria Math"/>
+                <a:ea typeface="Cambria Math"/>
+                <a:cs typeface="Cambria Math"/>
+              </a:rPr>
+              <a:t>▢</a:t>
+            </a:r>
+            <a:r>
+              <a:rPr lang="fr-FR" sz="1100" b="0" i="0" u="none" strike="noStrike" cap="none" spc="0">
+                <a:solidFill>
+                  <a:schemeClr val="bg1">
+                    <a:lumMod val="65000"/>
+                  </a:schemeClr>
+                </a:solidFill>
+                <a:latin typeface="Cambria Math"/>
+                <a:ea typeface="Cambria Math"/>
+                <a:cs typeface="Cambria Math"/>
+              </a:rPr>
+              <a:t>▢</a:t>
+            </a:r>
+            <a:r>
+              <a:rPr lang="fr-FR" sz="1100" b="0" i="0" u="none" strike="noStrike" cap="none" spc="0">
+                <a:solidFill>
+                  <a:schemeClr val="bg1">
+                    <a:lumMod val="65000"/>
+                  </a:schemeClr>
+                </a:solidFill>
+                <a:latin typeface="Cambria Math"/>
+                <a:ea typeface="Cambria Math"/>
+                <a:cs typeface="Cambria Math"/>
+              </a:rPr>
+              <a:t>▢</a:t>
+            </a:r>
+            <a:r>
+              <a:rPr lang="fr-FR" sz="1100" b="0" i="0" u="none" strike="noStrike" cap="none" spc="0">
+                <a:solidFill>
+                  <a:schemeClr val="bg1">
+                    <a:lumMod val="65000"/>
+                  </a:schemeClr>
+                </a:solidFill>
+                <a:latin typeface="Cambria Math"/>
+                <a:ea typeface="Cambria Math"/>
+                <a:cs typeface="Cambria Math"/>
+              </a:rPr>
+              <a:t>▢</a:t>
+            </a:r>
+            <a:r>
+              <a:rPr lang="fr-FR" sz="1100" b="0" i="0" u="none" strike="noStrike" cap="none" spc="0">
+                <a:solidFill>
+                  <a:schemeClr val="bg1">
+                    <a:lumMod val="65000"/>
+                  </a:schemeClr>
+                </a:solidFill>
+                <a:latin typeface="Cambria Math"/>
+                <a:ea typeface="Cambria Math"/>
+                <a:cs typeface="Cambria Math"/>
+              </a:rPr>
+              <a:t>▢</a:t>
+            </a:r>
+            <a:br>
+              <a:rPr lang="fr-FR" sz="1100" b="0" i="0" u="none" strike="noStrike" cap="none" spc="0">
+                <a:solidFill>
+                  <a:schemeClr val="bg1">
+                    <a:lumMod val="65000"/>
+                  </a:schemeClr>
+                </a:solidFill>
+                <a:latin typeface="Cambria Math"/>
+                <a:ea typeface="Cambria Math"/>
+                <a:cs typeface="Cambria Math"/>
+              </a:rPr>
+            </a:br>
+            <a:r>
+              <a:rPr lang="fr-FR" sz="1000" b="0" i="0" u="none" strike="noStrike" cap="none" spc="0">
+                <a:solidFill>
+                  <a:schemeClr val="bg1">
+                    <a:lumMod val="75000"/>
+                  </a:schemeClr>
+                </a:solidFill>
+                <a:latin typeface="Arial"/>
+                <a:ea typeface="Arial"/>
+                <a:cs typeface="Arial"/>
+              </a:rPr>
+              <a:t>_________________</a:t>
+            </a:r>
+            <a:r>
+              <a:rPr lang="fr-FR" sz="1000" b="0" i="0" u="none" strike="noStrike" cap="none" spc="0">
+                <a:solidFill>
+                  <a:schemeClr val="bg1">
+                    <a:lumMod val="75000"/>
+                  </a:schemeClr>
+                </a:solidFill>
+                <a:latin typeface="Arial"/>
+                <a:ea typeface="Arial"/>
+                <a:cs typeface="Arial"/>
+              </a:rPr>
+              <a:t>  </a:t>
+            </a:r>
+            <a:r>
+              <a:rPr lang="fr-FR" sz="1000" b="0" i="0" u="none" strike="noStrike" cap="none" spc="0">
+                <a:solidFill>
+                  <a:schemeClr val="bg1">
+                    <a:lumMod val="75000"/>
+                  </a:schemeClr>
+                </a:solidFill>
+                <a:latin typeface="Cambria Math"/>
+                <a:ea typeface="Cambria Math"/>
+                <a:cs typeface="Cambria Math"/>
+              </a:rPr>
+              <a:t> </a:t>
+            </a:r>
+            <a:r>
+              <a:rPr lang="fr-FR" sz="1100" b="0" i="0" u="none" strike="noStrike" cap="none" spc="0">
+                <a:solidFill>
+                  <a:schemeClr val="bg1">
+                    <a:lumMod val="65000"/>
+                  </a:schemeClr>
+                </a:solidFill>
+                <a:latin typeface="Cambria Math"/>
+                <a:ea typeface="Cambria Math"/>
+                <a:cs typeface="Cambria Math"/>
+              </a:rPr>
+              <a:t>▢</a:t>
+            </a:r>
+            <a:r>
+              <a:rPr lang="fr-FR" sz="1100" b="0" i="0" u="none" strike="noStrike" cap="none" spc="0">
+                <a:solidFill>
+                  <a:schemeClr val="bg1">
+                    <a:lumMod val="65000"/>
+                  </a:schemeClr>
+                </a:solidFill>
+                <a:latin typeface="Cambria Math"/>
+                <a:ea typeface="Cambria Math"/>
+                <a:cs typeface="Cambria Math"/>
+              </a:rPr>
+              <a:t>▢</a:t>
+            </a:r>
+            <a:r>
+              <a:rPr lang="fr-FR" sz="1100" b="0" i="0" u="none" strike="noStrike" cap="none" spc="0">
+                <a:solidFill>
+                  <a:schemeClr val="bg1">
+                    <a:lumMod val="65000"/>
+                  </a:schemeClr>
+                </a:solidFill>
+                <a:latin typeface="Cambria Math"/>
+                <a:ea typeface="Cambria Math"/>
+                <a:cs typeface="Cambria Math"/>
+              </a:rPr>
+              <a:t>▢</a:t>
+            </a:r>
+            <a:r>
+              <a:rPr lang="fr-FR" sz="1100" b="0" i="0" u="none" strike="noStrike" cap="none" spc="0">
+                <a:solidFill>
+                  <a:schemeClr val="bg1">
+                    <a:lumMod val="65000"/>
+                  </a:schemeClr>
+                </a:solidFill>
+                <a:latin typeface="Cambria Math"/>
+                <a:ea typeface="Cambria Math"/>
+                <a:cs typeface="Cambria Math"/>
+              </a:rPr>
+              <a:t>▢</a:t>
+            </a:r>
+            <a:r>
+              <a:rPr lang="fr-FR" sz="1100" b="0" i="0" u="none" strike="noStrike" cap="none" spc="0">
+                <a:solidFill>
+                  <a:schemeClr val="bg1">
+                    <a:lumMod val="65000"/>
+                  </a:schemeClr>
+                </a:solidFill>
+                <a:latin typeface="Cambria Math"/>
+                <a:ea typeface="Cambria Math"/>
+                <a:cs typeface="Cambria Math"/>
+              </a:rPr>
+              <a:t>▢</a:t>
+            </a:r>
+            <a:endParaRPr sz="1100" b="0" i="0" u="none" strike="noStrike" cap="none" spc="0">
+              <a:solidFill>
+                <a:schemeClr val="bg1">
+                  <a:lumMod val="65000"/>
+                </a:schemeClr>
+              </a:solidFill>
+              <a:latin typeface="Cambria Math"/>
+              <a:ea typeface="Cambria Math"/>
+              <a:cs typeface="Cambria Math"/>
+            </a:endParaRPr>
+          </a:p>
+          <a:p>
+            <a:pPr algn="r">
+              <a:lnSpc>
+                <a:spcPct val="150000"/>
+              </a:lnSpc>
+              <a:defRPr/>
+            </a:pPr>
+            <a:r>
+              <a:rPr lang="fr-FR" sz="1000" b="0" i="0" u="none" strike="noStrike" cap="none" spc="0">
+                <a:solidFill>
+                  <a:schemeClr val="bg1">
+                    <a:lumMod val="75000"/>
+                  </a:schemeClr>
+                </a:solidFill>
+                <a:latin typeface="Arial"/>
+                <a:ea typeface="Arial"/>
+                <a:cs typeface="Arial"/>
+              </a:rPr>
+              <a:t>_________________</a:t>
+            </a:r>
+            <a:r>
+              <a:rPr lang="fr-FR" sz="1000" b="0" i="0" u="none" strike="noStrike" cap="none" spc="0">
+                <a:solidFill>
+                  <a:schemeClr val="bg1">
+                    <a:lumMod val="75000"/>
+                  </a:schemeClr>
+                </a:solidFill>
+                <a:latin typeface="Arial"/>
+                <a:ea typeface="Arial"/>
+                <a:cs typeface="Arial"/>
+              </a:rPr>
+              <a:t>  </a:t>
+            </a:r>
+            <a:r>
+              <a:rPr lang="fr-FR" sz="1000" b="0" i="0" u="none" strike="noStrike" cap="none" spc="0">
+                <a:solidFill>
+                  <a:schemeClr val="bg1">
+                    <a:lumMod val="75000"/>
+                  </a:schemeClr>
+                </a:solidFill>
+                <a:latin typeface="Cambria Math"/>
+                <a:ea typeface="Cambria Math"/>
+                <a:cs typeface="Cambria Math"/>
+              </a:rPr>
+              <a:t> </a:t>
+            </a:r>
+            <a:r>
+              <a:rPr lang="fr-FR" sz="1100" b="0" i="0" u="none" strike="noStrike" cap="none" spc="0">
+                <a:solidFill>
+                  <a:schemeClr val="bg1">
+                    <a:lumMod val="65000"/>
+                  </a:schemeClr>
+                </a:solidFill>
+                <a:latin typeface="Cambria Math"/>
+                <a:ea typeface="Cambria Math"/>
+                <a:cs typeface="Cambria Math"/>
+              </a:rPr>
+              <a:t>▢</a:t>
+            </a:r>
+            <a:r>
+              <a:rPr lang="fr-FR" sz="1100" b="0" i="0" u="none" strike="noStrike" cap="none" spc="0">
+                <a:solidFill>
+                  <a:schemeClr val="bg1">
+                    <a:lumMod val="65000"/>
+                  </a:schemeClr>
+                </a:solidFill>
+                <a:latin typeface="Cambria Math"/>
+                <a:ea typeface="Cambria Math"/>
+                <a:cs typeface="Cambria Math"/>
+              </a:rPr>
+              <a:t>▢</a:t>
+            </a:r>
+            <a:r>
+              <a:rPr lang="fr-FR" sz="1100" b="0" i="0" u="none" strike="noStrike" cap="none" spc="0">
+                <a:solidFill>
+                  <a:schemeClr val="bg1">
+                    <a:lumMod val="65000"/>
+                  </a:schemeClr>
+                </a:solidFill>
+                <a:latin typeface="Cambria Math"/>
+                <a:ea typeface="Cambria Math"/>
+                <a:cs typeface="Cambria Math"/>
+              </a:rPr>
+              <a:t>▢</a:t>
+            </a:r>
+            <a:r>
+              <a:rPr lang="fr-FR" sz="1100" b="0" i="0" u="none" strike="noStrike" cap="none" spc="0">
+                <a:solidFill>
+                  <a:schemeClr val="bg1">
+                    <a:lumMod val="65000"/>
+                  </a:schemeClr>
+                </a:solidFill>
+                <a:latin typeface="Cambria Math"/>
+                <a:ea typeface="Cambria Math"/>
+                <a:cs typeface="Cambria Math"/>
+              </a:rPr>
+              <a:t>▢</a:t>
+            </a:r>
+            <a:r>
+              <a:rPr lang="fr-FR" sz="1100" b="0" i="0" u="none" strike="noStrike" cap="none" spc="0">
+                <a:solidFill>
+                  <a:schemeClr val="bg1">
+                    <a:lumMod val="65000"/>
+                  </a:schemeClr>
+                </a:solidFill>
+                <a:latin typeface="Cambria Math"/>
+                <a:ea typeface="Cambria Math"/>
+                <a:cs typeface="Cambria Math"/>
+              </a:rPr>
+              <a:t>▢</a:t>
+            </a:r>
+            <a:br>
+              <a:rPr lang="fr-FR" sz="1100" b="0" i="0" u="none" strike="noStrike" cap="none" spc="0">
+                <a:solidFill>
+                  <a:schemeClr val="bg1">
+                    <a:lumMod val="65000"/>
+                  </a:schemeClr>
+                </a:solidFill>
+                <a:latin typeface="Cambria Math"/>
+                <a:ea typeface="Cambria Math"/>
+                <a:cs typeface="Cambria Math"/>
+              </a:rPr>
+            </a:br>
+            <a:r>
+              <a:rPr lang="fr-FR" sz="1000" b="0" i="0" u="none" strike="noStrike" cap="none" spc="0">
+                <a:solidFill>
+                  <a:schemeClr val="bg1">
+                    <a:lumMod val="75000"/>
+                  </a:schemeClr>
+                </a:solidFill>
+                <a:latin typeface="Arial"/>
+                <a:ea typeface="Arial"/>
+                <a:cs typeface="Arial"/>
+              </a:rPr>
+              <a:t>_________________</a:t>
+            </a:r>
+            <a:r>
+              <a:rPr lang="fr-FR" sz="1000" b="0" i="0" u="none" strike="noStrike" cap="none" spc="0">
+                <a:solidFill>
+                  <a:schemeClr val="bg1">
+                    <a:lumMod val="75000"/>
+                  </a:schemeClr>
+                </a:solidFill>
+                <a:latin typeface="Arial"/>
+                <a:ea typeface="Arial"/>
+                <a:cs typeface="Arial"/>
+              </a:rPr>
+              <a:t>  </a:t>
+            </a:r>
+            <a:r>
+              <a:rPr lang="fr-FR" sz="1000" b="0" i="0" u="none" strike="noStrike" cap="none" spc="0">
+                <a:solidFill>
+                  <a:schemeClr val="bg1">
+                    <a:lumMod val="75000"/>
+                  </a:schemeClr>
+                </a:solidFill>
+                <a:latin typeface="Cambria Math"/>
+                <a:ea typeface="Cambria Math"/>
+                <a:cs typeface="Cambria Math"/>
+              </a:rPr>
+              <a:t> </a:t>
+            </a:r>
+            <a:r>
+              <a:rPr lang="fr-FR" sz="1100" b="0" i="0" u="none" strike="noStrike" cap="none" spc="0">
+                <a:solidFill>
+                  <a:schemeClr val="bg1">
+                    <a:lumMod val="65000"/>
+                  </a:schemeClr>
+                </a:solidFill>
+                <a:latin typeface="Cambria Math"/>
+                <a:ea typeface="Cambria Math"/>
+                <a:cs typeface="Cambria Math"/>
+              </a:rPr>
+              <a:t>▢</a:t>
+            </a:r>
+            <a:r>
+              <a:rPr lang="fr-FR" sz="1100" b="0" i="0" u="none" strike="noStrike" cap="none" spc="0">
+                <a:solidFill>
+                  <a:schemeClr val="bg1">
+                    <a:lumMod val="65000"/>
+                  </a:schemeClr>
+                </a:solidFill>
+                <a:latin typeface="Cambria Math"/>
+                <a:ea typeface="Cambria Math"/>
+                <a:cs typeface="Cambria Math"/>
+              </a:rPr>
+              <a:t>▢</a:t>
+            </a:r>
+            <a:r>
+              <a:rPr lang="fr-FR" sz="1100" b="0" i="0" u="none" strike="noStrike" cap="none" spc="0">
+                <a:solidFill>
+                  <a:schemeClr val="bg1">
+                    <a:lumMod val="65000"/>
+                  </a:schemeClr>
+                </a:solidFill>
+                <a:latin typeface="Cambria Math"/>
+                <a:ea typeface="Cambria Math"/>
+                <a:cs typeface="Cambria Math"/>
+              </a:rPr>
+              <a:t>▢</a:t>
+            </a:r>
+            <a:r>
+              <a:rPr lang="fr-FR" sz="1100" b="0" i="0" u="none" strike="noStrike" cap="none" spc="0">
+                <a:solidFill>
+                  <a:schemeClr val="bg1">
+                    <a:lumMod val="65000"/>
+                  </a:schemeClr>
+                </a:solidFill>
+                <a:latin typeface="Cambria Math"/>
+                <a:ea typeface="Cambria Math"/>
+                <a:cs typeface="Cambria Math"/>
+              </a:rPr>
+              <a:t>▢</a:t>
+            </a:r>
+            <a:r>
+              <a:rPr lang="fr-FR" sz="1100" b="0" i="0" u="none" strike="noStrike" cap="none" spc="0">
+                <a:solidFill>
+                  <a:schemeClr val="bg1">
+                    <a:lumMod val="65000"/>
+                  </a:schemeClr>
+                </a:solidFill>
+                <a:latin typeface="Cambria Math"/>
+                <a:ea typeface="Cambria Math"/>
+                <a:cs typeface="Cambria Math"/>
+              </a:rPr>
+              <a:t>▢</a:t>
+            </a:r>
+            <a:endParaRPr sz="1100" b="0" i="0" u="none" strike="noStrike" cap="none" spc="0">
+              <a:solidFill>
+                <a:schemeClr val="bg1">
+                  <a:lumMod val="65000"/>
+                </a:schemeClr>
+              </a:solidFill>
+              <a:latin typeface="Cambria Math"/>
+              <a:ea typeface="Cambria Math"/>
+              <a:cs typeface="Cambria Math"/>
+            </a:endParaRPr>
+          </a:p>
+          <a:p>
+            <a:pPr algn="r">
+              <a:lnSpc>
+                <a:spcPct val="150000"/>
+              </a:lnSpc>
+              <a:defRPr/>
+            </a:pPr>
+            <a:r>
+              <a:rPr lang="fr-FR" sz="1000" b="0" i="0" u="none" strike="noStrike" cap="none" spc="0">
+                <a:solidFill>
+                  <a:schemeClr val="bg1">
+                    <a:lumMod val="75000"/>
+                  </a:schemeClr>
+                </a:solidFill>
+                <a:latin typeface="Arial"/>
+                <a:ea typeface="Arial"/>
+                <a:cs typeface="Arial"/>
+              </a:rPr>
+              <a:t>_________________</a:t>
+            </a:r>
+            <a:r>
+              <a:rPr lang="fr-FR" sz="1000" b="0" i="0" u="none" strike="noStrike" cap="none" spc="0">
+                <a:solidFill>
+                  <a:schemeClr val="bg1">
+                    <a:lumMod val="75000"/>
+                  </a:schemeClr>
+                </a:solidFill>
+                <a:latin typeface="Arial"/>
+                <a:ea typeface="Arial"/>
+                <a:cs typeface="Arial"/>
+              </a:rPr>
+              <a:t>  </a:t>
+            </a:r>
+            <a:r>
+              <a:rPr lang="fr-FR" sz="1000" b="0" i="0" u="none" strike="noStrike" cap="none" spc="0">
+                <a:solidFill>
+                  <a:schemeClr val="bg1">
+                    <a:lumMod val="75000"/>
+                  </a:schemeClr>
+                </a:solidFill>
+                <a:latin typeface="Cambria Math"/>
+                <a:ea typeface="Cambria Math"/>
+                <a:cs typeface="Cambria Math"/>
+              </a:rPr>
+              <a:t> </a:t>
+            </a:r>
+            <a:r>
+              <a:rPr lang="fr-FR" sz="1100" b="0" i="0" u="none" strike="noStrike" cap="none" spc="0">
+                <a:solidFill>
+                  <a:schemeClr val="bg1">
+                    <a:lumMod val="65000"/>
+                  </a:schemeClr>
+                </a:solidFill>
+                <a:latin typeface="Cambria Math"/>
+                <a:ea typeface="Cambria Math"/>
+                <a:cs typeface="Cambria Math"/>
+              </a:rPr>
+              <a:t>▢</a:t>
+            </a:r>
+            <a:r>
+              <a:rPr lang="fr-FR" sz="1100" b="0" i="0" u="none" strike="noStrike" cap="none" spc="0">
+                <a:solidFill>
+                  <a:schemeClr val="bg1">
+                    <a:lumMod val="65000"/>
+                  </a:schemeClr>
+                </a:solidFill>
+                <a:latin typeface="Cambria Math"/>
+                <a:ea typeface="Cambria Math"/>
+                <a:cs typeface="Cambria Math"/>
+              </a:rPr>
+              <a:t>▢</a:t>
+            </a:r>
+            <a:r>
+              <a:rPr lang="fr-FR" sz="1100" b="0" i="0" u="none" strike="noStrike" cap="none" spc="0">
+                <a:solidFill>
+                  <a:schemeClr val="bg1">
+                    <a:lumMod val="65000"/>
+                  </a:schemeClr>
+                </a:solidFill>
+                <a:latin typeface="Cambria Math"/>
+                <a:ea typeface="Cambria Math"/>
+                <a:cs typeface="Cambria Math"/>
+              </a:rPr>
+              <a:t>▢</a:t>
+            </a:r>
+            <a:r>
+              <a:rPr lang="fr-FR" sz="1100" b="0" i="0" u="none" strike="noStrike" cap="none" spc="0">
+                <a:solidFill>
+                  <a:schemeClr val="bg1">
+                    <a:lumMod val="65000"/>
+                  </a:schemeClr>
+                </a:solidFill>
+                <a:latin typeface="Cambria Math"/>
+                <a:ea typeface="Cambria Math"/>
+                <a:cs typeface="Cambria Math"/>
+              </a:rPr>
+              <a:t>▢</a:t>
+            </a:r>
+            <a:r>
+              <a:rPr lang="fr-FR" sz="1100" b="0" i="0" u="none" strike="noStrike" cap="none" spc="0">
+                <a:solidFill>
+                  <a:schemeClr val="bg1">
+                    <a:lumMod val="65000"/>
+                  </a:schemeClr>
+                </a:solidFill>
+                <a:latin typeface="Cambria Math"/>
+                <a:ea typeface="Cambria Math"/>
+                <a:cs typeface="Cambria Math"/>
+              </a:rPr>
+              <a:t>▢</a:t>
+            </a:r>
+            <a:endParaRPr sz="1100">
+              <a:solidFill>
+                <a:schemeClr val="bg1">
+                  <a:lumMod val="65000"/>
+                </a:schemeClr>
+              </a:solidFill>
+            </a:endParaRPr>
+          </a:p>
+        </p:txBody>
+      </p:sp>
+      <p:sp>
+        <p:nvSpPr>
+          <p:cNvPr id="1116390754" name=""/>
+          <p:cNvSpPr/>
+          <p:nvPr/>
+        </p:nvSpPr>
+        <p:spPr bwMode="auto">
+          <a:xfrm rot="16199998" flipH="0" flipV="0">
+            <a:off x="5559801" y="1580343"/>
+            <a:ext cx="2416217" cy="204060"/>
+          </a:xfrm>
+          <a:prstGeom prst="snip2SameRect">
+            <a:avLst>
+              <a:gd name="adj1" fmla="val 50000"/>
+              <a:gd name="adj2" fmla="val 0"/>
+            </a:avLst>
+          </a:prstGeom>
+          <a:solidFill>
+            <a:schemeClr val="tx1">
+              <a:lumMod val="50000"/>
+              <a:lumOff val="50000"/>
+            </a:schemeClr>
+          </a:solidFill>
+          <a:ln w="12700" cap="flat" cmpd="sng" algn="ctr">
+            <a:noFill/>
+            <a:prstDash val="solid"/>
+            <a:miter lim="800000"/>
+          </a:ln>
+        </p:spPr>
+        <p:style>
+          <a:lnRef idx="2">
+            <a:schemeClr val="accent1">
+              <a:shade val="50000"/>
+            </a:schemeClr>
+          </a:lnRef>
+          <a:fillRef idx="1">
+            <a:schemeClr val="accent1"/>
+          </a:fillRef>
+          <a:effectRef idx="0">
+            <a:schemeClr val="accent1"/>
+          </a:effectRef>
+          <a:fontRef idx="minor">
+            <a:schemeClr val="lt1"/>
+          </a:fontRef>
+        </p:style>
+        <p:txBody>
+          <a:bodyPr anchor="ctr"/>
+          <a:p>
+            <a:pPr algn="ctr">
+              <a:defRPr/>
+            </a:pPr>
+            <a:r>
+              <a:rPr sz="1400">
+                <a:latin typeface="ComicNeueSansID"/>
+                <a:ea typeface="ComicNeueSansID"/>
+                <a:cs typeface="ComicNeueSansID"/>
+              </a:rPr>
+              <a:t>Énergie dépensée</a:t>
+            </a:r>
+            <a:endParaRPr sz="1400">
+              <a:latin typeface="ComicNeueSansID"/>
+              <a:cs typeface="ComicNeueSansID"/>
+            </a:endParaRPr>
+          </a:p>
+        </p:txBody>
+      </p:sp>
+      <p:sp>
+        <p:nvSpPr>
+          <p:cNvPr id="849452987" name=""/>
+          <p:cNvSpPr/>
+          <p:nvPr/>
+        </p:nvSpPr>
+        <p:spPr bwMode="auto">
+          <a:xfrm rot="16199998" flipH="0" flipV="0">
+            <a:off x="5556239" y="4882560"/>
+            <a:ext cx="2416216" cy="204060"/>
+          </a:xfrm>
+          <a:prstGeom prst="snip2SameRect">
+            <a:avLst>
+              <a:gd name="adj1" fmla="val 50000"/>
+              <a:gd name="adj2" fmla="val 0"/>
+            </a:avLst>
+          </a:prstGeom>
+          <a:solidFill>
+            <a:srgbClr val="E3523F"/>
+          </a:solidFill>
+          <a:ln w="12700" cap="flat" cmpd="sng" algn="ctr">
+            <a:noFill/>
+            <a:prstDash val="solid"/>
+            <a:miter lim="800000"/>
+          </a:ln>
+        </p:spPr>
+        <p:style>
+          <a:lnRef idx="2">
+            <a:schemeClr val="accent1">
+              <a:shade val="50000"/>
+            </a:schemeClr>
+          </a:lnRef>
+          <a:fillRef idx="1">
+            <a:schemeClr val="accent1"/>
+          </a:fillRef>
+          <a:effectRef idx="0">
+            <a:schemeClr val="accent1"/>
+          </a:effectRef>
+          <a:fontRef idx="minor">
+            <a:schemeClr val="lt1"/>
+          </a:fontRef>
+        </p:style>
+        <p:txBody>
+          <a:bodyPr anchor="ctr"/>
+          <a:p>
+            <a:pPr algn="ctr">
+              <a:defRPr/>
+            </a:pPr>
+            <a:r>
+              <a:rPr sz="1400">
+                <a:latin typeface="ComicNeueSansID"/>
+                <a:ea typeface="ComicNeueSansID"/>
+                <a:cs typeface="ComicNeueSansID"/>
+              </a:rPr>
+              <a:t>Énergie disponible</a:t>
+            </a:r>
+            <a:endParaRPr sz="1400">
+              <a:latin typeface="ComicNeueSansID"/>
+              <a:cs typeface="ComicNeueSansID"/>
+            </a:endParaRPr>
+          </a:p>
+        </p:txBody>
+      </p:sp>
+      <p:sp>
+        <p:nvSpPr>
+          <p:cNvPr id="1452214334" name=""/>
+          <p:cNvSpPr/>
+          <p:nvPr/>
+        </p:nvSpPr>
+        <p:spPr bwMode="auto">
+          <a:xfrm rot="16199998" flipH="0" flipV="0">
+            <a:off x="5559801" y="8160447"/>
+            <a:ext cx="2416216" cy="204060"/>
+          </a:xfrm>
+          <a:prstGeom prst="snip2SameRect">
+            <a:avLst>
+              <a:gd name="adj1" fmla="val 50000"/>
+              <a:gd name="adj2" fmla="val 0"/>
+            </a:avLst>
+          </a:prstGeom>
+          <a:ln w="12700" cap="flat" cmpd="sng" algn="ctr">
+            <a:noFill/>
+            <a:prstDash val="solid"/>
+            <a:miter lim="800000"/>
+          </a:ln>
+        </p:spPr>
+        <p:style>
+          <a:lnRef idx="2">
+            <a:schemeClr val="accent1">
+              <a:shade val="50000"/>
+            </a:schemeClr>
+          </a:lnRef>
+          <a:fillRef idx="1">
+            <a:schemeClr val="accent1"/>
+          </a:fillRef>
+          <a:effectRef idx="0">
+            <a:schemeClr val="accent1"/>
+          </a:effectRef>
+          <a:fontRef idx="minor">
+            <a:schemeClr val="lt1"/>
+          </a:fontRef>
+        </p:style>
+        <p:txBody>
+          <a:bodyPr anchor="ctr"/>
+          <a:p>
+            <a:pPr algn="ctr">
+              <a:defRPr/>
+            </a:pPr>
+            <a:r>
+              <a:rPr sz="1400">
+                <a:latin typeface="ComicNeueSansID"/>
+                <a:ea typeface="ComicNeueSansID"/>
+                <a:cs typeface="ComicNeueSansID"/>
+              </a:rPr>
+              <a:t>Énergie en défense</a:t>
+            </a:r>
+            <a:endParaRPr sz="1400">
+              <a:latin typeface="ComicNeueSansID"/>
+              <a:cs typeface="ComicNeueSansID"/>
+            </a:endParaRPr>
+          </a:p>
+        </p:txBody>
+      </p:sp>
+      <p:cxnSp>
+        <p:nvCxnSpPr>
+          <p:cNvPr id="377355351" name=""/>
+          <p:cNvCxnSpPr/>
+          <p:nvPr/>
+        </p:nvCxnSpPr>
+        <p:spPr bwMode="auto">
+          <a:xfrm flipH="0" flipV="1">
+            <a:off x="201157" y="2650825"/>
+            <a:ext cx="1883517" cy="0"/>
+          </a:xfrm>
+          <a:prstGeom prst="line">
+            <a:avLst/>
+          </a:prstGeom>
+          <a:ln w="6350" cap="flat" cmpd="sng" algn="ctr">
+            <a:solidFill>
+              <a:schemeClr val="bg1">
+                <a:lumMod val="74901"/>
+              </a:schemeClr>
+            </a:solidFill>
+            <a:prstDash val="solid"/>
+            <a:miter lim="800000"/>
+          </a:ln>
+        </p:spPr>
+        <p:style>
+          <a:lnRef idx="1">
+            <a:schemeClr val="accent1">
+              <a:shade val="50000"/>
+            </a:schemeClr>
+          </a:lnRef>
+          <a:fillRef idx="0">
+            <a:schemeClr val="accent1"/>
+          </a:fillRef>
+          <a:effectRef idx="0">
+            <a:schemeClr val="accent1"/>
+          </a:effectRef>
+          <a:fontRef idx="minor">
+            <a:schemeClr val="tx1"/>
+          </a:fontRef>
+        </p:style>
+      </p:cxnSp>
+      <p:sp>
+        <p:nvSpPr>
+          <p:cNvPr id="1021040157" name=""/>
+          <p:cNvSpPr txBox="1"/>
+          <p:nvPr/>
+        </p:nvSpPr>
+        <p:spPr bwMode="auto">
+          <a:xfrm rot="0" flipH="0" flipV="0">
+            <a:off x="63870" y="3133752"/>
+            <a:ext cx="2164357" cy="280644"/>
+          </a:xfrm>
+          <a:prstGeom prst="rect">
+            <a:avLst/>
+          </a:prstGeom>
+          <a:noFill/>
+        </p:spPr>
+        <p:txBody>
+          <a:bodyPr vertOverflow="overflow" horzOverflow="overflow" vert="horz" wrap="none" lIns="91440" tIns="45720" rIns="91440" bIns="45720" numCol="1" spcCol="0" rtlCol="0" fromWordArt="0" anchor="t" anchorCtr="0" forceAA="0" upright="0" compatLnSpc="0">
+            <a:spAutoFit/>
+          </a:bodyPr>
+          <a:p>
+            <a:pPr>
+              <a:defRPr/>
+            </a:pPr>
+            <a:r>
+              <a:rPr sz="1100">
+                <a:solidFill>
+                  <a:schemeClr val="bg1">
+                    <a:lumMod val="65000"/>
+                  </a:schemeClr>
+                </a:solidFill>
+                <a:latin typeface="ComicNeueSansID"/>
+                <a:ea typeface="ComicNeueSansID"/>
+                <a:cs typeface="ComicNeueSansID"/>
+              </a:rPr>
+              <a:t>Catégorie </a:t>
+            </a:r>
+            <a:r>
+              <a:rPr sz="1200">
+                <a:solidFill>
+                  <a:schemeClr val="bg1">
+                    <a:lumMod val="65000"/>
+                  </a:schemeClr>
+                </a:solidFill>
+                <a:latin typeface="Arial"/>
+                <a:ea typeface="Arial"/>
+                <a:cs typeface="Arial"/>
+              </a:rPr>
+              <a:t>_______ </a:t>
+            </a:r>
+            <a:r>
+              <a:rPr sz="1100">
+                <a:solidFill>
+                  <a:schemeClr val="bg1">
+                    <a:lumMod val="65000"/>
+                  </a:schemeClr>
+                </a:solidFill>
+                <a:latin typeface="ComicNeueSansID"/>
+                <a:ea typeface="ComicNeueSansID"/>
+                <a:cs typeface="ComicNeueSansID"/>
+              </a:rPr>
+              <a:t>Mod</a:t>
+            </a:r>
+            <a:r>
+              <a:rPr sz="1200">
+                <a:solidFill>
+                  <a:schemeClr val="bg1">
+                    <a:lumMod val="65000"/>
+                  </a:schemeClr>
+                </a:solidFill>
+                <a:latin typeface="ComicNeueSansID"/>
+                <a:ea typeface="ComicNeueSansID"/>
+                <a:cs typeface="ComicNeueSansID"/>
+              </a:rPr>
+              <a:t>. </a:t>
+            </a:r>
+            <a:r>
+              <a:rPr sz="1200">
+                <a:solidFill>
+                  <a:schemeClr val="bg1">
+                    <a:lumMod val="65000"/>
+                  </a:schemeClr>
+                </a:solidFill>
+                <a:latin typeface="Arial"/>
+                <a:ea typeface="Arial"/>
+                <a:cs typeface="Arial"/>
+              </a:rPr>
+              <a:t>____</a:t>
+            </a:r>
+            <a:endParaRPr sz="1200">
+              <a:solidFill>
+                <a:schemeClr val="bg1">
+                  <a:lumMod val="65000"/>
+                </a:schemeClr>
+              </a:solidFill>
+              <a:latin typeface="ComicNeueSansID"/>
+              <a:cs typeface="ComicNeueSansID"/>
+            </a:endParaRPr>
+          </a:p>
+        </p:txBody>
+      </p:sp>
+      <p:cxnSp>
+        <p:nvCxnSpPr>
+          <p:cNvPr id="1459609716" name=""/>
+          <p:cNvCxnSpPr/>
+          <p:nvPr/>
+        </p:nvCxnSpPr>
+        <p:spPr bwMode="auto">
+          <a:xfrm flipH="0" flipV="1">
+            <a:off x="208059" y="3701837"/>
+            <a:ext cx="1883517" cy="0"/>
+          </a:xfrm>
+          <a:prstGeom prst="line">
+            <a:avLst/>
+          </a:prstGeom>
+          <a:ln w="6350" cap="flat" cmpd="sng" algn="ctr">
+            <a:solidFill>
+              <a:schemeClr val="bg1">
+                <a:lumMod val="74901"/>
+              </a:schemeClr>
+            </a:solidFill>
+            <a:prstDash val="solid"/>
+            <a:miter lim="800000"/>
+          </a:ln>
+        </p:spPr>
+        <p:style>
+          <a:lnRef idx="1">
+            <a:schemeClr val="accent1">
+              <a:shade val="50000"/>
+            </a:schemeClr>
+          </a:lnRef>
+          <a:fillRef idx="0">
+            <a:schemeClr val="accent1"/>
+          </a:fillRef>
+          <a:effectRef idx="0">
+            <a:schemeClr val="accent1"/>
+          </a:effectRef>
+          <a:fontRef idx="minor">
+            <a:schemeClr val="tx1"/>
+          </a:fontRef>
+        </p:style>
+      </p:cxnSp>
+      <p:sp>
+        <p:nvSpPr>
+          <p:cNvPr id="1097301241" name=""/>
+          <p:cNvSpPr txBox="1"/>
+          <p:nvPr/>
+        </p:nvSpPr>
+        <p:spPr bwMode="auto">
+          <a:xfrm rot="0" flipH="0" flipV="0">
+            <a:off x="70772" y="4184764"/>
+            <a:ext cx="2164357" cy="280644"/>
+          </a:xfrm>
+          <a:prstGeom prst="rect">
+            <a:avLst/>
+          </a:prstGeom>
+          <a:noFill/>
+        </p:spPr>
+        <p:txBody>
+          <a:bodyPr vertOverflow="overflow" horzOverflow="overflow" vert="horz" wrap="none" lIns="91440" tIns="45720" rIns="91440" bIns="45720" numCol="1" spcCol="0" rtlCol="0" fromWordArt="0" anchor="t" anchorCtr="0" forceAA="0" upright="0" compatLnSpc="0">
+            <a:spAutoFit/>
+          </a:bodyPr>
+          <a:p>
+            <a:pPr>
+              <a:defRPr/>
+            </a:pPr>
+            <a:r>
+              <a:rPr sz="1100">
+                <a:solidFill>
+                  <a:schemeClr val="bg1">
+                    <a:lumMod val="65000"/>
+                  </a:schemeClr>
+                </a:solidFill>
+                <a:latin typeface="ComicNeueSansID"/>
+                <a:ea typeface="ComicNeueSansID"/>
+                <a:cs typeface="ComicNeueSansID"/>
+              </a:rPr>
+              <a:t>Catégorie </a:t>
+            </a:r>
+            <a:r>
+              <a:rPr sz="1200">
+                <a:solidFill>
+                  <a:schemeClr val="bg1">
+                    <a:lumMod val="65000"/>
+                  </a:schemeClr>
+                </a:solidFill>
+                <a:latin typeface="Arial"/>
+                <a:ea typeface="Arial"/>
+                <a:cs typeface="Arial"/>
+              </a:rPr>
+              <a:t>_______ </a:t>
+            </a:r>
+            <a:r>
+              <a:rPr sz="1100">
+                <a:solidFill>
+                  <a:schemeClr val="bg1">
+                    <a:lumMod val="65000"/>
+                  </a:schemeClr>
+                </a:solidFill>
+                <a:latin typeface="ComicNeueSansID"/>
+                <a:ea typeface="ComicNeueSansID"/>
+                <a:cs typeface="ComicNeueSansID"/>
+              </a:rPr>
+              <a:t>Mod</a:t>
+            </a:r>
+            <a:r>
+              <a:rPr sz="1200">
+                <a:solidFill>
+                  <a:schemeClr val="bg1">
+                    <a:lumMod val="65000"/>
+                  </a:schemeClr>
+                </a:solidFill>
+                <a:latin typeface="ComicNeueSansID"/>
+                <a:ea typeface="ComicNeueSansID"/>
+                <a:cs typeface="ComicNeueSansID"/>
+              </a:rPr>
+              <a:t>. </a:t>
+            </a:r>
+            <a:r>
+              <a:rPr sz="1200">
+                <a:solidFill>
+                  <a:schemeClr val="bg1">
+                    <a:lumMod val="65000"/>
+                  </a:schemeClr>
+                </a:solidFill>
+                <a:latin typeface="Arial"/>
+                <a:ea typeface="Arial"/>
+                <a:cs typeface="Arial"/>
+              </a:rPr>
+              <a:t>____</a:t>
+            </a:r>
+            <a:endParaRPr sz="1200">
+              <a:solidFill>
+                <a:schemeClr val="bg1">
+                  <a:lumMod val="65000"/>
+                </a:schemeClr>
+              </a:solidFill>
+              <a:latin typeface="ComicNeueSansID"/>
+              <a:cs typeface="ComicNeueSansID"/>
+            </a:endParaRPr>
+          </a:p>
+        </p:txBody>
+      </p:sp>
+      <p:cxnSp>
+        <p:nvCxnSpPr>
+          <p:cNvPr id="178387899" name=""/>
+          <p:cNvCxnSpPr/>
+          <p:nvPr/>
+        </p:nvCxnSpPr>
+        <p:spPr bwMode="auto">
+          <a:xfrm flipH="0" flipV="1">
+            <a:off x="210819" y="4756915"/>
+            <a:ext cx="1883517" cy="0"/>
+          </a:xfrm>
+          <a:prstGeom prst="line">
+            <a:avLst/>
+          </a:prstGeom>
+          <a:ln w="6350" cap="flat" cmpd="sng" algn="ctr">
+            <a:solidFill>
+              <a:schemeClr val="bg1">
+                <a:lumMod val="74901"/>
+              </a:schemeClr>
+            </a:solidFill>
+            <a:prstDash val="solid"/>
+            <a:miter lim="800000"/>
+          </a:ln>
+        </p:spPr>
+        <p:style>
+          <a:lnRef idx="1">
+            <a:schemeClr val="accent1">
+              <a:shade val="50000"/>
+            </a:schemeClr>
+          </a:lnRef>
+          <a:fillRef idx="0">
+            <a:schemeClr val="accent1"/>
+          </a:fillRef>
+          <a:effectRef idx="0">
+            <a:schemeClr val="accent1"/>
+          </a:effectRef>
+          <a:fontRef idx="minor">
+            <a:schemeClr val="tx1"/>
+          </a:fontRef>
+        </p:style>
+      </p:cxnSp>
+      <p:sp>
+        <p:nvSpPr>
+          <p:cNvPr id="916834888" name=""/>
+          <p:cNvSpPr txBox="1"/>
+          <p:nvPr/>
+        </p:nvSpPr>
+        <p:spPr bwMode="auto">
+          <a:xfrm rot="0" flipH="0" flipV="0">
+            <a:off x="73532" y="5239841"/>
+            <a:ext cx="2164357" cy="280644"/>
+          </a:xfrm>
+          <a:prstGeom prst="rect">
+            <a:avLst/>
+          </a:prstGeom>
+          <a:noFill/>
+        </p:spPr>
+        <p:txBody>
+          <a:bodyPr vertOverflow="overflow" horzOverflow="overflow" vert="horz" wrap="none" lIns="91440" tIns="45720" rIns="91440" bIns="45720" numCol="1" spcCol="0" rtlCol="0" fromWordArt="0" anchor="t" anchorCtr="0" forceAA="0" upright="0" compatLnSpc="0">
+            <a:spAutoFit/>
+          </a:bodyPr>
+          <a:p>
+            <a:pPr>
+              <a:defRPr/>
+            </a:pPr>
+            <a:r>
+              <a:rPr sz="1100">
+                <a:solidFill>
+                  <a:schemeClr val="bg1">
+                    <a:lumMod val="65000"/>
+                  </a:schemeClr>
+                </a:solidFill>
+                <a:latin typeface="ComicNeueSansID"/>
+                <a:ea typeface="ComicNeueSansID"/>
+                <a:cs typeface="ComicNeueSansID"/>
+              </a:rPr>
+              <a:t>Catégorie </a:t>
+            </a:r>
+            <a:r>
+              <a:rPr sz="1200">
+                <a:solidFill>
+                  <a:schemeClr val="bg1">
+                    <a:lumMod val="65000"/>
+                  </a:schemeClr>
+                </a:solidFill>
+                <a:latin typeface="Arial"/>
+                <a:ea typeface="Arial"/>
+                <a:cs typeface="Arial"/>
+              </a:rPr>
+              <a:t>_______ </a:t>
+            </a:r>
+            <a:r>
+              <a:rPr sz="1100">
+                <a:solidFill>
+                  <a:schemeClr val="bg1">
+                    <a:lumMod val="65000"/>
+                  </a:schemeClr>
+                </a:solidFill>
+                <a:latin typeface="ComicNeueSansID"/>
+                <a:ea typeface="ComicNeueSansID"/>
+                <a:cs typeface="ComicNeueSansID"/>
+              </a:rPr>
+              <a:t>Mod</a:t>
+            </a:r>
+            <a:r>
+              <a:rPr sz="1200">
+                <a:solidFill>
+                  <a:schemeClr val="bg1">
+                    <a:lumMod val="65000"/>
+                  </a:schemeClr>
+                </a:solidFill>
+                <a:latin typeface="ComicNeueSansID"/>
+                <a:ea typeface="ComicNeueSansID"/>
+                <a:cs typeface="ComicNeueSansID"/>
+              </a:rPr>
+              <a:t>. </a:t>
+            </a:r>
+            <a:r>
+              <a:rPr sz="1200">
+                <a:solidFill>
+                  <a:schemeClr val="bg1">
+                    <a:lumMod val="65000"/>
+                  </a:schemeClr>
+                </a:solidFill>
+                <a:latin typeface="Arial"/>
+                <a:ea typeface="Arial"/>
+                <a:cs typeface="Arial"/>
+              </a:rPr>
+              <a:t>____</a:t>
+            </a:r>
+            <a:endParaRPr sz="1200">
+              <a:solidFill>
+                <a:schemeClr val="bg1">
+                  <a:lumMod val="65000"/>
+                </a:schemeClr>
+              </a:solidFill>
+              <a:latin typeface="ComicNeueSansID"/>
+              <a:cs typeface="ComicNeueSansID"/>
+            </a:endParaRPr>
+          </a:p>
+        </p:txBody>
+      </p:sp>
+      <p:cxnSp>
+        <p:nvCxnSpPr>
+          <p:cNvPr id="482414587" name=""/>
+          <p:cNvCxnSpPr/>
+          <p:nvPr/>
+        </p:nvCxnSpPr>
+        <p:spPr bwMode="auto">
+          <a:xfrm flipH="0" flipV="1">
+            <a:off x="2410760" y="2650149"/>
+            <a:ext cx="1883517" cy="0"/>
+          </a:xfrm>
+          <a:prstGeom prst="line">
+            <a:avLst/>
+          </a:prstGeom>
+          <a:ln w="6350" cap="flat" cmpd="sng" algn="ctr">
+            <a:solidFill>
+              <a:schemeClr val="bg1">
+                <a:lumMod val="74901"/>
+              </a:schemeClr>
+            </a:solidFill>
+            <a:prstDash val="solid"/>
+            <a:miter lim="800000"/>
+          </a:ln>
+        </p:spPr>
+        <p:style>
+          <a:lnRef idx="1">
+            <a:schemeClr val="accent1">
+              <a:shade val="50000"/>
+            </a:schemeClr>
+          </a:lnRef>
+          <a:fillRef idx="0">
+            <a:schemeClr val="accent1"/>
+          </a:fillRef>
+          <a:effectRef idx="0">
+            <a:schemeClr val="accent1"/>
+          </a:effectRef>
+          <a:fontRef idx="minor">
+            <a:schemeClr val="tx1"/>
+          </a:fontRef>
+        </p:style>
+      </p:cxnSp>
+      <p:sp>
+        <p:nvSpPr>
+          <p:cNvPr id="22827875" name=""/>
+          <p:cNvSpPr txBox="1"/>
+          <p:nvPr/>
+        </p:nvSpPr>
+        <p:spPr bwMode="auto">
+          <a:xfrm rot="0" flipH="0" flipV="0">
+            <a:off x="2273473" y="3133076"/>
+            <a:ext cx="2164357" cy="280644"/>
+          </a:xfrm>
+          <a:prstGeom prst="rect">
+            <a:avLst/>
+          </a:prstGeom>
+          <a:noFill/>
+        </p:spPr>
+        <p:txBody>
+          <a:bodyPr vertOverflow="overflow" horzOverflow="overflow" vert="horz" wrap="none" lIns="91440" tIns="45720" rIns="91440" bIns="45720" numCol="1" spcCol="0" rtlCol="0" fromWordArt="0" anchor="t" anchorCtr="0" forceAA="0" upright="0" compatLnSpc="0">
+            <a:spAutoFit/>
+          </a:bodyPr>
+          <a:p>
+            <a:pPr>
+              <a:defRPr/>
+            </a:pPr>
+            <a:r>
+              <a:rPr sz="1100">
+                <a:solidFill>
+                  <a:schemeClr val="bg1">
+                    <a:lumMod val="65000"/>
+                  </a:schemeClr>
+                </a:solidFill>
+                <a:latin typeface="ComicNeueSansID"/>
+                <a:ea typeface="ComicNeueSansID"/>
+                <a:cs typeface="ComicNeueSansID"/>
+              </a:rPr>
+              <a:t>Catégorie </a:t>
+            </a:r>
+            <a:r>
+              <a:rPr sz="1200">
+                <a:solidFill>
+                  <a:schemeClr val="bg1">
+                    <a:lumMod val="65000"/>
+                  </a:schemeClr>
+                </a:solidFill>
+                <a:latin typeface="Arial"/>
+                <a:ea typeface="Arial"/>
+                <a:cs typeface="Arial"/>
+              </a:rPr>
+              <a:t>_______ </a:t>
+            </a:r>
+            <a:r>
+              <a:rPr sz="1100">
+                <a:solidFill>
+                  <a:schemeClr val="bg1">
+                    <a:lumMod val="65000"/>
+                  </a:schemeClr>
+                </a:solidFill>
+                <a:latin typeface="ComicNeueSansID"/>
+                <a:ea typeface="ComicNeueSansID"/>
+                <a:cs typeface="ComicNeueSansID"/>
+              </a:rPr>
+              <a:t>Mod</a:t>
+            </a:r>
+            <a:r>
+              <a:rPr sz="1200">
+                <a:solidFill>
+                  <a:schemeClr val="bg1">
+                    <a:lumMod val="65000"/>
+                  </a:schemeClr>
+                </a:solidFill>
+                <a:latin typeface="ComicNeueSansID"/>
+                <a:ea typeface="ComicNeueSansID"/>
+                <a:cs typeface="ComicNeueSansID"/>
+              </a:rPr>
+              <a:t>. </a:t>
+            </a:r>
+            <a:r>
+              <a:rPr sz="1200">
+                <a:solidFill>
+                  <a:schemeClr val="bg1">
+                    <a:lumMod val="65000"/>
+                  </a:schemeClr>
+                </a:solidFill>
+                <a:latin typeface="Arial"/>
+                <a:ea typeface="Arial"/>
+                <a:cs typeface="Arial"/>
+              </a:rPr>
+              <a:t>____</a:t>
+            </a:r>
+            <a:endParaRPr sz="1200">
+              <a:solidFill>
+                <a:schemeClr val="bg1">
+                  <a:lumMod val="65000"/>
+                </a:schemeClr>
+              </a:solidFill>
+              <a:latin typeface="ComicNeueSansID"/>
+              <a:cs typeface="ComicNeueSansID"/>
+            </a:endParaRPr>
+          </a:p>
+        </p:txBody>
+      </p:sp>
+      <p:cxnSp>
+        <p:nvCxnSpPr>
+          <p:cNvPr id="1962315380" name=""/>
+          <p:cNvCxnSpPr/>
+          <p:nvPr/>
+        </p:nvCxnSpPr>
+        <p:spPr bwMode="auto">
+          <a:xfrm flipH="0" flipV="1">
+            <a:off x="2417663" y="3701162"/>
+            <a:ext cx="1883517" cy="0"/>
+          </a:xfrm>
+          <a:prstGeom prst="line">
+            <a:avLst/>
+          </a:prstGeom>
+          <a:ln w="6350" cap="flat" cmpd="sng" algn="ctr">
+            <a:solidFill>
+              <a:schemeClr val="bg1">
+                <a:lumMod val="74901"/>
+              </a:schemeClr>
+            </a:solidFill>
+            <a:prstDash val="solid"/>
+            <a:miter lim="800000"/>
+          </a:ln>
+        </p:spPr>
+        <p:style>
+          <a:lnRef idx="1">
+            <a:schemeClr val="accent1">
+              <a:shade val="50000"/>
+            </a:schemeClr>
+          </a:lnRef>
+          <a:fillRef idx="0">
+            <a:schemeClr val="accent1"/>
+          </a:fillRef>
+          <a:effectRef idx="0">
+            <a:schemeClr val="accent1"/>
+          </a:effectRef>
+          <a:fontRef idx="minor">
+            <a:schemeClr val="tx1"/>
+          </a:fontRef>
+        </p:style>
+      </p:cxnSp>
+      <p:sp>
+        <p:nvSpPr>
+          <p:cNvPr id="2105878085" name=""/>
+          <p:cNvSpPr txBox="1"/>
+          <p:nvPr/>
+        </p:nvSpPr>
+        <p:spPr bwMode="auto">
+          <a:xfrm rot="0" flipH="0" flipV="0">
+            <a:off x="2280376" y="4184089"/>
+            <a:ext cx="2164357" cy="280644"/>
+          </a:xfrm>
+          <a:prstGeom prst="rect">
+            <a:avLst/>
+          </a:prstGeom>
+          <a:noFill/>
+        </p:spPr>
+        <p:txBody>
+          <a:bodyPr vertOverflow="overflow" horzOverflow="overflow" vert="horz" wrap="none" lIns="91440" tIns="45720" rIns="91440" bIns="45720" numCol="1" spcCol="0" rtlCol="0" fromWordArt="0" anchor="t" anchorCtr="0" forceAA="0" upright="0" compatLnSpc="0">
+            <a:spAutoFit/>
+          </a:bodyPr>
+          <a:p>
+            <a:pPr>
+              <a:defRPr/>
+            </a:pPr>
+            <a:r>
+              <a:rPr sz="1100">
+                <a:solidFill>
+                  <a:schemeClr val="bg1">
+                    <a:lumMod val="65000"/>
+                  </a:schemeClr>
+                </a:solidFill>
+                <a:latin typeface="ComicNeueSansID"/>
+                <a:ea typeface="ComicNeueSansID"/>
+                <a:cs typeface="ComicNeueSansID"/>
+              </a:rPr>
+              <a:t>Catégorie </a:t>
+            </a:r>
+            <a:r>
+              <a:rPr sz="1200">
+                <a:solidFill>
+                  <a:schemeClr val="bg1">
+                    <a:lumMod val="65000"/>
+                  </a:schemeClr>
+                </a:solidFill>
+                <a:latin typeface="Arial"/>
+                <a:ea typeface="Arial"/>
+                <a:cs typeface="Arial"/>
+              </a:rPr>
+              <a:t>_______ </a:t>
+            </a:r>
+            <a:r>
+              <a:rPr sz="1100">
+                <a:solidFill>
+                  <a:schemeClr val="bg1">
+                    <a:lumMod val="65000"/>
+                  </a:schemeClr>
+                </a:solidFill>
+                <a:latin typeface="ComicNeueSansID"/>
+                <a:ea typeface="ComicNeueSansID"/>
+                <a:cs typeface="ComicNeueSansID"/>
+              </a:rPr>
+              <a:t>Mod</a:t>
+            </a:r>
+            <a:r>
+              <a:rPr sz="1200">
+                <a:solidFill>
+                  <a:schemeClr val="bg1">
+                    <a:lumMod val="65000"/>
+                  </a:schemeClr>
+                </a:solidFill>
+                <a:latin typeface="ComicNeueSansID"/>
+                <a:ea typeface="ComicNeueSansID"/>
+                <a:cs typeface="ComicNeueSansID"/>
+              </a:rPr>
+              <a:t>. </a:t>
+            </a:r>
+            <a:r>
+              <a:rPr sz="1200">
+                <a:solidFill>
+                  <a:schemeClr val="bg1">
+                    <a:lumMod val="65000"/>
+                  </a:schemeClr>
+                </a:solidFill>
+                <a:latin typeface="Arial"/>
+                <a:ea typeface="Arial"/>
+                <a:cs typeface="Arial"/>
+              </a:rPr>
+              <a:t>____</a:t>
+            </a:r>
+            <a:endParaRPr sz="1200">
+              <a:solidFill>
+                <a:schemeClr val="bg1">
+                  <a:lumMod val="65000"/>
+                </a:schemeClr>
+              </a:solidFill>
+              <a:latin typeface="ComicNeueSansID"/>
+              <a:cs typeface="ComicNeueSansID"/>
+            </a:endParaRPr>
+          </a:p>
+        </p:txBody>
+      </p:sp>
+      <p:cxnSp>
+        <p:nvCxnSpPr>
+          <p:cNvPr id="499694686" name=""/>
+          <p:cNvCxnSpPr/>
+          <p:nvPr/>
+        </p:nvCxnSpPr>
+        <p:spPr bwMode="auto">
+          <a:xfrm flipH="0" flipV="1">
+            <a:off x="2420422" y="4756239"/>
+            <a:ext cx="1883517" cy="0"/>
+          </a:xfrm>
+          <a:prstGeom prst="line">
+            <a:avLst/>
+          </a:prstGeom>
+          <a:ln w="6350" cap="flat" cmpd="sng" algn="ctr">
+            <a:solidFill>
+              <a:schemeClr val="bg1">
+                <a:lumMod val="74901"/>
+              </a:schemeClr>
+            </a:solidFill>
+            <a:prstDash val="solid"/>
+            <a:miter lim="800000"/>
+          </a:ln>
+        </p:spPr>
+        <p:style>
+          <a:lnRef idx="1">
+            <a:schemeClr val="accent1">
+              <a:shade val="50000"/>
+            </a:schemeClr>
+          </a:lnRef>
+          <a:fillRef idx="0">
+            <a:schemeClr val="accent1"/>
+          </a:fillRef>
+          <a:effectRef idx="0">
+            <a:schemeClr val="accent1"/>
+          </a:effectRef>
+          <a:fontRef idx="minor">
+            <a:schemeClr val="tx1"/>
+          </a:fontRef>
+        </p:style>
+      </p:cxnSp>
+      <p:sp>
+        <p:nvSpPr>
+          <p:cNvPr id="366073030" name=""/>
+          <p:cNvSpPr txBox="1"/>
+          <p:nvPr/>
+        </p:nvSpPr>
+        <p:spPr bwMode="auto">
+          <a:xfrm rot="0" flipH="0" flipV="0">
+            <a:off x="2283135" y="5239166"/>
+            <a:ext cx="2164357" cy="280644"/>
+          </a:xfrm>
+          <a:prstGeom prst="rect">
+            <a:avLst/>
+          </a:prstGeom>
+          <a:noFill/>
+        </p:spPr>
+        <p:txBody>
+          <a:bodyPr vertOverflow="overflow" horzOverflow="overflow" vert="horz" wrap="none" lIns="91440" tIns="45720" rIns="91440" bIns="45720" numCol="1" spcCol="0" rtlCol="0" fromWordArt="0" anchor="t" anchorCtr="0" forceAA="0" upright="0" compatLnSpc="0">
+            <a:spAutoFit/>
+          </a:bodyPr>
+          <a:p>
+            <a:pPr>
+              <a:defRPr/>
+            </a:pPr>
+            <a:r>
+              <a:rPr sz="1100">
+                <a:solidFill>
+                  <a:schemeClr val="bg1">
+                    <a:lumMod val="65000"/>
+                  </a:schemeClr>
+                </a:solidFill>
+                <a:latin typeface="ComicNeueSansID"/>
+                <a:ea typeface="ComicNeueSansID"/>
+                <a:cs typeface="ComicNeueSansID"/>
+              </a:rPr>
+              <a:t>Catégorie </a:t>
+            </a:r>
+            <a:r>
+              <a:rPr sz="1200">
+                <a:solidFill>
+                  <a:schemeClr val="bg1">
+                    <a:lumMod val="65000"/>
+                  </a:schemeClr>
+                </a:solidFill>
+                <a:latin typeface="Arial"/>
+                <a:ea typeface="Arial"/>
+                <a:cs typeface="Arial"/>
+              </a:rPr>
+              <a:t>_______ </a:t>
+            </a:r>
+            <a:r>
+              <a:rPr sz="1100">
+                <a:solidFill>
+                  <a:schemeClr val="bg1">
+                    <a:lumMod val="65000"/>
+                  </a:schemeClr>
+                </a:solidFill>
+                <a:latin typeface="ComicNeueSansID"/>
+                <a:ea typeface="ComicNeueSansID"/>
+                <a:cs typeface="ComicNeueSansID"/>
+              </a:rPr>
+              <a:t>Mod</a:t>
+            </a:r>
+            <a:r>
+              <a:rPr sz="1200">
+                <a:solidFill>
+                  <a:schemeClr val="bg1">
+                    <a:lumMod val="65000"/>
+                  </a:schemeClr>
+                </a:solidFill>
+                <a:latin typeface="ComicNeueSansID"/>
+                <a:ea typeface="ComicNeueSansID"/>
+                <a:cs typeface="ComicNeueSansID"/>
+              </a:rPr>
+              <a:t>. </a:t>
+            </a:r>
+            <a:r>
+              <a:rPr sz="1200">
+                <a:solidFill>
+                  <a:schemeClr val="bg1">
+                    <a:lumMod val="65000"/>
+                  </a:schemeClr>
+                </a:solidFill>
+                <a:latin typeface="Arial"/>
+                <a:ea typeface="Arial"/>
+                <a:cs typeface="Arial"/>
+              </a:rPr>
+              <a:t>____</a:t>
+            </a:r>
+            <a:endParaRPr sz="1200">
+              <a:solidFill>
+                <a:schemeClr val="bg1">
+                  <a:lumMod val="65000"/>
+                </a:schemeClr>
+              </a:solidFill>
+              <a:latin typeface="ComicNeueSansID"/>
+              <a:cs typeface="ComicNeueSansID"/>
+            </a:endParaRPr>
+          </a:p>
+        </p:txBody>
       </p:sp>
     </p:spTree>
   </p:cSld>
